--- a/docs/reports/project-status-2026-06-10.pptx
+++ b/docs/reports/project-status-2026-06-10.pptx
@@ -3295,12 +3295,16 @@
           <a:noFill/>
         </p:spPr>
         <p:txBody>
-          <a:bodyPr wrap="none" lIns="0" rIns="0" tIns="0" bIns="0" anchor="t">
-            <a:spAutoFit/>
-          </a:bodyPr>
-          <a:lstStyle/>
-          <a:p>
-            <a:pPr algn="l"/>
+          <a:bodyPr wrap="square" lIns="0" rIns="0" tIns="0" bIns="0" anchor="t">
+            <a:spAutoFit/>
+          </a:bodyPr>
+          <a:lstStyle/>
+          <a:p>
+            <a:pPr algn="l">
+              <a:spcAft>
+                <a:spcPts val="0"/>
+              </a:spcAft>
+            </a:pPr>
             <a:r>
               <a:rPr sz="4200" b="1" i="0">
                 <a:solidFill>
@@ -3330,12 +3334,16 @@
           <a:noFill/>
         </p:spPr>
         <p:txBody>
-          <a:bodyPr wrap="none" lIns="0" rIns="0" tIns="0" bIns="0" anchor="t">
-            <a:spAutoFit/>
-          </a:bodyPr>
-          <a:lstStyle/>
-          <a:p>
-            <a:pPr algn="l"/>
+          <a:bodyPr wrap="square" lIns="0" rIns="0" tIns="0" bIns="0" anchor="t">
+            <a:spAutoFit/>
+          </a:bodyPr>
+          <a:lstStyle/>
+          <a:p>
+            <a:pPr algn="l">
+              <a:spcAft>
+                <a:spcPts val="0"/>
+              </a:spcAft>
+            </a:pPr>
             <a:r>
               <a:rPr sz="1700" b="0" i="0">
                 <a:solidFill>
@@ -3365,12 +3373,16 @@
           <a:noFill/>
         </p:spPr>
         <p:txBody>
-          <a:bodyPr wrap="none" lIns="0" rIns="0" tIns="0" bIns="0" anchor="t">
-            <a:spAutoFit/>
-          </a:bodyPr>
-          <a:lstStyle/>
-          <a:p>
-            <a:pPr algn="l"/>
+          <a:bodyPr wrap="square" lIns="0" rIns="0" tIns="0" bIns="0" anchor="t">
+            <a:spAutoFit/>
+          </a:bodyPr>
+          <a:lstStyle/>
+          <a:p>
+            <a:pPr algn="l">
+              <a:spcAft>
+                <a:spcPts val="0"/>
+              </a:spcAft>
+            </a:pPr>
             <a:r>
               <a:rPr sz="1500" b="1" i="0">
                 <a:solidFill>
@@ -3392,13 +3404,13 @@
         <p:spPr>
           <a:xfrm>
             <a:off x="713232" y="2971800"/>
-            <a:ext cx="4480560" cy="1115568"/>
+            <a:ext cx="4480560" cy="1207008"/>
           </a:xfrm>
           <a:prstGeom prst="roundRect">
             <a:avLst/>
           </a:prstGeom>
           <a:solidFill>
-            <a:srgbClr val="FFFFFF"/>
+            <a:srgbClr val="21295C"/>
           </a:solidFill>
           <a:ln>
             <a:noFill/>
@@ -3443,12 +3455,16 @@
           <a:noFill/>
         </p:spPr>
         <p:txBody>
-          <a:bodyPr wrap="none" lIns="0" rIns="0" tIns="0" bIns="0" anchor="t">
-            <a:spAutoFit/>
-          </a:bodyPr>
-          <a:lstStyle/>
-          <a:p>
-            <a:pPr algn="l"/>
+          <a:bodyPr wrap="square" lIns="0" rIns="0" tIns="0" bIns="0" anchor="t">
+            <a:spAutoFit/>
+          </a:bodyPr>
+          <a:lstStyle/>
+          <a:p>
+            <a:pPr algn="l">
+              <a:spcAft>
+                <a:spcPts val="0"/>
+              </a:spcAft>
+            </a:pPr>
             <a:r>
               <a:rPr sz="1400" b="1" i="0">
                 <a:solidFill>
@@ -3470,28 +3486,64 @@
         <p:spPr>
           <a:xfrm>
             <a:off x="932688" y="3493008"/>
-            <a:ext cx="3931920" cy="310896"/>
-          </a:xfrm>
-          <a:prstGeom prst="rect">
-            <a:avLst/>
-          </a:prstGeom>
-          <a:noFill/>
-        </p:spPr>
-        <p:txBody>
-          <a:bodyPr wrap="none" lIns="0" rIns="0" tIns="0" bIns="0" anchor="t">
-            <a:spAutoFit/>
-          </a:bodyPr>
-          <a:lstStyle/>
-          <a:p>
-            <a:pPr algn="l"/>
-            <a:r>
-              <a:rPr sz="1400" b="0" i="0">
-                <a:solidFill>
-                  <a:srgbClr val="FFFFFF"/>
-                </a:solidFill>
-                <a:latin typeface="Calibri"/>
-              </a:rPr>
-              <a:t>功能完整的教学版稳定态；近 7 天无业务提交，生产化短板集中在配置、CI 与依赖环境。</a:t>
+            <a:ext cx="3886200" cy="502920"/>
+          </a:xfrm>
+          <a:prstGeom prst="rect">
+            <a:avLst/>
+          </a:prstGeom>
+          <a:noFill/>
+        </p:spPr>
+        <p:txBody>
+          <a:bodyPr wrap="square" lIns="0" rIns="0" tIns="0" bIns="0" anchor="t">
+            <a:spAutoFit/>
+          </a:bodyPr>
+          <a:lstStyle/>
+          <a:p>
+            <a:pPr algn="l">
+              <a:spcAft>
+                <a:spcPts val="0"/>
+              </a:spcAft>
+            </a:pPr>
+            <a:r>
+              <a:rPr sz="1350" b="0" i="0">
+                <a:solidFill>
+                  <a:srgbClr val="BFEDE6"/>
+                </a:solidFill>
+                <a:latin typeface="Calibri"/>
+              </a:rPr>
+              <a:t>功能完整的教学版稳定态</a:t>
+            </a:r>
+          </a:p>
+          <a:p>
+            <a:pPr algn="l">
+              <a:spcAft>
+                <a:spcPts val="0"/>
+              </a:spcAft>
+            </a:pPr>
+            <a:r>
+              <a:rPr sz="1350" b="0" i="0">
+                <a:solidFill>
+                  <a:srgbClr val="BFEDE6"/>
+                </a:solidFill>
+                <a:latin typeface="Calibri"/>
+              </a:rPr>
+              <a:t>近 7 天无业务提交</a:t>
+            </a:r>
+          </a:p>
+          <a:p>
+            <a:pPr algn="l">
+              <a:spcAft>
+                <a:spcPts val="0"/>
+              </a:spcAft>
+            </a:pPr>
+            <a:r>
+              <a:rPr sz="1350" b="0" i="0">
+                <a:solidFill>
+                  <a:srgbClr val="BFEDE6"/>
+                </a:solidFill>
+                <a:latin typeface="Calibri"/>
+              </a:rPr>
+              <a:t>生产化短板集中在配置、CI 与依赖环境</a:t>
             </a:r>
           </a:p>
         </p:txBody>
@@ -3556,12 +3608,16 @@
           <a:noFill/>
         </p:spPr>
         <p:txBody>
-          <a:bodyPr wrap="none" lIns="0" rIns="0" tIns="0" bIns="0" anchor="t">
-            <a:spAutoFit/>
-          </a:bodyPr>
-          <a:lstStyle/>
-          <a:p>
-            <a:pPr algn="l"/>
+          <a:bodyPr wrap="square" lIns="0" rIns="0" tIns="0" bIns="0" anchor="t">
+            <a:spAutoFit/>
+          </a:bodyPr>
+          <a:lstStyle/>
+          <a:p>
+            <a:pPr algn="l">
+              <a:spcAft>
+                <a:spcPts val="0"/>
+              </a:spcAft>
+            </a:pPr>
             <a:r>
               <a:rPr sz="1100" b="1" i="0">
                 <a:solidFill>
@@ -3591,12 +3647,16 @@
           <a:noFill/>
         </p:spPr>
         <p:txBody>
-          <a:bodyPr wrap="none" lIns="0" rIns="0" tIns="0" bIns="0" anchor="t">
-            <a:spAutoFit/>
-          </a:bodyPr>
-          <a:lstStyle/>
-          <a:p>
-            <a:pPr algn="l"/>
+          <a:bodyPr wrap="square" lIns="0" rIns="0" tIns="0" bIns="0" anchor="t">
+            <a:spAutoFit/>
+          </a:bodyPr>
+          <a:lstStyle/>
+          <a:p>
+            <a:pPr algn="l">
+              <a:spcAft>
+                <a:spcPts val="0"/>
+              </a:spcAft>
+            </a:pPr>
             <a:r>
               <a:rPr sz="1100" b="0" i="0">
                 <a:solidFill>
@@ -3669,12 +3729,16 @@
           <a:noFill/>
         </p:spPr>
         <p:txBody>
-          <a:bodyPr wrap="none" lIns="0" rIns="0" tIns="0" bIns="0" anchor="t">
-            <a:spAutoFit/>
-          </a:bodyPr>
-          <a:lstStyle/>
-          <a:p>
-            <a:pPr algn="l"/>
+          <a:bodyPr wrap="square" lIns="0" rIns="0" tIns="0" bIns="0" anchor="t">
+            <a:spAutoFit/>
+          </a:bodyPr>
+          <a:lstStyle/>
+          <a:p>
+            <a:pPr algn="l">
+              <a:spcAft>
+                <a:spcPts val="0"/>
+              </a:spcAft>
+            </a:pPr>
             <a:r>
               <a:rPr sz="1100" b="1" i="0">
                 <a:solidFill>
@@ -3704,12 +3768,16 @@
           <a:noFill/>
         </p:spPr>
         <p:txBody>
-          <a:bodyPr wrap="none" lIns="0" rIns="0" tIns="0" bIns="0" anchor="t">
-            <a:spAutoFit/>
-          </a:bodyPr>
-          <a:lstStyle/>
-          <a:p>
-            <a:pPr algn="l"/>
+          <a:bodyPr wrap="square" lIns="0" rIns="0" tIns="0" bIns="0" anchor="t">
+            <a:spAutoFit/>
+          </a:bodyPr>
+          <a:lstStyle/>
+          <a:p>
+            <a:pPr algn="l">
+              <a:spcAft>
+                <a:spcPts val="0"/>
+              </a:spcAft>
+            </a:pPr>
             <a:r>
               <a:rPr sz="1100" b="0" i="0">
                 <a:solidFill>
@@ -3782,12 +3850,16 @@
           <a:noFill/>
         </p:spPr>
         <p:txBody>
-          <a:bodyPr wrap="none" lIns="0" rIns="0" tIns="0" bIns="0" anchor="t">
-            <a:spAutoFit/>
-          </a:bodyPr>
-          <a:lstStyle/>
-          <a:p>
-            <a:pPr algn="l"/>
+          <a:bodyPr wrap="square" lIns="0" rIns="0" tIns="0" bIns="0" anchor="t">
+            <a:spAutoFit/>
+          </a:bodyPr>
+          <a:lstStyle/>
+          <a:p>
+            <a:pPr algn="l">
+              <a:spcAft>
+                <a:spcPts val="0"/>
+              </a:spcAft>
+            </a:pPr>
             <a:r>
               <a:rPr sz="1100" b="1" i="0">
                 <a:solidFill>
@@ -3817,12 +3889,16 @@
           <a:noFill/>
         </p:spPr>
         <p:txBody>
-          <a:bodyPr wrap="none" lIns="0" rIns="0" tIns="0" bIns="0" anchor="t">
-            <a:spAutoFit/>
-          </a:bodyPr>
-          <a:lstStyle/>
-          <a:p>
-            <a:pPr algn="l"/>
+          <a:bodyPr wrap="square" lIns="0" rIns="0" tIns="0" bIns="0" anchor="t">
+            <a:spAutoFit/>
+          </a:bodyPr>
+          <a:lstStyle/>
+          <a:p>
+            <a:pPr algn="l">
+              <a:spcAft>
+                <a:spcPts val="0"/>
+              </a:spcAft>
+            </a:pPr>
             <a:r>
               <a:rPr sz="1100" b="0" i="0">
                 <a:solidFill>
@@ -3852,12 +3928,16 @@
           <a:noFill/>
         </p:spPr>
         <p:txBody>
-          <a:bodyPr wrap="none" lIns="0" rIns="0" tIns="0" bIns="0" anchor="t">
-            <a:spAutoFit/>
-          </a:bodyPr>
-          <a:lstStyle/>
-          <a:p>
-            <a:pPr algn="r"/>
+          <a:bodyPr wrap="square" lIns="0" rIns="0" tIns="0" bIns="0" anchor="t">
+            <a:spAutoFit/>
+          </a:bodyPr>
+          <a:lstStyle/>
+          <a:p>
+            <a:pPr algn="r">
+              <a:spcAft>
+                <a:spcPts val="0"/>
+              </a:spcAft>
+            </a:pPr>
             <a:r>
               <a:rPr sz="1100" b="1" i="0">
                 <a:solidFill>
@@ -3905,20 +3985,24 @@
         <p:spPr>
           <a:xfrm>
             <a:off x="530352" y="384048"/>
-            <a:ext cx="8138160" cy="502920"/>
-          </a:xfrm>
-          <a:prstGeom prst="rect">
-            <a:avLst/>
-          </a:prstGeom>
-          <a:noFill/>
-        </p:spPr>
-        <p:txBody>
-          <a:bodyPr wrap="none" lIns="0" rIns="0" tIns="0" bIns="0" anchor="t">
-            <a:spAutoFit/>
-          </a:bodyPr>
-          <a:lstStyle/>
-          <a:p>
-            <a:pPr algn="l"/>
+            <a:ext cx="8229600" cy="502920"/>
+          </a:xfrm>
+          <a:prstGeom prst="rect">
+            <a:avLst/>
+          </a:prstGeom>
+          <a:noFill/>
+        </p:spPr>
+        <p:txBody>
+          <a:bodyPr wrap="square" lIns="0" rIns="0" tIns="0" bIns="0" anchor="t">
+            <a:spAutoFit/>
+          </a:bodyPr>
+          <a:lstStyle/>
+          <a:p>
+            <a:pPr algn="l">
+              <a:spcAft>
+                <a:spcPts val="0"/>
+              </a:spcAft>
+            </a:pPr>
             <a:r>
               <a:rPr sz="3800" b="1" i="0">
                 <a:solidFill>
@@ -3940,20 +4024,24 @@
         <p:spPr>
           <a:xfrm>
             <a:off x="530352" y="914400"/>
-            <a:ext cx="8412480" cy="320040"/>
-          </a:xfrm>
-          <a:prstGeom prst="rect">
-            <a:avLst/>
-          </a:prstGeom>
-          <a:noFill/>
-        </p:spPr>
-        <p:txBody>
-          <a:bodyPr wrap="none" lIns="0" rIns="0" tIns="0" bIns="0" anchor="t">
-            <a:spAutoFit/>
-          </a:bodyPr>
-          <a:lstStyle/>
-          <a:p>
-            <a:pPr algn="l"/>
+            <a:ext cx="8595360" cy="320040"/>
+          </a:xfrm>
+          <a:prstGeom prst="rect">
+            <a:avLst/>
+          </a:prstGeom>
+          <a:noFill/>
+        </p:spPr>
+        <p:txBody>
+          <a:bodyPr wrap="square" lIns="0" rIns="0" tIns="0" bIns="0" anchor="t">
+            <a:spAutoFit/>
+          </a:bodyPr>
+          <a:lstStyle/>
+          <a:p>
+            <a:pPr algn="l">
+              <a:spcAft>
+                <a:spcPts val="0"/>
+              </a:spcAft>
+            </a:pPr>
             <a:r>
               <a:rPr sz="1300" b="0" i="0">
                 <a:solidFill>
@@ -4026,12 +4114,16 @@
           <a:noFill/>
         </p:spPr>
         <p:txBody>
-          <a:bodyPr wrap="none" lIns="0" rIns="0" tIns="0" bIns="0" anchor="t">
-            <a:spAutoFit/>
-          </a:bodyPr>
-          <a:lstStyle/>
-          <a:p>
-            <a:pPr algn="ctr"/>
+          <a:bodyPr wrap="square" lIns="0" rIns="0" tIns="0" bIns="0" anchor="t">
+            <a:spAutoFit/>
+          </a:bodyPr>
+          <a:lstStyle/>
+          <a:p>
+            <a:pPr algn="ctr">
+              <a:spcAft>
+                <a:spcPts val="0"/>
+              </a:spcAft>
+            </a:pPr>
             <a:r>
               <a:rPr sz="800" b="1" i="0">
                 <a:solidFill>
@@ -4149,12 +4241,16 @@
           <a:noFill/>
         </p:spPr>
         <p:txBody>
-          <a:bodyPr wrap="none" lIns="0" rIns="0" tIns="0" bIns="0" anchor="t">
-            <a:spAutoFit/>
-          </a:bodyPr>
-          <a:lstStyle/>
-          <a:p>
-            <a:pPr algn="ctr"/>
+          <a:bodyPr wrap="square" lIns="0" rIns="0" tIns="0" bIns="0" anchor="t">
+            <a:spAutoFit/>
+          </a:bodyPr>
+          <a:lstStyle/>
+          <a:p>
+            <a:pPr algn="ctr">
+              <a:spcAft>
+                <a:spcPts val="0"/>
+              </a:spcAft>
+            </a:pPr>
             <a:r>
               <a:rPr sz="1100" b="1" i="0">
                 <a:solidFill>
@@ -4175,29 +4271,49 @@
         </p:nvSpPr>
         <p:spPr>
           <a:xfrm>
-            <a:off x="914400" y="2606040"/>
-            <a:ext cx="1481328" cy="457200"/>
-          </a:xfrm>
-          <a:prstGeom prst="rect">
-            <a:avLst/>
-          </a:prstGeom>
-          <a:noFill/>
-        </p:spPr>
-        <p:txBody>
-          <a:bodyPr wrap="none" lIns="0" rIns="0" tIns="0" bIns="0" anchor="t">
-            <a:spAutoFit/>
-          </a:bodyPr>
-          <a:lstStyle/>
-          <a:p>
-            <a:pPr algn="ctr"/>
-            <a:r>
-              <a:rPr sz="1500" b="1" i="0">
+            <a:off x="914400" y="2542032"/>
+            <a:ext cx="1481328" cy="502920"/>
+          </a:xfrm>
+          <a:prstGeom prst="rect">
+            <a:avLst/>
+          </a:prstGeom>
+          <a:noFill/>
+        </p:spPr>
+        <p:txBody>
+          <a:bodyPr wrap="square" lIns="0" rIns="0" tIns="0" bIns="0" anchor="t">
+            <a:spAutoFit/>
+          </a:bodyPr>
+          <a:lstStyle/>
+          <a:p>
+            <a:pPr algn="ctr">
+              <a:spcAft>
+                <a:spcPts val="0"/>
+              </a:spcAft>
+            </a:pPr>
+            <a:r>
+              <a:rPr sz="1450" b="1" i="0">
                 <a:solidFill>
                   <a:srgbClr val="16323A"/>
                 </a:solidFill>
                 <a:latin typeface="Calibri"/>
               </a:rPr>
-              <a:t>收敛每日状态信号</a:t>
+              <a:t>收敛每日</a:t>
+            </a:r>
+          </a:p>
+          <a:p>
+            <a:pPr algn="ctr">
+              <a:spcAft>
+                <a:spcPts val="0"/>
+              </a:spcAft>
+            </a:pPr>
+            <a:r>
+              <a:rPr sz="1450" b="1" i="0">
+                <a:solidFill>
+                  <a:srgbClr val="16323A"/>
+                </a:solidFill>
+                <a:latin typeface="Calibri"/>
+              </a:rPr>
+              <a:t>状态信号</a:t>
             </a:r>
           </a:p>
         </p:txBody>
@@ -4210,7 +4326,7 @@
         </p:nvSpPr>
         <p:spPr>
           <a:xfrm>
-            <a:off x="932688" y="3337560"/>
+            <a:off x="932688" y="3246120"/>
             <a:ext cx="1426464" cy="1170432"/>
           </a:xfrm>
           <a:prstGeom prst="rect">
@@ -4219,20 +4335,56 @@
           <a:noFill/>
         </p:spPr>
         <p:txBody>
-          <a:bodyPr wrap="none" lIns="0" rIns="0" tIns="0" bIns="0" anchor="t">
-            <a:spAutoFit/>
-          </a:bodyPr>
-          <a:lstStyle/>
-          <a:p>
-            <a:pPr algn="ctr"/>
-            <a:r>
-              <a:rPr sz="1150" b="0" i="0">
+          <a:bodyPr wrap="square" lIns="0" rIns="0" tIns="0" bIns="0" anchor="t">
+            <a:spAutoFit/>
+          </a:bodyPr>
+          <a:lstStyle/>
+          <a:p>
+            <a:pPr algn="ctr">
+              <a:spcAft>
+                <a:spcPts val="0"/>
+              </a:spcAft>
+            </a:pPr>
+            <a:r>
+              <a:rPr sz="1080" b="0" i="0">
                 <a:solidFill>
                   <a:srgbClr val="3A5961"/>
                 </a:solidFill>
                 <a:latin typeface="Calibri"/>
               </a:rPr>
-              <a:t>固定采集 git、测试、依赖配置、关键目录变化，形成可复用日报模板。</a:t>
+              <a:t>固定采集 git、测试、</a:t>
+            </a:r>
+          </a:p>
+          <a:p>
+            <a:pPr algn="ctr">
+              <a:spcAft>
+                <a:spcPts val="0"/>
+              </a:spcAft>
+            </a:pPr>
+            <a:r>
+              <a:rPr sz="1080" b="0" i="0">
+                <a:solidFill>
+                  <a:srgbClr val="3A5961"/>
+                </a:solidFill>
+                <a:latin typeface="Calibri"/>
+              </a:rPr>
+              <a:t>依赖配置、关键目录变化，</a:t>
+            </a:r>
+          </a:p>
+          <a:p>
+            <a:pPr algn="ctr">
+              <a:spcAft>
+                <a:spcPts val="0"/>
+              </a:spcAft>
+            </a:pPr>
+            <a:r>
+              <a:rPr sz="1080" b="0" i="0">
+                <a:solidFill>
+                  <a:srgbClr val="3A5961"/>
+                </a:solidFill>
+                <a:latin typeface="Calibri"/>
+              </a:rPr>
+              <a:t>形成可复用日报模板。</a:t>
             </a:r>
           </a:p>
         </p:txBody>
@@ -4342,12 +4494,16 @@
           <a:noFill/>
         </p:spPr>
         <p:txBody>
-          <a:bodyPr wrap="none" lIns="0" rIns="0" tIns="0" bIns="0" anchor="t">
-            <a:spAutoFit/>
-          </a:bodyPr>
-          <a:lstStyle/>
-          <a:p>
-            <a:pPr algn="ctr"/>
+          <a:bodyPr wrap="square" lIns="0" rIns="0" tIns="0" bIns="0" anchor="t">
+            <a:spAutoFit/>
+          </a:bodyPr>
+          <a:lstStyle/>
+          <a:p>
+            <a:pPr algn="ctr">
+              <a:spcAft>
+                <a:spcPts val="0"/>
+              </a:spcAft>
+            </a:pPr>
             <a:r>
               <a:rPr sz="1100" b="1" i="0">
                 <a:solidFill>
@@ -4368,29 +4524,49 @@
         </p:nvSpPr>
         <p:spPr>
           <a:xfrm>
-            <a:off x="3136392" y="2606040"/>
-            <a:ext cx="1481328" cy="457200"/>
-          </a:xfrm>
-          <a:prstGeom prst="rect">
-            <a:avLst/>
-          </a:prstGeom>
-          <a:noFill/>
-        </p:spPr>
-        <p:txBody>
-          <a:bodyPr wrap="none" lIns="0" rIns="0" tIns="0" bIns="0" anchor="t">
-            <a:spAutoFit/>
-          </a:bodyPr>
-          <a:lstStyle/>
-          <a:p>
-            <a:pPr algn="ctr"/>
-            <a:r>
-              <a:rPr sz="1500" b="1" i="0">
+            <a:off x="3136392" y="2542032"/>
+            <a:ext cx="1481328" cy="502920"/>
+          </a:xfrm>
+          <a:prstGeom prst="rect">
+            <a:avLst/>
+          </a:prstGeom>
+          <a:noFill/>
+        </p:spPr>
+        <p:txBody>
+          <a:bodyPr wrap="square" lIns="0" rIns="0" tIns="0" bIns="0" anchor="t">
+            <a:spAutoFit/>
+          </a:bodyPr>
+          <a:lstStyle/>
+          <a:p>
+            <a:pPr algn="ctr">
+              <a:spcAft>
+                <a:spcPts val="0"/>
+              </a:spcAft>
+            </a:pPr>
+            <a:r>
+              <a:rPr sz="1450" b="1" i="0">
                 <a:solidFill>
                   <a:srgbClr val="16323A"/>
                 </a:solidFill>
                 <a:latin typeface="Calibri"/>
               </a:rPr>
-              <a:t>补齐可离线验证链路</a:t>
+              <a:t>补齐可离线</a:t>
+            </a:r>
+          </a:p>
+          <a:p>
+            <a:pPr algn="ctr">
+              <a:spcAft>
+                <a:spcPts val="0"/>
+              </a:spcAft>
+            </a:pPr>
+            <a:r>
+              <a:rPr sz="1450" b="1" i="0">
+                <a:solidFill>
+                  <a:srgbClr val="16323A"/>
+                </a:solidFill>
+                <a:latin typeface="Calibri"/>
+              </a:rPr>
+              <a:t>验证链路</a:t>
             </a:r>
           </a:p>
         </p:txBody>
@@ -4403,7 +4579,7 @@
         </p:nvSpPr>
         <p:spPr>
           <a:xfrm>
-            <a:off x="3154680" y="3337560"/>
+            <a:off x="3154680" y="3246120"/>
             <a:ext cx="1426464" cy="1170432"/>
           </a:xfrm>
           <a:prstGeom prst="rect">
@@ -4412,20 +4588,56 @@
           <a:noFill/>
         </p:spPr>
         <p:txBody>
-          <a:bodyPr wrap="none" lIns="0" rIns="0" tIns="0" bIns="0" anchor="t">
-            <a:spAutoFit/>
-          </a:bodyPr>
-          <a:lstStyle/>
-          <a:p>
-            <a:pPr algn="ctr"/>
-            <a:r>
-              <a:rPr sz="1150" b="0" i="0">
+          <a:bodyPr wrap="square" lIns="0" rIns="0" tIns="0" bIns="0" anchor="t">
+            <a:spAutoFit/>
+          </a:bodyPr>
+          <a:lstStyle/>
+          <a:p>
+            <a:pPr algn="ctr">
+              <a:spcAft>
+                <a:spcPts val="0"/>
+              </a:spcAft>
+            </a:pPr>
+            <a:r>
+              <a:rPr sz="1080" b="0" i="0">
                 <a:solidFill>
                   <a:srgbClr val="3A5961"/>
                 </a:solidFill>
                 <a:latin typeface="Calibri"/>
               </a:rPr>
-              <a:t>拆出不依赖外部 AI 的单元测试与 mock 契约，保障 CI 可稳定执行。</a:t>
+              <a:t>拆出不依赖外部 AI 的</a:t>
+            </a:r>
+          </a:p>
+          <a:p>
+            <a:pPr algn="ctr">
+              <a:spcAft>
+                <a:spcPts val="0"/>
+              </a:spcAft>
+            </a:pPr>
+            <a:r>
+              <a:rPr sz="1080" b="0" i="0">
+                <a:solidFill>
+                  <a:srgbClr val="3A5961"/>
+                </a:solidFill>
+                <a:latin typeface="Calibri"/>
+              </a:rPr>
+              <a:t>单元测试与 mock 契约，</a:t>
+            </a:r>
+          </a:p>
+          <a:p>
+            <a:pPr algn="ctr">
+              <a:spcAft>
+                <a:spcPts val="0"/>
+              </a:spcAft>
+            </a:pPr>
+            <a:r>
+              <a:rPr sz="1080" b="0" i="0">
+                <a:solidFill>
+                  <a:srgbClr val="3A5961"/>
+                </a:solidFill>
+                <a:latin typeface="Calibri"/>
+              </a:rPr>
+              <a:t>保障 CI 稳定执行。</a:t>
             </a:r>
           </a:p>
         </p:txBody>
@@ -4535,12 +4747,16 @@
           <a:noFill/>
         </p:spPr>
         <p:txBody>
-          <a:bodyPr wrap="none" lIns="0" rIns="0" tIns="0" bIns="0" anchor="t">
-            <a:spAutoFit/>
-          </a:bodyPr>
-          <a:lstStyle/>
-          <a:p>
-            <a:pPr algn="ctr"/>
+          <a:bodyPr wrap="square" lIns="0" rIns="0" tIns="0" bIns="0" anchor="t">
+            <a:spAutoFit/>
+          </a:bodyPr>
+          <a:lstStyle/>
+          <a:p>
+            <a:pPr algn="ctr">
+              <a:spcAft>
+                <a:spcPts val="0"/>
+              </a:spcAft>
+            </a:pPr>
             <a:r>
               <a:rPr sz="1100" b="1" i="0">
                 <a:solidFill>
@@ -4561,23 +4777,27 @@
         </p:nvSpPr>
         <p:spPr>
           <a:xfrm>
-            <a:off x="5358384" y="2606040"/>
-            <a:ext cx="1481328" cy="457200"/>
-          </a:xfrm>
-          <a:prstGeom prst="rect">
-            <a:avLst/>
-          </a:prstGeom>
-          <a:noFill/>
-        </p:spPr>
-        <p:txBody>
-          <a:bodyPr wrap="none" lIns="0" rIns="0" tIns="0" bIns="0" anchor="t">
-            <a:spAutoFit/>
-          </a:bodyPr>
-          <a:lstStyle/>
-          <a:p>
-            <a:pPr algn="ctr"/>
-            <a:r>
-              <a:rPr sz="1500" b="1" i="0">
+            <a:off x="5358384" y="2542032"/>
+            <a:ext cx="1481328" cy="502920"/>
+          </a:xfrm>
+          <a:prstGeom prst="rect">
+            <a:avLst/>
+          </a:prstGeom>
+          <a:noFill/>
+        </p:spPr>
+        <p:txBody>
+          <a:bodyPr wrap="square" lIns="0" rIns="0" tIns="0" bIns="0" anchor="t">
+            <a:spAutoFit/>
+          </a:bodyPr>
+          <a:lstStyle/>
+          <a:p>
+            <a:pPr algn="ctr">
+              <a:spcAft>
+                <a:spcPts val="0"/>
+              </a:spcAft>
+            </a:pPr>
+            <a:r>
+              <a:rPr sz="1450" b="1" i="0">
                 <a:solidFill>
                   <a:srgbClr val="16323A"/>
                 </a:solidFill>
@@ -4596,7 +4816,7 @@
         </p:nvSpPr>
         <p:spPr>
           <a:xfrm>
-            <a:off x="5376672" y="3337560"/>
+            <a:off x="5376672" y="3246120"/>
             <a:ext cx="1426464" cy="1170432"/>
           </a:xfrm>
           <a:prstGeom prst="rect">
@@ -4605,20 +4825,56 @@
           <a:noFill/>
         </p:spPr>
         <p:txBody>
-          <a:bodyPr wrap="none" lIns="0" rIns="0" tIns="0" bIns="0" anchor="t">
-            <a:spAutoFit/>
-          </a:bodyPr>
-          <a:lstStyle/>
-          <a:p>
-            <a:pPr algn="ctr"/>
-            <a:r>
-              <a:rPr sz="1150" b="0" i="0">
+          <a:bodyPr wrap="square" lIns="0" rIns="0" tIns="0" bIns="0" anchor="t">
+            <a:spAutoFit/>
+          </a:bodyPr>
+          <a:lstStyle/>
+          <a:p>
+            <a:pPr algn="ctr">
+              <a:spcAft>
+                <a:spcPts val="0"/>
+              </a:spcAft>
+            </a:pPr>
+            <a:r>
+              <a:rPr sz="1080" b="0" i="0">
                 <a:solidFill>
                   <a:srgbClr val="3A5961"/>
                 </a:solidFill>
                 <a:latin typeface="Calibri"/>
               </a:rPr>
-              <a:t>后端 mvn test -DskipExternalAI、前端 build/type-check/lint 作为 PR 门禁。</a:t>
+              <a:t>后端 fast test；</a:t>
+            </a:r>
+          </a:p>
+          <a:p>
+            <a:pPr algn="ctr">
+              <a:spcAft>
+                <a:spcPts val="0"/>
+              </a:spcAft>
+            </a:pPr>
+            <a:r>
+              <a:rPr sz="1080" b="0" i="0">
+                <a:solidFill>
+                  <a:srgbClr val="3A5961"/>
+                </a:solidFill>
+                <a:latin typeface="Calibri"/>
+              </a:rPr>
+              <a:t>前端 build、type-check、</a:t>
+            </a:r>
+          </a:p>
+          <a:p>
+            <a:pPr algn="ctr">
+              <a:spcAft>
+                <a:spcPts val="0"/>
+              </a:spcAft>
+            </a:pPr>
+            <a:r>
+              <a:rPr sz="1080" b="0" i="0">
+                <a:solidFill>
+                  <a:srgbClr val="3A5961"/>
+                </a:solidFill>
+                <a:latin typeface="Calibri"/>
+              </a:rPr>
+              <a:t>lint 作为 PR 门禁。</a:t>
             </a:r>
           </a:p>
         </p:txBody>
@@ -4728,12 +4984,16 @@
           <a:noFill/>
         </p:spPr>
         <p:txBody>
-          <a:bodyPr wrap="none" lIns="0" rIns="0" tIns="0" bIns="0" anchor="t">
-            <a:spAutoFit/>
-          </a:bodyPr>
-          <a:lstStyle/>
-          <a:p>
-            <a:pPr algn="ctr"/>
+          <a:bodyPr wrap="square" lIns="0" rIns="0" tIns="0" bIns="0" anchor="t">
+            <a:spAutoFit/>
+          </a:bodyPr>
+          <a:lstStyle/>
+          <a:p>
+            <a:pPr algn="ctr">
+              <a:spcAft>
+                <a:spcPts val="0"/>
+              </a:spcAft>
+            </a:pPr>
             <a:r>
               <a:rPr sz="1100" b="1" i="0">
                 <a:solidFill>
@@ -4754,29 +5014,49 @@
         </p:nvSpPr>
         <p:spPr>
           <a:xfrm>
-            <a:off x="7580376" y="2606040"/>
-            <a:ext cx="1481328" cy="457200"/>
-          </a:xfrm>
-          <a:prstGeom prst="rect">
-            <a:avLst/>
-          </a:prstGeom>
-          <a:noFill/>
-        </p:spPr>
-        <p:txBody>
-          <a:bodyPr wrap="none" lIns="0" rIns="0" tIns="0" bIns="0" anchor="t">
-            <a:spAutoFit/>
-          </a:bodyPr>
-          <a:lstStyle/>
-          <a:p>
-            <a:pPr algn="ctr"/>
-            <a:r>
-              <a:rPr sz="1500" b="1" i="0">
+            <a:off x="7580376" y="2542032"/>
+            <a:ext cx="1481328" cy="502920"/>
+          </a:xfrm>
+          <a:prstGeom prst="rect">
+            <a:avLst/>
+          </a:prstGeom>
+          <a:noFill/>
+        </p:spPr>
+        <p:txBody>
+          <a:bodyPr wrap="square" lIns="0" rIns="0" tIns="0" bIns="0" anchor="t">
+            <a:spAutoFit/>
+          </a:bodyPr>
+          <a:lstStyle/>
+          <a:p>
+            <a:pPr algn="ctr">
+              <a:spcAft>
+                <a:spcPts val="0"/>
+              </a:spcAft>
+            </a:pPr>
+            <a:r>
+              <a:rPr sz="1450" b="1" i="0">
                 <a:solidFill>
                   <a:srgbClr val="16323A"/>
                 </a:solidFill>
                 <a:latin typeface="Calibri"/>
               </a:rPr>
-              <a:t>完善环境文档</a:t>
+              <a:t>完善环境</a:t>
+            </a:r>
+          </a:p>
+          <a:p>
+            <a:pPr algn="ctr">
+              <a:spcAft>
+                <a:spcPts val="0"/>
+              </a:spcAft>
+            </a:pPr>
+            <a:r>
+              <a:rPr sz="1450" b="1" i="0">
+                <a:solidFill>
+                  <a:srgbClr val="16323A"/>
+                </a:solidFill>
+                <a:latin typeface="Calibri"/>
+              </a:rPr>
+              <a:t>文档</a:t>
             </a:r>
           </a:p>
         </p:txBody>
@@ -4789,7 +5069,7 @@
         </p:nvSpPr>
         <p:spPr>
           <a:xfrm>
-            <a:off x="7598664" y="3337560"/>
+            <a:off x="7598664" y="3246120"/>
             <a:ext cx="1426464" cy="1170432"/>
           </a:xfrm>
           <a:prstGeom prst="rect">
@@ -4798,20 +5078,56 @@
           <a:noFill/>
         </p:spPr>
         <p:txBody>
-          <a:bodyPr wrap="none" lIns="0" rIns="0" tIns="0" bIns="0" anchor="t">
-            <a:spAutoFit/>
-          </a:bodyPr>
-          <a:lstStyle/>
-          <a:p>
-            <a:pPr algn="ctr"/>
-            <a:r>
-              <a:rPr sz="1150" b="0" i="0">
+          <a:bodyPr wrap="square" lIns="0" rIns="0" tIns="0" bIns="0" anchor="t">
+            <a:spAutoFit/>
+          </a:bodyPr>
+          <a:lstStyle/>
+          <a:p>
+            <a:pPr algn="ctr">
+              <a:spcAft>
+                <a:spcPts val="0"/>
+              </a:spcAft>
+            </a:pPr>
+            <a:r>
+              <a:rPr sz="1080" b="0" i="0">
                 <a:solidFill>
                   <a:srgbClr val="3A5961"/>
                 </a:solidFill>
                 <a:latin typeface="Calibri"/>
               </a:rPr>
-              <a:t>提供 local profile 示例、Nacos/Redis/MySQL/COS/Selenium 初始化说明。</a:t>
+              <a:t>提供 local profile 示例，</a:t>
+            </a:r>
+          </a:p>
+          <a:p>
+            <a:pPr algn="ctr">
+              <a:spcAft>
+                <a:spcPts val="0"/>
+              </a:spcAft>
+            </a:pPr>
+            <a:r>
+              <a:rPr sz="1080" b="0" i="0">
+                <a:solidFill>
+                  <a:srgbClr val="3A5961"/>
+                </a:solidFill>
+                <a:latin typeface="Calibri"/>
+              </a:rPr>
+              <a:t>说明 Nacos / Redis / MySQL /</a:t>
+            </a:r>
+          </a:p>
+          <a:p>
+            <a:pPr algn="ctr">
+              <a:spcAft>
+                <a:spcPts val="0"/>
+              </a:spcAft>
+            </a:pPr>
+            <a:r>
+              <a:rPr sz="1080" b="0" i="0">
+                <a:solidFill>
+                  <a:srgbClr val="3A5961"/>
+                </a:solidFill>
+                <a:latin typeface="Calibri"/>
+              </a:rPr>
+              <a:t>COS / Selenium 初始化。</a:t>
             </a:r>
           </a:p>
         </p:txBody>
@@ -4921,12 +5237,16 @@
           <a:noFill/>
         </p:spPr>
         <p:txBody>
-          <a:bodyPr wrap="none" lIns="0" rIns="0" tIns="0" bIns="0" anchor="t">
-            <a:spAutoFit/>
-          </a:bodyPr>
-          <a:lstStyle/>
-          <a:p>
-            <a:pPr algn="ctr"/>
+          <a:bodyPr wrap="square" lIns="0" rIns="0" tIns="0" bIns="0" anchor="t">
+            <a:spAutoFit/>
+          </a:bodyPr>
+          <a:lstStyle/>
+          <a:p>
+            <a:pPr algn="ctr">
+              <a:spcAft>
+                <a:spcPts val="0"/>
+              </a:spcAft>
+            </a:pPr>
             <a:r>
               <a:rPr sz="1100" b="1" i="0">
                 <a:solidFill>
@@ -4947,29 +5267,49 @@
         </p:nvSpPr>
         <p:spPr>
           <a:xfrm>
-            <a:off x="9802368" y="2606040"/>
-            <a:ext cx="1481328" cy="457200"/>
-          </a:xfrm>
-          <a:prstGeom prst="rect">
-            <a:avLst/>
-          </a:prstGeom>
-          <a:noFill/>
-        </p:spPr>
-        <p:txBody>
-          <a:bodyPr wrap="none" lIns="0" rIns="0" tIns="0" bIns="0" anchor="t">
-            <a:spAutoFit/>
-          </a:bodyPr>
-          <a:lstStyle/>
-          <a:p>
-            <a:pPr algn="ctr"/>
-            <a:r>
-              <a:rPr sz="1500" b="1" i="0">
+            <a:off x="9802368" y="2542032"/>
+            <a:ext cx="1481328" cy="502920"/>
+          </a:xfrm>
+          <a:prstGeom prst="rect">
+            <a:avLst/>
+          </a:prstGeom>
+          <a:noFill/>
+        </p:spPr>
+        <p:txBody>
+          <a:bodyPr wrap="square" lIns="0" rIns="0" tIns="0" bIns="0" anchor="t">
+            <a:spAutoFit/>
+          </a:bodyPr>
+          <a:lstStyle/>
+          <a:p>
+            <a:pPr algn="ctr">
+              <a:spcAft>
+                <a:spcPts val="0"/>
+              </a:spcAft>
+            </a:pPr>
+            <a:r>
+              <a:rPr sz="1450" b="1" i="0">
                 <a:solidFill>
                   <a:srgbClr val="16323A"/>
                 </a:solidFill>
                 <a:latin typeface="Calibri"/>
               </a:rPr>
-              <a:t>治理双轨代码</a:t>
+              <a:t>治理双轨</a:t>
+            </a:r>
+          </a:p>
+          <a:p>
+            <a:pPr algn="ctr">
+              <a:spcAft>
+                <a:spcPts val="0"/>
+              </a:spcAft>
+            </a:pPr>
+            <a:r>
+              <a:rPr sz="1450" b="1" i="0">
+                <a:solidFill>
+                  <a:srgbClr val="16323A"/>
+                </a:solidFill>
+                <a:latin typeface="Calibri"/>
+              </a:rPr>
+              <a:t>代码</a:t>
             </a:r>
           </a:p>
         </p:txBody>
@@ -4982,7 +5322,7 @@
         </p:nvSpPr>
         <p:spPr>
           <a:xfrm>
-            <a:off x="9820656" y="3337560"/>
+            <a:off x="9820656" y="3246120"/>
             <a:ext cx="1426464" cy="1170432"/>
           </a:xfrm>
           <a:prstGeom prst="rect">
@@ -4991,20 +5331,56 @@
           <a:noFill/>
         </p:spPr>
         <p:txBody>
-          <a:bodyPr wrap="none" lIns="0" rIns="0" tIns="0" bIns="0" anchor="t">
-            <a:spAutoFit/>
-          </a:bodyPr>
-          <a:lstStyle/>
-          <a:p>
-            <a:pPr algn="ctr"/>
-            <a:r>
-              <a:rPr sz="1150" b="0" i="0">
+          <a:bodyPr wrap="square" lIns="0" rIns="0" tIns="0" bIns="0" anchor="t">
+            <a:spAutoFit/>
+          </a:bodyPr>
+          <a:lstStyle/>
+          <a:p>
+            <a:pPr algn="ctr">
+              <a:spcAft>
+                <a:spcPts val="0"/>
+              </a:spcAft>
+            </a:pPr>
+            <a:r>
+              <a:rPr sz="1080" b="0" i="0">
                 <a:solidFill>
                   <a:srgbClr val="3A5961"/>
                 </a:solidFill>
                 <a:latin typeface="Calibri"/>
               </a:rPr>
-              <a:t>明确单体与微服务的维护策略，减少同一能力在两处重复演进。</a:t>
+              <a:t>明确单体与微服务的</a:t>
+            </a:r>
+          </a:p>
+          <a:p>
+            <a:pPr algn="ctr">
+              <a:spcAft>
+                <a:spcPts val="0"/>
+              </a:spcAft>
+            </a:pPr>
+            <a:r>
+              <a:rPr sz="1080" b="0" i="0">
+                <a:solidFill>
+                  <a:srgbClr val="3A5961"/>
+                </a:solidFill>
+                <a:latin typeface="Calibri"/>
+              </a:rPr>
+              <a:t>维护策略，减少同一能力</a:t>
+            </a:r>
+          </a:p>
+          <a:p>
+            <a:pPr algn="ctr">
+              <a:spcAft>
+                <a:spcPts val="0"/>
+              </a:spcAft>
+            </a:pPr>
+            <a:r>
+              <a:rPr sz="1080" b="0" i="0">
+                <a:solidFill>
+                  <a:srgbClr val="3A5961"/>
+                </a:solidFill>
+                <a:latin typeface="Calibri"/>
+              </a:rPr>
+              <a:t>在两处重复演进。</a:t>
             </a:r>
           </a:p>
         </p:txBody>
@@ -5026,12 +5402,16 @@
           <a:noFill/>
         </p:spPr>
         <p:txBody>
-          <a:bodyPr wrap="none" lIns="0" rIns="0" tIns="0" bIns="0" anchor="t">
-            <a:spAutoFit/>
-          </a:bodyPr>
-          <a:lstStyle/>
-          <a:p>
-            <a:pPr algn="l"/>
+          <a:bodyPr wrap="square" lIns="0" rIns="0" tIns="0" bIns="0" anchor="t">
+            <a:spAutoFit/>
+          </a:bodyPr>
+          <a:lstStyle/>
+          <a:p>
+            <a:pPr algn="l">
+              <a:spcAft>
+                <a:spcPts val="0"/>
+              </a:spcAft>
+            </a:pPr>
             <a:r>
               <a:rPr sz="900" b="0" i="0">
                 <a:solidFill>
@@ -5061,12 +5441,16 @@
           <a:noFill/>
         </p:spPr>
         <p:txBody>
-          <a:bodyPr wrap="none" lIns="0" rIns="0" tIns="0" bIns="0" anchor="t">
-            <a:spAutoFit/>
-          </a:bodyPr>
-          <a:lstStyle/>
-          <a:p>
-            <a:pPr algn="r"/>
+          <a:bodyPr wrap="square" lIns="0" rIns="0" tIns="0" bIns="0" anchor="t">
+            <a:spAutoFit/>
+          </a:bodyPr>
+          <a:lstStyle/>
+          <a:p>
+            <a:pPr algn="r">
+              <a:spcAft>
+                <a:spcPts val="0"/>
+              </a:spcAft>
+            </a:pPr>
             <a:r>
               <a:rPr sz="1100" b="1" i="0">
                 <a:solidFill>
@@ -5294,12 +5678,16 @@
           <a:noFill/>
         </p:spPr>
         <p:txBody>
-          <a:bodyPr wrap="none" lIns="0" rIns="0" tIns="0" bIns="0" anchor="t">
-            <a:spAutoFit/>
-          </a:bodyPr>
-          <a:lstStyle/>
-          <a:p>
-            <a:pPr algn="l"/>
+          <a:bodyPr wrap="square" lIns="0" rIns="0" tIns="0" bIns="0" anchor="t">
+            <a:spAutoFit/>
+          </a:bodyPr>
+          <a:lstStyle/>
+          <a:p>
+            <a:pPr algn="l">
+              <a:spcAft>
+                <a:spcPts val="0"/>
+              </a:spcAft>
+            </a:pPr>
             <a:r>
               <a:rPr sz="4200" b="1" i="0">
                 <a:solidFill>
@@ -5329,12 +5717,16 @@
           <a:noFill/>
         </p:spPr>
         <p:txBody>
-          <a:bodyPr wrap="none" lIns="0" rIns="0" tIns="0" bIns="0" anchor="t">
-            <a:spAutoFit/>
-          </a:bodyPr>
-          <a:lstStyle/>
-          <a:p>
-            <a:pPr algn="l"/>
+          <a:bodyPr wrap="square" lIns="0" rIns="0" tIns="0" bIns="0" anchor="t">
+            <a:spAutoFit/>
+          </a:bodyPr>
+          <a:lstStyle/>
+          <a:p>
+            <a:pPr algn="l">
+              <a:spcAft>
+                <a:spcPts val="0"/>
+              </a:spcAft>
+            </a:pPr>
             <a:r>
               <a:rPr sz="1800" b="0" i="0">
                 <a:solidFill>
@@ -5362,7 +5754,7 @@
             <a:avLst/>
           </a:prstGeom>
           <a:solidFill>
-            <a:srgbClr val="FFFFFF"/>
+            <a:srgbClr val="21295C"/>
           </a:solidFill>
           <a:ln>
             <a:noFill/>
@@ -5407,12 +5799,16 @@
           <a:noFill/>
         </p:spPr>
         <p:txBody>
-          <a:bodyPr wrap="none" lIns="0" rIns="0" tIns="0" bIns="0" anchor="t">
-            <a:spAutoFit/>
-          </a:bodyPr>
-          <a:lstStyle/>
-          <a:p>
-            <a:pPr algn="l"/>
+          <a:bodyPr wrap="square" lIns="0" rIns="0" tIns="0" bIns="0" anchor="t">
+            <a:spAutoFit/>
+          </a:bodyPr>
+          <a:lstStyle/>
+          <a:p>
+            <a:pPr algn="l">
+              <a:spcAft>
+                <a:spcPts val="0"/>
+              </a:spcAft>
+            </a:pPr>
             <a:r>
               <a:rPr sz="1900" b="1" i="0">
                 <a:solidFill>
@@ -5433,29 +5829,65 @@
         </p:nvSpPr>
         <p:spPr>
           <a:xfrm>
-            <a:off x="978407" y="3355848"/>
-            <a:ext cx="2468880" cy="438912"/>
-          </a:xfrm>
-          <a:prstGeom prst="rect">
-            <a:avLst/>
-          </a:prstGeom>
-          <a:noFill/>
-        </p:spPr>
-        <p:txBody>
-          <a:bodyPr wrap="none" lIns="0" rIns="0" tIns="0" bIns="0" anchor="t">
-            <a:spAutoFit/>
-          </a:bodyPr>
-          <a:lstStyle/>
-          <a:p>
-            <a:pPr algn="l"/>
-            <a:r>
-              <a:rPr sz="1250" b="0" i="0">
+            <a:off x="978407" y="3328416"/>
+            <a:ext cx="2468880" cy="621792"/>
+          </a:xfrm>
+          <a:prstGeom prst="rect">
+            <a:avLst/>
+          </a:prstGeom>
+          <a:noFill/>
+        </p:spPr>
+        <p:txBody>
+          <a:bodyPr wrap="square" lIns="0" rIns="0" tIns="0" bIns="0" anchor="t">
+            <a:spAutoFit/>
+          </a:bodyPr>
+          <a:lstStyle/>
+          <a:p>
+            <a:pPr algn="l">
+              <a:spcAft>
+                <a:spcPts val="0"/>
+              </a:spcAft>
+            </a:pPr>
+            <a:r>
+              <a:rPr sz="1230" b="0" i="0">
                 <a:solidFill>
                   <a:srgbClr val="BFEDE6"/>
                 </a:solidFill>
                 <a:latin typeface="Calibri"/>
               </a:rPr>
-              <a:t>四大产品能力、AI 工作流、前端管理页与部署闭环已具备教学演示价值。</a:t>
+              <a:t>四大产品能力、AI 工作流、</a:t>
+            </a:r>
+          </a:p>
+          <a:p>
+            <a:pPr algn="l">
+              <a:spcAft>
+                <a:spcPts val="0"/>
+              </a:spcAft>
+            </a:pPr>
+            <a:r>
+              <a:rPr sz="1230" b="0" i="0">
+                <a:solidFill>
+                  <a:srgbClr val="BFEDE6"/>
+                </a:solidFill>
+                <a:latin typeface="Calibri"/>
+              </a:rPr>
+              <a:t>前端管理页与部署闭环</a:t>
+            </a:r>
+          </a:p>
+          <a:p>
+            <a:pPr algn="l">
+              <a:spcAft>
+                <a:spcPts val="0"/>
+              </a:spcAft>
+            </a:pPr>
+            <a:r>
+              <a:rPr sz="1230" b="0" i="0">
+                <a:solidFill>
+                  <a:srgbClr val="BFEDE6"/>
+                </a:solidFill>
+                <a:latin typeface="Calibri"/>
+              </a:rPr>
+              <a:t>已具备教学演示价值。</a:t>
             </a:r>
           </a:p>
         </p:txBody>
@@ -5475,7 +5907,7 @@
             <a:avLst/>
           </a:prstGeom>
           <a:solidFill>
-            <a:srgbClr val="FFFFFF"/>
+            <a:srgbClr val="21295C"/>
           </a:solidFill>
           <a:ln>
             <a:noFill/>
@@ -5520,12 +5952,16 @@
           <a:noFill/>
         </p:spPr>
         <p:txBody>
-          <a:bodyPr wrap="none" lIns="0" rIns="0" tIns="0" bIns="0" anchor="t">
-            <a:spAutoFit/>
-          </a:bodyPr>
-          <a:lstStyle/>
-          <a:p>
-            <a:pPr algn="l"/>
+          <a:bodyPr wrap="square" lIns="0" rIns="0" tIns="0" bIns="0" anchor="t">
+            <a:spAutoFit/>
+          </a:bodyPr>
+          <a:lstStyle/>
+          <a:p>
+            <a:pPr algn="l">
+              <a:spcAft>
+                <a:spcPts val="0"/>
+              </a:spcAft>
+            </a:pPr>
             <a:r>
               <a:rPr sz="1900" b="1" i="0">
                 <a:solidFill>
@@ -5546,29 +5982,65 @@
         </p:nvSpPr>
         <p:spPr>
           <a:xfrm>
-            <a:off x="4498848" y="3355848"/>
-            <a:ext cx="2468880" cy="438912"/>
-          </a:xfrm>
-          <a:prstGeom prst="rect">
-            <a:avLst/>
-          </a:prstGeom>
-          <a:noFill/>
-        </p:spPr>
-        <p:txBody>
-          <a:bodyPr wrap="none" lIns="0" rIns="0" tIns="0" bIns="0" anchor="t">
-            <a:spAutoFit/>
-          </a:bodyPr>
-          <a:lstStyle/>
-          <a:p>
-            <a:pPr algn="l"/>
-            <a:r>
-              <a:rPr sz="1250" b="0" i="0">
+            <a:off x="4498848" y="3328416"/>
+            <a:ext cx="2468880" cy="621792"/>
+          </a:xfrm>
+          <a:prstGeom prst="rect">
+            <a:avLst/>
+          </a:prstGeom>
+          <a:noFill/>
+        </p:spPr>
+        <p:txBody>
+          <a:bodyPr wrap="square" lIns="0" rIns="0" tIns="0" bIns="0" anchor="t">
+            <a:spAutoFit/>
+          </a:bodyPr>
+          <a:lstStyle/>
+          <a:p>
+            <a:pPr algn="l">
+              <a:spcAft>
+                <a:spcPts val="0"/>
+              </a:spcAft>
+            </a:pPr>
+            <a:r>
+              <a:rPr sz="1230" b="0" i="0">
                 <a:solidFill>
                   <a:srgbClr val="BFEDE6"/>
                 </a:solidFill>
                 <a:latin typeface="Calibri"/>
               </a:rPr>
-              <a:t>CI、离线测试、环境模板、部署说明是进入稳定协作前的关键缺口。</a:t>
+              <a:t>CI、离线测试、环境模板、</a:t>
+            </a:r>
+          </a:p>
+          <a:p>
+            <a:pPr algn="l">
+              <a:spcAft>
+                <a:spcPts val="0"/>
+              </a:spcAft>
+            </a:pPr>
+            <a:r>
+              <a:rPr sz="1230" b="0" i="0">
+                <a:solidFill>
+                  <a:srgbClr val="BFEDE6"/>
+                </a:solidFill>
+                <a:latin typeface="Calibri"/>
+              </a:rPr>
+              <a:t>部署说明是进入稳定协作前</a:t>
+            </a:r>
+          </a:p>
+          <a:p>
+            <a:pPr algn="l">
+              <a:spcAft>
+                <a:spcPts val="0"/>
+              </a:spcAft>
+            </a:pPr>
+            <a:r>
+              <a:rPr sz="1230" b="0" i="0">
+                <a:solidFill>
+                  <a:srgbClr val="BFEDE6"/>
+                </a:solidFill>
+                <a:latin typeface="Calibri"/>
+              </a:rPr>
+              <a:t>的关键缺口。</a:t>
             </a:r>
           </a:p>
         </p:txBody>
@@ -5588,7 +6060,7 @@
             <a:avLst/>
           </a:prstGeom>
           <a:solidFill>
-            <a:srgbClr val="FFFFFF"/>
+            <a:srgbClr val="21295C"/>
           </a:solidFill>
           <a:ln>
             <a:noFill/>
@@ -5633,12 +6105,16 @@
           <a:noFill/>
         </p:spPr>
         <p:txBody>
-          <a:bodyPr wrap="none" lIns="0" rIns="0" tIns="0" bIns="0" anchor="t">
-            <a:spAutoFit/>
-          </a:bodyPr>
-          <a:lstStyle/>
-          <a:p>
-            <a:pPr algn="l"/>
+          <a:bodyPr wrap="square" lIns="0" rIns="0" tIns="0" bIns="0" anchor="t">
+            <a:spAutoFit/>
+          </a:bodyPr>
+          <a:lstStyle/>
+          <a:p>
+            <a:pPr algn="l">
+              <a:spcAft>
+                <a:spcPts val="0"/>
+              </a:spcAft>
+            </a:pPr>
             <a:r>
               <a:rPr sz="1900" b="1" i="0">
                 <a:solidFill>
@@ -5659,29 +6135,65 @@
         </p:nvSpPr>
         <p:spPr>
           <a:xfrm>
-            <a:off x="8019288" y="3355848"/>
-            <a:ext cx="2468880" cy="438912"/>
-          </a:xfrm>
-          <a:prstGeom prst="rect">
-            <a:avLst/>
-          </a:prstGeom>
-          <a:noFill/>
-        </p:spPr>
-        <p:txBody>
-          <a:bodyPr wrap="none" lIns="0" rIns="0" tIns="0" bIns="0" anchor="t">
-            <a:spAutoFit/>
-          </a:bodyPr>
-          <a:lstStyle/>
-          <a:p>
-            <a:pPr algn="l"/>
-            <a:r>
-              <a:rPr sz="1250" b="0" i="0">
+            <a:off x="8019288" y="3328416"/>
+            <a:ext cx="2468880" cy="621792"/>
+          </a:xfrm>
+          <a:prstGeom prst="rect">
+            <a:avLst/>
+          </a:prstGeom>
+          <a:noFill/>
+        </p:spPr>
+        <p:txBody>
+          <a:bodyPr wrap="square" lIns="0" rIns="0" tIns="0" bIns="0" anchor="t">
+            <a:spAutoFit/>
+          </a:bodyPr>
+          <a:lstStyle/>
+          <a:p>
+            <a:pPr algn="l">
+              <a:spcAft>
+                <a:spcPts val="0"/>
+              </a:spcAft>
+            </a:pPr>
+            <a:r>
+              <a:rPr sz="1230" b="0" i="0">
                 <a:solidFill>
                   <a:srgbClr val="BFEDE6"/>
                 </a:solidFill>
                 <a:latin typeface="Calibri"/>
               </a:rPr>
-              <a:t>先做可运行与可验证，再推进生产化监控和双轨代码治理。</a:t>
+              <a:t>先做可运行与可验证，</a:t>
+            </a:r>
+          </a:p>
+          <a:p>
+            <a:pPr algn="l">
+              <a:spcAft>
+                <a:spcPts val="0"/>
+              </a:spcAft>
+            </a:pPr>
+            <a:r>
+              <a:rPr sz="1230" b="0" i="0">
+                <a:solidFill>
+                  <a:srgbClr val="BFEDE6"/>
+                </a:solidFill>
+                <a:latin typeface="Calibri"/>
+              </a:rPr>
+              <a:t>再推进生产化监控和</a:t>
+            </a:r>
+          </a:p>
+          <a:p>
+            <a:pPr algn="l">
+              <a:spcAft>
+                <a:spcPts val="0"/>
+              </a:spcAft>
+            </a:pPr>
+            <a:r>
+              <a:rPr sz="1230" b="0" i="0">
+                <a:solidFill>
+                  <a:srgbClr val="BFEDE6"/>
+                </a:solidFill>
+                <a:latin typeface="Calibri"/>
+              </a:rPr>
+              <a:t>双轨代码治理。</a:t>
             </a:r>
           </a:p>
         </p:txBody>
@@ -5703,12 +6215,16 @@
           <a:noFill/>
         </p:spPr>
         <p:txBody>
-          <a:bodyPr wrap="none" lIns="0" rIns="0" tIns="0" bIns="0" anchor="t">
-            <a:spAutoFit/>
-          </a:bodyPr>
-          <a:lstStyle/>
-          <a:p>
-            <a:pPr algn="l"/>
+          <a:bodyPr wrap="square" lIns="0" rIns="0" tIns="0" bIns="0" anchor="t">
+            <a:spAutoFit/>
+          </a:bodyPr>
+          <a:lstStyle/>
+          <a:p>
+            <a:pPr algn="l">
+              <a:spcAft>
+                <a:spcPts val="0"/>
+              </a:spcAft>
+            </a:pPr>
             <a:r>
               <a:rPr sz="1250" b="1" i="0">
                 <a:solidFill>
@@ -5738,12 +6254,16 @@
           <a:noFill/>
         </p:spPr>
         <p:txBody>
-          <a:bodyPr wrap="none" lIns="0" rIns="0" tIns="0" bIns="0" anchor="t">
-            <a:spAutoFit/>
-          </a:bodyPr>
-          <a:lstStyle/>
-          <a:p>
-            <a:pPr algn="r"/>
+          <a:bodyPr wrap="square" lIns="0" rIns="0" tIns="0" bIns="0" anchor="t">
+            <a:spAutoFit/>
+          </a:bodyPr>
+          <a:lstStyle/>
+          <a:p>
+            <a:pPr algn="r">
+              <a:spcAft>
+                <a:spcPts val="0"/>
+              </a:spcAft>
+            </a:pPr>
             <a:r>
               <a:rPr sz="1100" b="1" i="0">
                 <a:solidFill>
@@ -5791,20 +6311,24 @@
         <p:spPr>
           <a:xfrm>
             <a:off x="530352" y="384048"/>
-            <a:ext cx="8138160" cy="502920"/>
-          </a:xfrm>
-          <a:prstGeom prst="rect">
-            <a:avLst/>
-          </a:prstGeom>
-          <a:noFill/>
-        </p:spPr>
-        <p:txBody>
-          <a:bodyPr wrap="none" lIns="0" rIns="0" tIns="0" bIns="0" anchor="t">
-            <a:spAutoFit/>
-          </a:bodyPr>
-          <a:lstStyle/>
-          <a:p>
-            <a:pPr algn="l"/>
+            <a:ext cx="8229600" cy="502920"/>
+          </a:xfrm>
+          <a:prstGeom prst="rect">
+            <a:avLst/>
+          </a:prstGeom>
+          <a:noFill/>
+        </p:spPr>
+        <p:txBody>
+          <a:bodyPr wrap="square" lIns="0" rIns="0" tIns="0" bIns="0" anchor="t">
+            <a:spAutoFit/>
+          </a:bodyPr>
+          <a:lstStyle/>
+          <a:p>
+            <a:pPr algn="l">
+              <a:spcAft>
+                <a:spcPts val="0"/>
+              </a:spcAft>
+            </a:pPr>
             <a:r>
               <a:rPr sz="3800" b="1" i="0">
                 <a:solidFill>
@@ -5826,20 +6350,24 @@
         <p:spPr>
           <a:xfrm>
             <a:off x="530352" y="914400"/>
-            <a:ext cx="8412480" cy="320040"/>
-          </a:xfrm>
-          <a:prstGeom prst="rect">
-            <a:avLst/>
-          </a:prstGeom>
-          <a:noFill/>
-        </p:spPr>
-        <p:txBody>
-          <a:bodyPr wrap="none" lIns="0" rIns="0" tIns="0" bIns="0" anchor="t">
-            <a:spAutoFit/>
-          </a:bodyPr>
-          <a:lstStyle/>
-          <a:p>
-            <a:pPr algn="l"/>
+            <a:ext cx="8595360" cy="320040"/>
+          </a:xfrm>
+          <a:prstGeom prst="rect">
+            <a:avLst/>
+          </a:prstGeom>
+          <a:noFill/>
+        </p:spPr>
+        <p:txBody>
+          <a:bodyPr wrap="square" lIns="0" rIns="0" tIns="0" bIns="0" anchor="t">
+            <a:spAutoFit/>
+          </a:bodyPr>
+          <a:lstStyle/>
+          <a:p>
+            <a:pPr algn="l">
+              <a:spcAft>
+                <a:spcPts val="0"/>
+              </a:spcAft>
+            </a:pPr>
             <a:r>
               <a:rPr sz="1300" b="0" i="0">
                 <a:solidFill>
@@ -5912,12 +6440,16 @@
           <a:noFill/>
         </p:spPr>
         <p:txBody>
-          <a:bodyPr wrap="none" lIns="0" rIns="0" tIns="0" bIns="0" anchor="t">
-            <a:spAutoFit/>
-          </a:bodyPr>
-          <a:lstStyle/>
-          <a:p>
-            <a:pPr algn="ctr"/>
+          <a:bodyPr wrap="square" lIns="0" rIns="0" tIns="0" bIns="0" anchor="t">
+            <a:spAutoFit/>
+          </a:bodyPr>
+          <a:lstStyle/>
+          <a:p>
+            <a:pPr algn="ctr">
+              <a:spcAft>
+                <a:spcPts val="0"/>
+              </a:spcAft>
+            </a:pPr>
             <a:r>
               <a:rPr sz="800" b="1" i="0">
                 <a:solidFill>
@@ -6035,12 +6567,16 @@
           <a:noFill/>
         </p:spPr>
         <p:txBody>
-          <a:bodyPr wrap="none" lIns="0" rIns="0" tIns="0" bIns="0" anchor="t">
-            <a:spAutoFit/>
-          </a:bodyPr>
-          <a:lstStyle/>
-          <a:p>
-            <a:pPr algn="l"/>
+          <a:bodyPr wrap="square" lIns="0" rIns="0" tIns="0" bIns="0" anchor="t">
+            <a:spAutoFit/>
+          </a:bodyPr>
+          <a:lstStyle/>
+          <a:p>
+            <a:pPr algn="l">
+              <a:spcAft>
+                <a:spcPts val="0"/>
+              </a:spcAft>
+            </a:pPr>
             <a:r>
               <a:rPr sz="1700" b="1" i="0">
                 <a:solidFill>
@@ -6061,27 +6597,27 @@
         </p:nvSpPr>
         <p:spPr>
           <a:xfrm>
-            <a:off x="859536" y="1984248"/>
-            <a:ext cx="2340864" cy="676656"/>
-          </a:xfrm>
-          <a:prstGeom prst="rect">
-            <a:avLst/>
-          </a:prstGeom>
-          <a:noFill/>
-        </p:spPr>
-        <p:txBody>
-          <a:bodyPr wrap="none" lIns="0" rIns="0" tIns="0" bIns="0">
-            <a:spAutoFit/>
-          </a:bodyPr>
-          <a:lstStyle/>
-          <a:p>
-            <a:pPr>
-              <a:spcAft>
-                <a:spcPts val="600"/>
-              </a:spcAft>
-            </a:pPr>
-            <a:r>
-              <a:rPr sz="1350">
+            <a:off x="914400" y="1984248"/>
+            <a:ext cx="2231136" cy="676656"/>
+          </a:xfrm>
+          <a:prstGeom prst="rect">
+            <a:avLst/>
+          </a:prstGeom>
+          <a:noFill/>
+        </p:spPr>
+        <p:txBody>
+          <a:bodyPr wrap="square" lIns="0" rIns="0" tIns="0" bIns="0">
+            <a:spAutoFit/>
+          </a:bodyPr>
+          <a:lstStyle/>
+          <a:p>
+            <a:pPr algn="l">
+              <a:spcAft>
+                <a:spcPts val="200"/>
+              </a:spcAft>
+            </a:pPr>
+            <a:r>
+              <a:rPr sz="1320">
                 <a:solidFill>
                   <a:srgbClr val="3A5961"/>
                 </a:solidFill>
@@ -6091,13 +6627,13 @@
             </a:r>
           </a:p>
           <a:p>
-            <a:pPr>
-              <a:spcAft>
-                <a:spcPts val="600"/>
-              </a:spcAft>
-            </a:pPr>
-            <a:r>
-              <a:rPr sz="1350">
+            <a:pPr algn="l">
+              <a:spcAft>
+                <a:spcPts val="200"/>
+              </a:spcAft>
+            </a:pPr>
+            <a:r>
+              <a:rPr sz="1320">
                 <a:solidFill>
                   <a:srgbClr val="3A5961"/>
                 </a:solidFill>
@@ -6107,19 +6643,19 @@
             </a:r>
           </a:p>
           <a:p>
-            <a:pPr>
-              <a:spcAft>
-                <a:spcPts val="600"/>
-              </a:spcAft>
-            </a:pPr>
-            <a:r>
-              <a:rPr sz="1350">
+            <a:pPr algn="l">
+              <a:spcAft>
+                <a:spcPts val="200"/>
+              </a:spcAft>
+            </a:pPr>
+            <a:r>
+              <a:rPr sz="1320">
                 <a:solidFill>
                   <a:srgbClr val="3A5961"/>
                 </a:solidFill>
                 <a:latin typeface="Calibri"/>
               </a:rPr>
-              <a:t>覆盖生成、编辑、部署、管理闭环</a:t>
+              <a:t>生成、编辑、部署、管理闭环</a:t>
             </a:r>
           </a:p>
         </p:txBody>
@@ -6229,12 +6765,16 @@
           <a:noFill/>
         </p:spPr>
         <p:txBody>
-          <a:bodyPr wrap="none" lIns="0" rIns="0" tIns="0" bIns="0" anchor="t">
-            <a:spAutoFit/>
-          </a:bodyPr>
-          <a:lstStyle/>
-          <a:p>
-            <a:pPr algn="l"/>
+          <a:bodyPr wrap="square" lIns="0" rIns="0" tIns="0" bIns="0" anchor="t">
+            <a:spAutoFit/>
+          </a:bodyPr>
+          <a:lstStyle/>
+          <a:p>
+            <a:pPr algn="l">
+              <a:spcAft>
+                <a:spcPts val="0"/>
+              </a:spcAft>
+            </a:pPr>
             <a:r>
               <a:rPr sz="1700" b="1" i="0">
                 <a:solidFill>
@@ -6255,27 +6795,27 @@
         </p:nvSpPr>
         <p:spPr>
           <a:xfrm>
-            <a:off x="3904487" y="1984248"/>
-            <a:ext cx="2112264" cy="676656"/>
-          </a:xfrm>
-          <a:prstGeom prst="rect">
-            <a:avLst/>
-          </a:prstGeom>
-          <a:noFill/>
-        </p:spPr>
-        <p:txBody>
-          <a:bodyPr wrap="none" lIns="0" rIns="0" tIns="0" bIns="0">
-            <a:spAutoFit/>
-          </a:bodyPr>
-          <a:lstStyle/>
-          <a:p>
-            <a:pPr>
-              <a:spcAft>
-                <a:spcPts val="600"/>
-              </a:spcAft>
-            </a:pPr>
-            <a:r>
-              <a:rPr sz="1350">
+            <a:off x="3959352" y="1984248"/>
+            <a:ext cx="2002536" cy="676656"/>
+          </a:xfrm>
+          <a:prstGeom prst="rect">
+            <a:avLst/>
+          </a:prstGeom>
+          <a:noFill/>
+        </p:spPr>
+        <p:txBody>
+          <a:bodyPr wrap="square" lIns="0" rIns="0" tIns="0" bIns="0">
+            <a:spAutoFit/>
+          </a:bodyPr>
+          <a:lstStyle/>
+          <a:p>
+            <a:pPr algn="l">
+              <a:spcAft>
+                <a:spcPts val="200"/>
+              </a:spcAft>
+            </a:pPr>
+            <a:r>
+              <a:rPr sz="1320">
                 <a:solidFill>
                   <a:srgbClr val="3A5961"/>
                 </a:solidFill>
@@ -6285,13 +6825,13 @@
             </a:r>
           </a:p>
           <a:p>
-            <a:pPr>
-              <a:spcAft>
-                <a:spcPts val="600"/>
-              </a:spcAft>
-            </a:pPr>
-            <a:r>
-              <a:rPr sz="1350">
+            <a:pPr algn="l">
+              <a:spcAft>
+                <a:spcPts val="200"/>
+              </a:spcAft>
+            </a:pPr>
+            <a:r>
+              <a:rPr sz="1320">
                 <a:solidFill>
                   <a:srgbClr val="3A5961"/>
                 </a:solidFill>
@@ -6301,13 +6841,13 @@
             </a:r>
           </a:p>
           <a:p>
-            <a:pPr>
-              <a:spcAft>
-                <a:spcPts val="600"/>
-              </a:spcAft>
-            </a:pPr>
-            <a:r>
-              <a:rPr sz="1350">
+            <a:pPr algn="l">
+              <a:spcAft>
+                <a:spcPts val="200"/>
+              </a:spcAft>
+            </a:pPr>
+            <a:r>
+              <a:rPr sz="1320">
                 <a:solidFill>
                   <a:srgbClr val="3A5961"/>
                 </a:solidFill>
@@ -6327,7 +6867,7 @@
         <p:spPr>
           <a:xfrm>
             <a:off x="6510528" y="1325880"/>
-            <a:ext cx="2331720" cy="1463040"/>
+            <a:ext cx="2514600" cy="1463040"/>
           </a:xfrm>
           <a:prstGeom prst="roundRect">
             <a:avLst/>
@@ -6415,20 +6955,24 @@
         <p:spPr>
           <a:xfrm>
             <a:off x="7168896" y="1490472"/>
-            <a:ext cx="1508760" cy="310896"/>
-          </a:xfrm>
-          <a:prstGeom prst="rect">
-            <a:avLst/>
-          </a:prstGeom>
-          <a:noFill/>
-        </p:spPr>
-        <p:txBody>
-          <a:bodyPr wrap="none" lIns="0" rIns="0" tIns="0" bIns="0" anchor="t">
-            <a:spAutoFit/>
-          </a:bodyPr>
-          <a:lstStyle/>
-          <a:p>
-            <a:pPr algn="l"/>
+            <a:ext cx="1691640" cy="310896"/>
+          </a:xfrm>
+          <a:prstGeom prst="rect">
+            <a:avLst/>
+          </a:prstGeom>
+          <a:noFill/>
+        </p:spPr>
+        <p:txBody>
+          <a:bodyPr wrap="square" lIns="0" rIns="0" tIns="0" bIns="0" anchor="t">
+            <a:spAutoFit/>
+          </a:bodyPr>
+          <a:lstStyle/>
+          <a:p>
+            <a:pPr algn="l">
+              <a:spcAft>
+                <a:spcPts val="0"/>
+              </a:spcAft>
+            </a:pPr>
             <a:r>
               <a:rPr sz="1700" b="1" i="0">
                 <a:solidFill>
@@ -6449,27 +6993,27 @@
         </p:nvSpPr>
         <p:spPr>
           <a:xfrm>
-            <a:off x="6711696" y="1984248"/>
-            <a:ext cx="1929384" cy="676656"/>
-          </a:xfrm>
-          <a:prstGeom prst="rect">
-            <a:avLst/>
-          </a:prstGeom>
-          <a:noFill/>
-        </p:spPr>
-        <p:txBody>
-          <a:bodyPr wrap="none" lIns="0" rIns="0" tIns="0" bIns="0">
-            <a:spAutoFit/>
-          </a:bodyPr>
-          <a:lstStyle/>
-          <a:p>
-            <a:pPr>
-              <a:spcAft>
-                <a:spcPts val="600"/>
-              </a:spcAft>
-            </a:pPr>
-            <a:r>
-              <a:rPr sz="1350">
+            <a:off x="6766560" y="1984248"/>
+            <a:ext cx="2002536" cy="676656"/>
+          </a:xfrm>
+          <a:prstGeom prst="rect">
+            <a:avLst/>
+          </a:prstGeom>
+          <a:noFill/>
+        </p:spPr>
+        <p:txBody>
+          <a:bodyPr wrap="square" lIns="0" rIns="0" tIns="0" bIns="0">
+            <a:spAutoFit/>
+          </a:bodyPr>
+          <a:lstStyle/>
+          <a:p>
+            <a:pPr algn="l">
+              <a:spcAft>
+                <a:spcPts val="200"/>
+              </a:spcAft>
+            </a:pPr>
+            <a:r>
+              <a:rPr sz="1320">
                 <a:solidFill>
                   <a:srgbClr val="3A5961"/>
                 </a:solidFill>
@@ -6479,13 +7023,13 @@
             </a:r>
           </a:p>
           <a:p>
-            <a:pPr>
-              <a:spcAft>
-                <a:spcPts val="600"/>
-              </a:spcAft>
-            </a:pPr>
-            <a:r>
-              <a:rPr sz="1350">
+            <a:pPr algn="l">
+              <a:spcAft>
+                <a:spcPts val="200"/>
+              </a:spcAft>
+            </a:pPr>
+            <a:r>
+              <a:rPr sz="1320">
                 <a:solidFill>
                   <a:srgbClr val="3A5961"/>
                 </a:solidFill>
@@ -6495,13 +7039,13 @@
             </a:r>
           </a:p>
           <a:p>
-            <a:pPr>
-              <a:spcAft>
-                <a:spcPts val="600"/>
-              </a:spcAft>
-            </a:pPr>
-            <a:r>
-              <a:rPr sz="1350">
+            <a:pPr algn="l">
+              <a:spcAft>
+                <a:spcPts val="200"/>
+              </a:spcAft>
+            </a:pPr>
+            <a:r>
+              <a:rPr sz="1320">
                 <a:solidFill>
                   <a:srgbClr val="3A5961"/>
                 </a:solidFill>
@@ -6521,7 +7065,7 @@
         <p:spPr>
           <a:xfrm>
             <a:off x="9125712" y="1325880"/>
-            <a:ext cx="2331720" cy="1463040"/>
+            <a:ext cx="2514600" cy="1463040"/>
           </a:xfrm>
           <a:prstGeom prst="roundRect">
             <a:avLst/>
@@ -6609,20 +7153,24 @@
         <p:spPr>
           <a:xfrm>
             <a:off x="9784080" y="1490472"/>
-            <a:ext cx="1508760" cy="310896"/>
-          </a:xfrm>
-          <a:prstGeom prst="rect">
-            <a:avLst/>
-          </a:prstGeom>
-          <a:noFill/>
-        </p:spPr>
-        <p:txBody>
-          <a:bodyPr wrap="none" lIns="0" rIns="0" tIns="0" bIns="0" anchor="t">
-            <a:spAutoFit/>
-          </a:bodyPr>
-          <a:lstStyle/>
-          <a:p>
-            <a:pPr algn="l"/>
+            <a:ext cx="1691640" cy="310896"/>
+          </a:xfrm>
+          <a:prstGeom prst="rect">
+            <a:avLst/>
+          </a:prstGeom>
+          <a:noFill/>
+        </p:spPr>
+        <p:txBody>
+          <a:bodyPr wrap="square" lIns="0" rIns="0" tIns="0" bIns="0" anchor="t">
+            <a:spAutoFit/>
+          </a:bodyPr>
+          <a:lstStyle/>
+          <a:p>
+            <a:pPr algn="l">
+              <a:spcAft>
+                <a:spcPts val="0"/>
+              </a:spcAft>
+            </a:pPr>
             <a:r>
               <a:rPr sz="1700" b="1" i="0">
                 <a:solidFill>
@@ -6643,27 +7191,27 @@
         </p:nvSpPr>
         <p:spPr>
           <a:xfrm>
-            <a:off x="9326880" y="1984248"/>
-            <a:ext cx="1929384" cy="676656"/>
-          </a:xfrm>
-          <a:prstGeom prst="rect">
-            <a:avLst/>
-          </a:prstGeom>
-          <a:noFill/>
-        </p:spPr>
-        <p:txBody>
-          <a:bodyPr wrap="none" lIns="0" rIns="0" tIns="0" bIns="0">
-            <a:spAutoFit/>
-          </a:bodyPr>
-          <a:lstStyle/>
-          <a:p>
-            <a:pPr>
-              <a:spcAft>
-                <a:spcPts val="600"/>
-              </a:spcAft>
-            </a:pPr>
-            <a:r>
-              <a:rPr sz="1350">
+            <a:off x="9381744" y="1984248"/>
+            <a:ext cx="2002536" cy="676656"/>
+          </a:xfrm>
+          <a:prstGeom prst="rect">
+            <a:avLst/>
+          </a:prstGeom>
+          <a:noFill/>
+        </p:spPr>
+        <p:txBody>
+          <a:bodyPr wrap="square" lIns="0" rIns="0" tIns="0" bIns="0">
+            <a:spAutoFit/>
+          </a:bodyPr>
+          <a:lstStyle/>
+          <a:p>
+            <a:pPr algn="l">
+              <a:spcAft>
+                <a:spcPts val="200"/>
+              </a:spcAft>
+            </a:pPr>
+            <a:r>
+              <a:rPr sz="1320">
                 <a:solidFill>
                   <a:srgbClr val="3A5961"/>
                 </a:solidFill>
@@ -6673,29 +7221,29 @@
             </a:r>
           </a:p>
           <a:p>
-            <a:pPr>
-              <a:spcAft>
-                <a:spcPts val="600"/>
-              </a:spcAft>
-            </a:pPr>
-            <a:r>
-              <a:rPr sz="1350">
+            <a:pPr algn="l">
+              <a:spcAft>
+                <a:spcPts val="200"/>
+              </a:spcAft>
+            </a:pPr>
+            <a:r>
+              <a:rPr sz="1320">
                 <a:solidFill>
                   <a:srgbClr val="3A5961"/>
                 </a:solidFill>
                 <a:latin typeface="Calibri"/>
               </a:rPr>
-              <a:t>生产化仍需补齐工程治理</a:t>
-            </a:r>
-          </a:p>
-          <a:p>
-            <a:pPr>
-              <a:spcAft>
-                <a:spcPts val="600"/>
-              </a:spcAft>
-            </a:pPr>
-            <a:r>
-              <a:rPr sz="1350">
+              <a:t>生产化仍需工程治理</a:t>
+            </a:r>
+          </a:p>
+          <a:p>
+            <a:pPr algn="l">
+              <a:spcAft>
+                <a:spcPts val="200"/>
+              </a:spcAft>
+            </a:pPr>
+            <a:r>
+              <a:rPr sz="1320">
                 <a:solidFill>
                   <a:srgbClr val="3A5961"/>
                 </a:solidFill>
@@ -6715,7 +7263,7 @@
         <p:spPr>
           <a:xfrm>
             <a:off x="658368" y="3246120"/>
-            <a:ext cx="10789920" cy="2103120"/>
+            <a:ext cx="7818120" cy="2103120"/>
           </a:xfrm>
           <a:prstGeom prst="roundRect">
             <a:avLst/>
@@ -6768,12 +7316,16 @@
           <a:noFill/>
         </p:spPr>
         <p:txBody>
-          <a:bodyPr wrap="none" lIns="0" rIns="0" tIns="0" bIns="0" anchor="t">
-            <a:spAutoFit/>
-          </a:bodyPr>
-          <a:lstStyle/>
-          <a:p>
-            <a:pPr algn="l"/>
+          <a:bodyPr wrap="square" lIns="0" rIns="0" tIns="0" bIns="0" anchor="t">
+            <a:spAutoFit/>
+          </a:bodyPr>
+          <a:lstStyle/>
+          <a:p>
+            <a:pPr algn="l">
+              <a:spcAft>
+                <a:spcPts val="0"/>
+              </a:spcAft>
+            </a:pPr>
             <a:r>
               <a:rPr sz="2300" b="1" i="0">
                 <a:solidFill>
@@ -6795,28 +7347,80 @@
         <p:spPr>
           <a:xfrm>
             <a:off x="960120" y="3977639"/>
-            <a:ext cx="7315200" cy="777240"/>
-          </a:xfrm>
-          <a:prstGeom prst="rect">
-            <a:avLst/>
-          </a:prstGeom>
-          <a:noFill/>
-        </p:spPr>
-        <p:txBody>
-          <a:bodyPr wrap="none" lIns="0" rIns="0" tIns="0" bIns="0" anchor="t">
-            <a:spAutoFit/>
-          </a:bodyPr>
-          <a:lstStyle/>
-          <a:p>
-            <a:pPr algn="l"/>
-            <a:r>
-              <a:rPr sz="1500" b="0" i="0">
+            <a:ext cx="6903720" cy="896112"/>
+          </a:xfrm>
+          <a:prstGeom prst="rect">
+            <a:avLst/>
+          </a:prstGeom>
+          <a:noFill/>
+        </p:spPr>
+        <p:txBody>
+          <a:bodyPr wrap="square" lIns="0" rIns="0" tIns="0" bIns="0" anchor="t">
+            <a:spAutoFit/>
+          </a:bodyPr>
+          <a:lstStyle/>
+          <a:p>
+            <a:pPr algn="l">
+              <a:spcAft>
+                <a:spcPts val="0"/>
+              </a:spcAft>
+            </a:pPr>
+            <a:r>
+              <a:rPr sz="1400" b="0" i="0">
                 <a:solidFill>
                   <a:srgbClr val="16323A"/>
                 </a:solidFill>
                 <a:latin typeface="Calibri"/>
               </a:rPr>
-              <a:t>仓库最新主线提交为 2025-08-26 的“第 14 期 - 微服务改造完成”，当前分支近 7 天未产生业务提交。系统已经呈现完整产品闭环，但运行高度依赖本地密钥、中间件与外部服务配置。</a:t>
+              <a:t>仓库最新主线提交为 2025-08-26</a:t>
+            </a:r>
+          </a:p>
+          <a:p>
+            <a:pPr algn="l">
+              <a:spcAft>
+                <a:spcPts val="0"/>
+              </a:spcAft>
+            </a:pPr>
+            <a:r>
+              <a:rPr sz="1400" b="0" i="0">
+                <a:solidFill>
+                  <a:srgbClr val="16323A"/>
+                </a:solidFill>
+                <a:latin typeface="Calibri"/>
+              </a:rPr>
+              <a:t>“第 14 期 - 微服务改造完成”。</a:t>
+            </a:r>
+          </a:p>
+          <a:p>
+            <a:pPr algn="l">
+              <a:spcAft>
+                <a:spcPts val="0"/>
+              </a:spcAft>
+            </a:pPr>
+            <a:r>
+              <a:rPr sz="1400" b="0" i="0">
+                <a:solidFill>
+                  <a:srgbClr val="16323A"/>
+                </a:solidFill>
+                <a:latin typeface="Calibri"/>
+              </a:rPr>
+              <a:t>当前分支近 7 天未产生业务提交；系统已呈现完整产品闭环，</a:t>
+            </a:r>
+          </a:p>
+          <a:p>
+            <a:pPr algn="l">
+              <a:spcAft>
+                <a:spcPts val="0"/>
+              </a:spcAft>
+            </a:pPr>
+            <a:r>
+              <a:rPr sz="1400" b="0" i="0">
+                <a:solidFill>
+                  <a:srgbClr val="16323A"/>
+                </a:solidFill>
+                <a:latin typeface="Calibri"/>
+              </a:rPr>
+              <a:t>但运行高度依赖本地密钥、中间件与外部服务配置。</a:t>
             </a:r>
           </a:p>
         </p:txBody>
@@ -6883,12 +7487,16 @@
           <a:noFill/>
         </p:spPr>
         <p:txBody>
-          <a:bodyPr wrap="none" lIns="0" rIns="0" tIns="0" bIns="0" anchor="t">
-            <a:spAutoFit/>
-          </a:bodyPr>
-          <a:lstStyle/>
-          <a:p>
-            <a:pPr algn="ctr"/>
+          <a:bodyPr wrap="square" lIns="0" rIns="0" tIns="0" bIns="0" anchor="t">
+            <a:spAutoFit/>
+          </a:bodyPr>
+          <a:lstStyle/>
+          <a:p>
+            <a:pPr algn="ctr">
+              <a:spcAft>
+                <a:spcPts val="0"/>
+              </a:spcAft>
+            </a:pPr>
             <a:r>
               <a:rPr sz="2800" b="1" i="0">
                 <a:solidFill>
@@ -6918,12 +7526,16 @@
           <a:noFill/>
         </p:spPr>
         <p:txBody>
-          <a:bodyPr wrap="none" lIns="0" rIns="0" tIns="0" bIns="0" anchor="t">
-            <a:spAutoFit/>
-          </a:bodyPr>
-          <a:lstStyle/>
-          <a:p>
-            <a:pPr algn="ctr"/>
+          <a:bodyPr wrap="square" lIns="0" rIns="0" tIns="0" bIns="0" anchor="t">
+            <a:spAutoFit/>
+          </a:bodyPr>
+          <a:lstStyle/>
+          <a:p>
+            <a:pPr algn="ctr">
+              <a:spcAft>
+                <a:spcPts val="0"/>
+              </a:spcAft>
+            </a:pPr>
             <a:r>
               <a:rPr sz="1200" b="1" i="0">
                 <a:solidFill>
@@ -6944,7 +7556,7 @@
         </p:nvSpPr>
         <p:spPr>
           <a:xfrm>
-            <a:off x="9025128" y="4626864"/>
+            <a:off x="9025128" y="4608576"/>
             <a:ext cx="740664" cy="347472"/>
           </a:xfrm>
           <a:prstGeom prst="rect">
@@ -6953,12 +7565,16 @@
           <a:noFill/>
         </p:spPr>
         <p:txBody>
-          <a:bodyPr wrap="none" lIns="0" rIns="0" tIns="0" bIns="0" anchor="t">
-            <a:spAutoFit/>
-          </a:bodyPr>
-          <a:lstStyle/>
-          <a:p>
-            <a:pPr algn="ctr"/>
+          <a:bodyPr wrap="square" lIns="0" rIns="0" tIns="0" bIns="0" anchor="t">
+            <a:spAutoFit/>
+          </a:bodyPr>
+          <a:lstStyle/>
+          <a:p>
+            <a:pPr algn="ctr">
+              <a:spcAft>
+                <a:spcPts val="0"/>
+              </a:spcAft>
+            </a:pPr>
             <a:r>
               <a:rPr sz="950" b="0" i="0">
                 <a:solidFill>
@@ -7033,12 +7649,16 @@
           <a:noFill/>
         </p:spPr>
         <p:txBody>
-          <a:bodyPr wrap="none" lIns="0" rIns="0" tIns="0" bIns="0" anchor="t">
-            <a:spAutoFit/>
-          </a:bodyPr>
-          <a:lstStyle/>
-          <a:p>
-            <a:pPr algn="ctr"/>
+          <a:bodyPr wrap="square" lIns="0" rIns="0" tIns="0" bIns="0" anchor="t">
+            <a:spAutoFit/>
+          </a:bodyPr>
+          <a:lstStyle/>
+          <a:p>
+            <a:pPr algn="ctr">
+              <a:spcAft>
+                <a:spcPts val="0"/>
+              </a:spcAft>
+            </a:pPr>
             <a:r>
               <a:rPr sz="2800" b="1" i="0">
                 <a:solidFill>
@@ -7068,12 +7688,16 @@
           <a:noFill/>
         </p:spPr>
         <p:txBody>
-          <a:bodyPr wrap="none" lIns="0" rIns="0" tIns="0" bIns="0" anchor="t">
-            <a:spAutoFit/>
-          </a:bodyPr>
-          <a:lstStyle/>
-          <a:p>
-            <a:pPr algn="ctr"/>
+          <a:bodyPr wrap="square" lIns="0" rIns="0" tIns="0" bIns="0" anchor="t">
+            <a:spAutoFit/>
+          </a:bodyPr>
+          <a:lstStyle/>
+          <a:p>
+            <a:pPr algn="ctr">
+              <a:spcAft>
+                <a:spcPts val="0"/>
+              </a:spcAft>
+            </a:pPr>
             <a:r>
               <a:rPr sz="1200" b="1" i="0">
                 <a:solidFill>
@@ -7094,7 +7718,7 @@
         </p:nvSpPr>
         <p:spPr>
           <a:xfrm>
-            <a:off x="10305288" y="4626864"/>
+            <a:off x="10305288" y="4608576"/>
             <a:ext cx="740664" cy="347472"/>
           </a:xfrm>
           <a:prstGeom prst="rect">
@@ -7103,12 +7727,16 @@
           <a:noFill/>
         </p:spPr>
         <p:txBody>
-          <a:bodyPr wrap="none" lIns="0" rIns="0" tIns="0" bIns="0" anchor="t">
-            <a:spAutoFit/>
-          </a:bodyPr>
-          <a:lstStyle/>
-          <a:p>
-            <a:pPr algn="ctr"/>
+          <a:bodyPr wrap="square" lIns="0" rIns="0" tIns="0" bIns="0" anchor="t">
+            <a:spAutoFit/>
+          </a:bodyPr>
+          <a:lstStyle/>
+          <a:p>
+            <a:pPr algn="ctr">
+              <a:spcAft>
+                <a:spcPts val="0"/>
+              </a:spcAft>
+            </a:pPr>
             <a:r>
               <a:rPr sz="950" b="0" i="0">
                 <a:solidFill>
@@ -7138,12 +7766,16 @@
           <a:noFill/>
         </p:spPr>
         <p:txBody>
-          <a:bodyPr wrap="none" lIns="0" rIns="0" tIns="0" bIns="0" anchor="t">
-            <a:spAutoFit/>
-          </a:bodyPr>
-          <a:lstStyle/>
-          <a:p>
-            <a:pPr algn="l"/>
+          <a:bodyPr wrap="square" lIns="0" rIns="0" tIns="0" bIns="0" anchor="t">
+            <a:spAutoFit/>
+          </a:bodyPr>
+          <a:lstStyle/>
+          <a:p>
+            <a:pPr algn="l">
+              <a:spcAft>
+                <a:spcPts val="0"/>
+              </a:spcAft>
+            </a:pPr>
             <a:r>
               <a:rPr sz="900" b="0" i="0">
                 <a:solidFill>
@@ -7173,12 +7805,16 @@
           <a:noFill/>
         </p:spPr>
         <p:txBody>
-          <a:bodyPr wrap="none" lIns="0" rIns="0" tIns="0" bIns="0" anchor="t">
-            <a:spAutoFit/>
-          </a:bodyPr>
-          <a:lstStyle/>
-          <a:p>
-            <a:pPr algn="r"/>
+          <a:bodyPr wrap="square" lIns="0" rIns="0" tIns="0" bIns="0" anchor="t">
+            <a:spAutoFit/>
+          </a:bodyPr>
+          <a:lstStyle/>
+          <a:p>
+            <a:pPr algn="r">
+              <a:spcAft>
+                <a:spcPts val="0"/>
+              </a:spcAft>
+            </a:pPr>
             <a:r>
               <a:rPr sz="1100" b="1" i="0">
                 <a:solidFill>
@@ -7226,20 +7862,24 @@
         <p:spPr>
           <a:xfrm>
             <a:off x="530352" y="384048"/>
-            <a:ext cx="8138160" cy="502920"/>
-          </a:xfrm>
-          <a:prstGeom prst="rect">
-            <a:avLst/>
-          </a:prstGeom>
-          <a:noFill/>
-        </p:spPr>
-        <p:txBody>
-          <a:bodyPr wrap="none" lIns="0" rIns="0" tIns="0" bIns="0" anchor="t">
-            <a:spAutoFit/>
-          </a:bodyPr>
-          <a:lstStyle/>
-          <a:p>
-            <a:pPr algn="l"/>
+            <a:ext cx="8229600" cy="502920"/>
+          </a:xfrm>
+          <a:prstGeom prst="rect">
+            <a:avLst/>
+          </a:prstGeom>
+          <a:noFill/>
+        </p:spPr>
+        <p:txBody>
+          <a:bodyPr wrap="square" lIns="0" rIns="0" tIns="0" bIns="0" anchor="t">
+            <a:spAutoFit/>
+          </a:bodyPr>
+          <a:lstStyle/>
+          <a:p>
+            <a:pPr algn="l">
+              <a:spcAft>
+                <a:spcPts val="0"/>
+              </a:spcAft>
+            </a:pPr>
             <a:r>
               <a:rPr sz="3800" b="1" i="0">
                 <a:solidFill>
@@ -7261,20 +7901,24 @@
         <p:spPr>
           <a:xfrm>
             <a:off x="530352" y="914400"/>
-            <a:ext cx="8412480" cy="320040"/>
-          </a:xfrm>
-          <a:prstGeom prst="rect">
-            <a:avLst/>
-          </a:prstGeom>
-          <a:noFill/>
-        </p:spPr>
-        <p:txBody>
-          <a:bodyPr wrap="none" lIns="0" rIns="0" tIns="0" bIns="0" anchor="t">
-            <a:spAutoFit/>
-          </a:bodyPr>
-          <a:lstStyle/>
-          <a:p>
-            <a:pPr algn="l"/>
+            <a:ext cx="8595360" cy="320040"/>
+          </a:xfrm>
+          <a:prstGeom prst="rect">
+            <a:avLst/>
+          </a:prstGeom>
+          <a:noFill/>
+        </p:spPr>
+        <p:txBody>
+          <a:bodyPr wrap="square" lIns="0" rIns="0" tIns="0" bIns="0" anchor="t">
+            <a:spAutoFit/>
+          </a:bodyPr>
+          <a:lstStyle/>
+          <a:p>
+            <a:pPr algn="l">
+              <a:spcAft>
+                <a:spcPts val="0"/>
+              </a:spcAft>
+            </a:pPr>
             <a:r>
               <a:rPr sz="1300" b="0" i="0">
                 <a:solidFill>
@@ -7347,12 +7991,16 @@
           <a:noFill/>
         </p:spPr>
         <p:txBody>
-          <a:bodyPr wrap="none" lIns="0" rIns="0" tIns="0" bIns="0" anchor="t">
-            <a:spAutoFit/>
-          </a:bodyPr>
-          <a:lstStyle/>
-          <a:p>
-            <a:pPr algn="ctr"/>
+          <a:bodyPr wrap="square" lIns="0" rIns="0" tIns="0" bIns="0" anchor="t">
+            <a:spAutoFit/>
+          </a:bodyPr>
+          <a:lstStyle/>
+          <a:p>
+            <a:pPr algn="ctr">
+              <a:spcAft>
+                <a:spcPts val="0"/>
+              </a:spcAft>
+            </a:pPr>
             <a:r>
               <a:rPr sz="800" b="1" i="0">
                 <a:solidFill>
@@ -7470,12 +8118,16 @@
           <a:noFill/>
         </p:spPr>
         <p:txBody>
-          <a:bodyPr wrap="none" lIns="0" rIns="0" tIns="0" bIns="0" anchor="t">
-            <a:spAutoFit/>
-          </a:bodyPr>
-          <a:lstStyle/>
-          <a:p>
-            <a:pPr algn="ctr"/>
+          <a:bodyPr wrap="square" lIns="0" rIns="0" tIns="0" bIns="0" anchor="t">
+            <a:spAutoFit/>
+          </a:bodyPr>
+          <a:lstStyle/>
+          <a:p>
+            <a:pPr algn="ctr">
+              <a:spcAft>
+                <a:spcPts val="0"/>
+              </a:spcAft>
+            </a:pPr>
             <a:r>
               <a:rPr sz="1100" b="1" i="0">
                 <a:solidFill>
@@ -7505,12 +8157,16 @@
           <a:noFill/>
         </p:spPr>
         <p:txBody>
-          <a:bodyPr wrap="none" lIns="0" rIns="0" tIns="0" bIns="0" anchor="t">
-            <a:spAutoFit/>
-          </a:bodyPr>
-          <a:lstStyle/>
-          <a:p>
-            <a:pPr algn="l"/>
+          <a:bodyPr wrap="square" lIns="0" rIns="0" tIns="0" bIns="0" anchor="t">
+            <a:spAutoFit/>
+          </a:bodyPr>
+          <a:lstStyle/>
+          <a:p>
+            <a:pPr algn="l">
+              <a:spcAft>
+                <a:spcPts val="0"/>
+              </a:spcAft>
+            </a:pPr>
             <a:r>
               <a:rPr sz="1900" b="1" i="0">
                 <a:solidFill>
@@ -7540,12 +8196,12 @@
           <a:noFill/>
         </p:spPr>
         <p:txBody>
-          <a:bodyPr wrap="none" lIns="0" rIns="0" tIns="0" bIns="0">
-            <a:spAutoFit/>
-          </a:bodyPr>
-          <a:lstStyle/>
-          <a:p>
-            <a:pPr>
+          <a:bodyPr wrap="square" lIns="0" rIns="0" tIns="0" bIns="0">
+            <a:spAutoFit/>
+          </a:bodyPr>
+          <a:lstStyle/>
+          <a:p>
+            <a:pPr algn="l">
               <a:spcAft>
                 <a:spcPts val="200"/>
               </a:spcAft>
@@ -7561,7 +8217,7 @@
             </a:r>
           </a:p>
           <a:p>
-            <a:pPr>
+            <a:pPr algn="l">
               <a:spcAft>
                 <a:spcPts val="200"/>
               </a:spcAft>
@@ -7577,7 +8233,7 @@
             </a:r>
           </a:p>
           <a:p>
-            <a:pPr>
+            <a:pPr algn="l">
               <a:spcAft>
                 <a:spcPts val="200"/>
               </a:spcAft>
@@ -7699,12 +8355,16 @@
           <a:noFill/>
         </p:spPr>
         <p:txBody>
-          <a:bodyPr wrap="none" lIns="0" rIns="0" tIns="0" bIns="0" anchor="t">
-            <a:spAutoFit/>
-          </a:bodyPr>
-          <a:lstStyle/>
-          <a:p>
-            <a:pPr algn="ctr"/>
+          <a:bodyPr wrap="square" lIns="0" rIns="0" tIns="0" bIns="0" anchor="t">
+            <a:spAutoFit/>
+          </a:bodyPr>
+          <a:lstStyle/>
+          <a:p>
+            <a:pPr algn="ctr">
+              <a:spcAft>
+                <a:spcPts val="0"/>
+              </a:spcAft>
+            </a:pPr>
             <a:r>
               <a:rPr sz="1100" b="1" i="0">
                 <a:solidFill>
@@ -7734,12 +8394,16 @@
           <a:noFill/>
         </p:spPr>
         <p:txBody>
-          <a:bodyPr wrap="none" lIns="0" rIns="0" tIns="0" bIns="0" anchor="t">
-            <a:spAutoFit/>
-          </a:bodyPr>
-          <a:lstStyle/>
-          <a:p>
-            <a:pPr algn="l"/>
+          <a:bodyPr wrap="square" lIns="0" rIns="0" tIns="0" bIns="0" anchor="t">
+            <a:spAutoFit/>
+          </a:bodyPr>
+          <a:lstStyle/>
+          <a:p>
+            <a:pPr algn="l">
+              <a:spcAft>
+                <a:spcPts val="0"/>
+              </a:spcAft>
+            </a:pPr>
             <a:r>
               <a:rPr sz="1900" b="1" i="0">
                 <a:solidFill>
@@ -7769,12 +8433,12 @@
           <a:noFill/>
         </p:spPr>
         <p:txBody>
-          <a:bodyPr wrap="none" lIns="0" rIns="0" tIns="0" bIns="0">
-            <a:spAutoFit/>
-          </a:bodyPr>
-          <a:lstStyle/>
-          <a:p>
-            <a:pPr>
+          <a:bodyPr wrap="square" lIns="0" rIns="0" tIns="0" bIns="0">
+            <a:spAutoFit/>
+          </a:bodyPr>
+          <a:lstStyle/>
+          <a:p>
+            <a:pPr algn="l">
               <a:spcAft>
                 <a:spcPts val="200"/>
               </a:spcAft>
@@ -7790,7 +8454,7 @@
             </a:r>
           </a:p>
           <a:p>
-            <a:pPr>
+            <a:pPr algn="l">
               <a:spcAft>
                 <a:spcPts val="200"/>
               </a:spcAft>
@@ -7806,7 +8470,7 @@
             </a:r>
           </a:p>
           <a:p>
-            <a:pPr>
+            <a:pPr algn="l">
               <a:spcAft>
                 <a:spcPts val="200"/>
               </a:spcAft>
@@ -7928,12 +8592,16 @@
           <a:noFill/>
         </p:spPr>
         <p:txBody>
-          <a:bodyPr wrap="none" lIns="0" rIns="0" tIns="0" bIns="0" anchor="t">
-            <a:spAutoFit/>
-          </a:bodyPr>
-          <a:lstStyle/>
-          <a:p>
-            <a:pPr algn="ctr"/>
+          <a:bodyPr wrap="square" lIns="0" rIns="0" tIns="0" bIns="0" anchor="t">
+            <a:spAutoFit/>
+          </a:bodyPr>
+          <a:lstStyle/>
+          <a:p>
+            <a:pPr algn="ctr">
+              <a:spcAft>
+                <a:spcPts val="0"/>
+              </a:spcAft>
+            </a:pPr>
             <a:r>
               <a:rPr sz="1100" b="1" i="0">
                 <a:solidFill>
@@ -7963,12 +8631,16 @@
           <a:noFill/>
         </p:spPr>
         <p:txBody>
-          <a:bodyPr wrap="none" lIns="0" rIns="0" tIns="0" bIns="0" anchor="t">
-            <a:spAutoFit/>
-          </a:bodyPr>
-          <a:lstStyle/>
-          <a:p>
-            <a:pPr algn="l"/>
+          <a:bodyPr wrap="square" lIns="0" rIns="0" tIns="0" bIns="0" anchor="t">
+            <a:spAutoFit/>
+          </a:bodyPr>
+          <a:lstStyle/>
+          <a:p>
+            <a:pPr algn="l">
+              <a:spcAft>
+                <a:spcPts val="0"/>
+              </a:spcAft>
+            </a:pPr>
             <a:r>
               <a:rPr sz="1900" b="1" i="0">
                 <a:solidFill>
@@ -7998,12 +8670,12 @@
           <a:noFill/>
         </p:spPr>
         <p:txBody>
-          <a:bodyPr wrap="none" lIns="0" rIns="0" tIns="0" bIns="0">
-            <a:spAutoFit/>
-          </a:bodyPr>
-          <a:lstStyle/>
-          <a:p>
-            <a:pPr>
+          <a:bodyPr wrap="square" lIns="0" rIns="0" tIns="0" bIns="0">
+            <a:spAutoFit/>
+          </a:bodyPr>
+          <a:lstStyle/>
+          <a:p>
+            <a:pPr algn="l">
               <a:spcAft>
                 <a:spcPts val="200"/>
               </a:spcAft>
@@ -8019,7 +8691,7 @@
             </a:r>
           </a:p>
           <a:p>
-            <a:pPr>
+            <a:pPr algn="l">
               <a:spcAft>
                 <a:spcPts val="200"/>
               </a:spcAft>
@@ -8035,7 +8707,7 @@
             </a:r>
           </a:p>
           <a:p>
-            <a:pPr>
+            <a:pPr algn="l">
               <a:spcAft>
                 <a:spcPts val="200"/>
               </a:spcAft>
@@ -8157,12 +8829,16 @@
           <a:noFill/>
         </p:spPr>
         <p:txBody>
-          <a:bodyPr wrap="none" lIns="0" rIns="0" tIns="0" bIns="0" anchor="t">
-            <a:spAutoFit/>
-          </a:bodyPr>
-          <a:lstStyle/>
-          <a:p>
-            <a:pPr algn="ctr"/>
+          <a:bodyPr wrap="square" lIns="0" rIns="0" tIns="0" bIns="0" anchor="t">
+            <a:spAutoFit/>
+          </a:bodyPr>
+          <a:lstStyle/>
+          <a:p>
+            <a:pPr algn="ctr">
+              <a:spcAft>
+                <a:spcPts val="0"/>
+              </a:spcAft>
+            </a:pPr>
             <a:r>
               <a:rPr sz="1100" b="1" i="0">
                 <a:solidFill>
@@ -8192,12 +8868,16 @@
           <a:noFill/>
         </p:spPr>
         <p:txBody>
-          <a:bodyPr wrap="none" lIns="0" rIns="0" tIns="0" bIns="0" anchor="t">
-            <a:spAutoFit/>
-          </a:bodyPr>
-          <a:lstStyle/>
-          <a:p>
-            <a:pPr algn="l"/>
+          <a:bodyPr wrap="square" lIns="0" rIns="0" tIns="0" bIns="0" anchor="t">
+            <a:spAutoFit/>
+          </a:bodyPr>
+          <a:lstStyle/>
+          <a:p>
+            <a:pPr algn="l">
+              <a:spcAft>
+                <a:spcPts val="0"/>
+              </a:spcAft>
+            </a:pPr>
             <a:r>
               <a:rPr sz="1900" b="1" i="0">
                 <a:solidFill>
@@ -8227,12 +8907,12 @@
           <a:noFill/>
         </p:spPr>
         <p:txBody>
-          <a:bodyPr wrap="none" lIns="0" rIns="0" tIns="0" bIns="0">
-            <a:spAutoFit/>
-          </a:bodyPr>
-          <a:lstStyle/>
-          <a:p>
-            <a:pPr>
+          <a:bodyPr wrap="square" lIns="0" rIns="0" tIns="0" bIns="0">
+            <a:spAutoFit/>
+          </a:bodyPr>
+          <a:lstStyle/>
+          <a:p>
+            <a:pPr algn="l">
               <a:spcAft>
                 <a:spcPts val="200"/>
               </a:spcAft>
@@ -8248,7 +8928,7 @@
             </a:r>
           </a:p>
           <a:p>
-            <a:pPr>
+            <a:pPr algn="l">
               <a:spcAft>
                 <a:spcPts val="200"/>
               </a:spcAft>
@@ -8264,7 +8944,7 @@
             </a:r>
           </a:p>
           <a:p>
-            <a:pPr>
+            <a:pPr algn="l">
               <a:spcAft>
                 <a:spcPts val="200"/>
               </a:spcAft>
@@ -8298,12 +8978,16 @@
           <a:noFill/>
         </p:spPr>
         <p:txBody>
-          <a:bodyPr wrap="none" lIns="0" rIns="0" tIns="0" bIns="0" anchor="t">
-            <a:spAutoFit/>
-          </a:bodyPr>
-          <a:lstStyle/>
-          <a:p>
-            <a:pPr algn="l"/>
+          <a:bodyPr wrap="square" lIns="0" rIns="0" tIns="0" bIns="0" anchor="t">
+            <a:spAutoFit/>
+          </a:bodyPr>
+          <a:lstStyle/>
+          <a:p>
+            <a:pPr algn="l">
+              <a:spcAft>
+                <a:spcPts val="0"/>
+              </a:spcAft>
+            </a:pPr>
             <a:r>
               <a:rPr sz="900" b="0" i="0">
                 <a:solidFill>
@@ -8333,12 +9017,16 @@
           <a:noFill/>
         </p:spPr>
         <p:txBody>
-          <a:bodyPr wrap="none" lIns="0" rIns="0" tIns="0" bIns="0" anchor="t">
-            <a:spAutoFit/>
-          </a:bodyPr>
-          <a:lstStyle/>
-          <a:p>
-            <a:pPr algn="r"/>
+          <a:bodyPr wrap="square" lIns="0" rIns="0" tIns="0" bIns="0" anchor="t">
+            <a:spAutoFit/>
+          </a:bodyPr>
+          <a:lstStyle/>
+          <a:p>
+            <a:pPr algn="r">
+              <a:spcAft>
+                <a:spcPts val="0"/>
+              </a:spcAft>
+            </a:pPr>
             <a:r>
               <a:rPr sz="1100" b="1" i="0">
                 <a:solidFill>
@@ -8386,20 +9074,24 @@
         <p:spPr>
           <a:xfrm>
             <a:off x="530352" y="384048"/>
-            <a:ext cx="8138160" cy="502920"/>
-          </a:xfrm>
-          <a:prstGeom prst="rect">
-            <a:avLst/>
-          </a:prstGeom>
-          <a:noFill/>
-        </p:spPr>
-        <p:txBody>
-          <a:bodyPr wrap="none" lIns="0" rIns="0" tIns="0" bIns="0" anchor="t">
-            <a:spAutoFit/>
-          </a:bodyPr>
-          <a:lstStyle/>
-          <a:p>
-            <a:pPr algn="l"/>
+            <a:ext cx="8229600" cy="502920"/>
+          </a:xfrm>
+          <a:prstGeom prst="rect">
+            <a:avLst/>
+          </a:prstGeom>
+          <a:noFill/>
+        </p:spPr>
+        <p:txBody>
+          <a:bodyPr wrap="square" lIns="0" rIns="0" tIns="0" bIns="0" anchor="t">
+            <a:spAutoFit/>
+          </a:bodyPr>
+          <a:lstStyle/>
+          <a:p>
+            <a:pPr algn="l">
+              <a:spcAft>
+                <a:spcPts val="0"/>
+              </a:spcAft>
+            </a:pPr>
             <a:r>
               <a:rPr sz="3800" b="1" i="0">
                 <a:solidFill>
@@ -8421,20 +9113,24 @@
         <p:spPr>
           <a:xfrm>
             <a:off x="530352" y="914400"/>
-            <a:ext cx="8412480" cy="320040"/>
-          </a:xfrm>
-          <a:prstGeom prst="rect">
-            <a:avLst/>
-          </a:prstGeom>
-          <a:noFill/>
-        </p:spPr>
-        <p:txBody>
-          <a:bodyPr wrap="none" lIns="0" rIns="0" tIns="0" bIns="0" anchor="t">
-            <a:spAutoFit/>
-          </a:bodyPr>
-          <a:lstStyle/>
-          <a:p>
-            <a:pPr algn="l"/>
+            <a:ext cx="8595360" cy="320040"/>
+          </a:xfrm>
+          <a:prstGeom prst="rect">
+            <a:avLst/>
+          </a:prstGeom>
+          <a:noFill/>
+        </p:spPr>
+        <p:txBody>
+          <a:bodyPr wrap="square" lIns="0" rIns="0" tIns="0" bIns="0" anchor="t">
+            <a:spAutoFit/>
+          </a:bodyPr>
+          <a:lstStyle/>
+          <a:p>
+            <a:pPr algn="l">
+              <a:spcAft>
+                <a:spcPts val="0"/>
+              </a:spcAft>
+            </a:pPr>
             <a:r>
               <a:rPr sz="1300" b="0" i="0">
                 <a:solidFill>
@@ -8507,12 +9203,16 @@
           <a:noFill/>
         </p:spPr>
         <p:txBody>
-          <a:bodyPr wrap="none" lIns="0" rIns="0" tIns="0" bIns="0" anchor="t">
-            <a:spAutoFit/>
-          </a:bodyPr>
-          <a:lstStyle/>
-          <a:p>
-            <a:pPr algn="ctr"/>
+          <a:bodyPr wrap="square" lIns="0" rIns="0" tIns="0" bIns="0" anchor="t">
+            <a:spAutoFit/>
+          </a:bodyPr>
+          <a:lstStyle/>
+          <a:p>
+            <a:pPr algn="ctr">
+              <a:spcAft>
+                <a:spcPts val="0"/>
+              </a:spcAft>
+            </a:pPr>
             <a:r>
               <a:rPr sz="800" b="1" i="0">
                 <a:solidFill>
@@ -8578,8 +9278,8 @@
         </p:nvSpPr>
         <p:spPr>
           <a:xfrm>
-            <a:off x="713232" y="1417320"/>
-            <a:ext cx="3246120" cy="164592"/>
+            <a:off x="786384" y="1417320"/>
+            <a:ext cx="3099816" cy="146304"/>
           </a:xfrm>
           <a:prstGeom prst="rect">
             <a:avLst/>
@@ -8630,12 +9330,16 @@
           <a:noFill/>
         </p:spPr>
         <p:txBody>
-          <a:bodyPr wrap="none" lIns="0" rIns="0" tIns="0" bIns="0" anchor="t">
-            <a:spAutoFit/>
-          </a:bodyPr>
-          <a:lstStyle/>
-          <a:p>
-            <a:pPr algn="l"/>
+          <a:bodyPr wrap="square" lIns="0" rIns="0" tIns="0" bIns="0" anchor="t">
+            <a:spAutoFit/>
+          </a:bodyPr>
+          <a:lstStyle/>
+          <a:p>
+            <a:pPr algn="l">
+              <a:spcAft>
+                <a:spcPts val="0"/>
+              </a:spcAft>
+            </a:pPr>
             <a:r>
               <a:rPr sz="2000" b="1" i="0">
                 <a:solidFill>
@@ -8665,12 +9369,16 @@
           <a:noFill/>
         </p:spPr>
         <p:txBody>
-          <a:bodyPr wrap="none" lIns="0" rIns="0" tIns="0" bIns="0" anchor="t">
-            <a:spAutoFit/>
-          </a:bodyPr>
-          <a:lstStyle/>
-          <a:p>
-            <a:pPr algn="l"/>
+          <a:bodyPr wrap="square" lIns="0" rIns="0" tIns="0" bIns="0" anchor="t">
+            <a:spAutoFit/>
+          </a:bodyPr>
+          <a:lstStyle/>
+          <a:p>
+            <a:pPr algn="l">
+              <a:spcAft>
+                <a:spcPts val="0"/>
+              </a:spcAft>
+            </a:pPr>
             <a:r>
               <a:rPr sz="1050" b="0" i="1">
                 <a:solidFill>
@@ -8700,12 +9408,12 @@
           <a:noFill/>
         </p:spPr>
         <p:txBody>
-          <a:bodyPr wrap="none" lIns="0" rIns="0" tIns="0" bIns="0">
-            <a:spAutoFit/>
-          </a:bodyPr>
-          <a:lstStyle/>
-          <a:p>
-            <a:pPr>
+          <a:bodyPr wrap="square" lIns="0" rIns="0" tIns="0" bIns="0">
+            <a:spAutoFit/>
+          </a:bodyPr>
+          <a:lstStyle/>
+          <a:p>
+            <a:pPr algn="l">
               <a:spcAft>
                 <a:spcPts val="700"/>
               </a:spcAft>
@@ -8721,7 +9429,7 @@
             </a:r>
           </a:p>
           <a:p>
-            <a:pPr>
+            <a:pPr algn="l">
               <a:spcAft>
                 <a:spcPts val="700"/>
               </a:spcAft>
@@ -8737,7 +9445,7 @@
             </a:r>
           </a:p>
           <a:p>
-            <a:pPr>
+            <a:pPr algn="l">
               <a:spcAft>
                 <a:spcPts val="700"/>
               </a:spcAft>
@@ -8814,12 +9522,16 @@
           <a:noFill/>
         </p:spPr>
         <p:txBody>
-          <a:bodyPr wrap="none" lIns="0" rIns="0" tIns="0" bIns="0" anchor="t">
-            <a:spAutoFit/>
-          </a:bodyPr>
-          <a:lstStyle/>
-          <a:p>
-            <a:pPr algn="ctr"/>
+          <a:bodyPr wrap="square" lIns="0" rIns="0" tIns="0" bIns="0" anchor="t">
+            <a:spAutoFit/>
+          </a:bodyPr>
+          <a:lstStyle/>
+          <a:p>
+            <a:pPr algn="ctr">
+              <a:spcAft>
+                <a:spcPts val="0"/>
+              </a:spcAft>
+            </a:pPr>
             <a:r>
               <a:rPr sz="1000" b="1" i="0">
                 <a:solidFill>
@@ -8885,8 +9597,8 @@
         </p:nvSpPr>
         <p:spPr>
           <a:xfrm>
-            <a:off x="4462272" y="1417320"/>
-            <a:ext cx="3246120" cy="164592"/>
+            <a:off x="4535424" y="1417320"/>
+            <a:ext cx="3099816" cy="146304"/>
           </a:xfrm>
           <a:prstGeom prst="rect">
             <a:avLst/>
@@ -8937,12 +9649,16 @@
           <a:noFill/>
         </p:spPr>
         <p:txBody>
-          <a:bodyPr wrap="none" lIns="0" rIns="0" tIns="0" bIns="0" anchor="t">
-            <a:spAutoFit/>
-          </a:bodyPr>
-          <a:lstStyle/>
-          <a:p>
-            <a:pPr algn="l"/>
+          <a:bodyPr wrap="square" lIns="0" rIns="0" tIns="0" bIns="0" anchor="t">
+            <a:spAutoFit/>
+          </a:bodyPr>
+          <a:lstStyle/>
+          <a:p>
+            <a:pPr algn="l">
+              <a:spcAft>
+                <a:spcPts val="0"/>
+              </a:spcAft>
+            </a:pPr>
             <a:r>
               <a:rPr sz="2000" b="1" i="0">
                 <a:solidFill>
@@ -8972,12 +9688,16 @@
           <a:noFill/>
         </p:spPr>
         <p:txBody>
-          <a:bodyPr wrap="none" lIns="0" rIns="0" tIns="0" bIns="0" anchor="t">
-            <a:spAutoFit/>
-          </a:bodyPr>
-          <a:lstStyle/>
-          <a:p>
-            <a:pPr algn="l"/>
+          <a:bodyPr wrap="square" lIns="0" rIns="0" tIns="0" bIns="0" anchor="t">
+            <a:spAutoFit/>
+          </a:bodyPr>
+          <a:lstStyle/>
+          <a:p>
+            <a:pPr algn="l">
+              <a:spcAft>
+                <a:spcPts val="0"/>
+              </a:spcAft>
+            </a:pPr>
             <a:r>
               <a:rPr sz="1050" b="0" i="1">
                 <a:solidFill>
@@ -9007,12 +9727,12 @@
           <a:noFill/>
         </p:spPr>
         <p:txBody>
-          <a:bodyPr wrap="none" lIns="0" rIns="0" tIns="0" bIns="0">
-            <a:spAutoFit/>
-          </a:bodyPr>
-          <a:lstStyle/>
-          <a:p>
-            <a:pPr>
+          <a:bodyPr wrap="square" lIns="0" rIns="0" tIns="0" bIns="0">
+            <a:spAutoFit/>
+          </a:bodyPr>
+          <a:lstStyle/>
+          <a:p>
+            <a:pPr algn="l">
               <a:spcAft>
                 <a:spcPts val="700"/>
               </a:spcAft>
@@ -9028,7 +9748,7 @@
             </a:r>
           </a:p>
           <a:p>
-            <a:pPr>
+            <a:pPr algn="l">
               <a:spcAft>
                 <a:spcPts val="700"/>
               </a:spcAft>
@@ -9044,7 +9764,7 @@
             </a:r>
           </a:p>
           <a:p>
-            <a:pPr>
+            <a:pPr algn="l">
               <a:spcAft>
                 <a:spcPts val="700"/>
               </a:spcAft>
@@ -9121,12 +9841,16 @@
           <a:noFill/>
         </p:spPr>
         <p:txBody>
-          <a:bodyPr wrap="none" lIns="0" rIns="0" tIns="0" bIns="0" anchor="t">
-            <a:spAutoFit/>
-          </a:bodyPr>
-          <a:lstStyle/>
-          <a:p>
-            <a:pPr algn="ctr"/>
+          <a:bodyPr wrap="square" lIns="0" rIns="0" tIns="0" bIns="0" anchor="t">
+            <a:spAutoFit/>
+          </a:bodyPr>
+          <a:lstStyle/>
+          <a:p>
+            <a:pPr algn="ctr">
+              <a:spcAft>
+                <a:spcPts val="0"/>
+              </a:spcAft>
+            </a:pPr>
             <a:r>
               <a:rPr sz="1000" b="1" i="0">
                 <a:solidFill>
@@ -9192,8 +9916,8 @@
         </p:nvSpPr>
         <p:spPr>
           <a:xfrm>
-            <a:off x="8211311" y="1417320"/>
-            <a:ext cx="3246120" cy="164592"/>
+            <a:off x="8284463" y="1417320"/>
+            <a:ext cx="3099816" cy="146304"/>
           </a:xfrm>
           <a:prstGeom prst="rect">
             <a:avLst/>
@@ -9244,12 +9968,16 @@
           <a:noFill/>
         </p:spPr>
         <p:txBody>
-          <a:bodyPr wrap="none" lIns="0" rIns="0" tIns="0" bIns="0" anchor="t">
-            <a:spAutoFit/>
-          </a:bodyPr>
-          <a:lstStyle/>
-          <a:p>
-            <a:pPr algn="l"/>
+          <a:bodyPr wrap="square" lIns="0" rIns="0" tIns="0" bIns="0" anchor="t">
+            <a:spAutoFit/>
+          </a:bodyPr>
+          <a:lstStyle/>
+          <a:p>
+            <a:pPr algn="l">
+              <a:spcAft>
+                <a:spcPts val="0"/>
+              </a:spcAft>
+            </a:pPr>
             <a:r>
               <a:rPr sz="2000" b="1" i="0">
                 <a:solidFill>
@@ -9279,12 +10007,16 @@
           <a:noFill/>
         </p:spPr>
         <p:txBody>
-          <a:bodyPr wrap="none" lIns="0" rIns="0" tIns="0" bIns="0" anchor="t">
-            <a:spAutoFit/>
-          </a:bodyPr>
-          <a:lstStyle/>
-          <a:p>
-            <a:pPr algn="l"/>
+          <a:bodyPr wrap="square" lIns="0" rIns="0" tIns="0" bIns="0" anchor="t">
+            <a:spAutoFit/>
+          </a:bodyPr>
+          <a:lstStyle/>
+          <a:p>
+            <a:pPr algn="l">
+              <a:spcAft>
+                <a:spcPts val="0"/>
+              </a:spcAft>
+            </a:pPr>
             <a:r>
               <a:rPr sz="1050" b="0" i="1">
                 <a:solidFill>
@@ -9314,12 +10046,12 @@
           <a:noFill/>
         </p:spPr>
         <p:txBody>
-          <a:bodyPr wrap="none" lIns="0" rIns="0" tIns="0" bIns="0">
-            <a:spAutoFit/>
-          </a:bodyPr>
-          <a:lstStyle/>
-          <a:p>
-            <a:pPr>
+          <a:bodyPr wrap="square" lIns="0" rIns="0" tIns="0" bIns="0">
+            <a:spAutoFit/>
+          </a:bodyPr>
+          <a:lstStyle/>
+          <a:p>
+            <a:pPr algn="l">
               <a:spcAft>
                 <a:spcPts val="700"/>
               </a:spcAft>
@@ -9335,7 +10067,7 @@
             </a:r>
           </a:p>
           <a:p>
-            <a:pPr>
+            <a:pPr algn="l">
               <a:spcAft>
                 <a:spcPts val="700"/>
               </a:spcAft>
@@ -9351,7 +10083,7 @@
             </a:r>
           </a:p>
           <a:p>
-            <a:pPr>
+            <a:pPr algn="l">
               <a:spcAft>
                 <a:spcPts val="700"/>
               </a:spcAft>
@@ -9428,12 +10160,16 @@
           <a:noFill/>
         </p:spPr>
         <p:txBody>
-          <a:bodyPr wrap="none" lIns="0" rIns="0" tIns="0" bIns="0" anchor="t">
-            <a:spAutoFit/>
-          </a:bodyPr>
-          <a:lstStyle/>
-          <a:p>
-            <a:pPr algn="ctr"/>
+          <a:bodyPr wrap="square" lIns="0" rIns="0" tIns="0" bIns="0" anchor="t">
+            <a:spAutoFit/>
+          </a:bodyPr>
+          <a:lstStyle/>
+          <a:p>
+            <a:pPr algn="ctr">
+              <a:spcAft>
+                <a:spcPts val="0"/>
+              </a:spcAft>
+            </a:pPr>
             <a:r>
               <a:rPr sz="1000" b="1" i="0">
                 <a:solidFill>
@@ -9549,12 +10285,16 @@
           <a:noFill/>
         </p:spPr>
         <p:txBody>
-          <a:bodyPr wrap="none" lIns="0" rIns="0" tIns="0" bIns="0" anchor="t">
-            <a:spAutoFit/>
-          </a:bodyPr>
-          <a:lstStyle/>
-          <a:p>
-            <a:pPr algn="l"/>
+          <a:bodyPr wrap="square" lIns="0" rIns="0" tIns="0" bIns="0" anchor="t">
+            <a:spAutoFit/>
+          </a:bodyPr>
+          <a:lstStyle/>
+          <a:p>
+            <a:pPr algn="l">
+              <a:spcAft>
+                <a:spcPts val="0"/>
+              </a:spcAft>
+            </a:pPr>
             <a:r>
               <a:rPr sz="900" b="0" i="0">
                 <a:solidFill>
@@ -9584,12 +10324,16 @@
           <a:noFill/>
         </p:spPr>
         <p:txBody>
-          <a:bodyPr wrap="none" lIns="0" rIns="0" tIns="0" bIns="0" anchor="t">
-            <a:spAutoFit/>
-          </a:bodyPr>
-          <a:lstStyle/>
-          <a:p>
-            <a:pPr algn="r"/>
+          <a:bodyPr wrap="square" lIns="0" rIns="0" tIns="0" bIns="0" anchor="t">
+            <a:spAutoFit/>
+          </a:bodyPr>
+          <a:lstStyle/>
+          <a:p>
+            <a:pPr algn="r">
+              <a:spcAft>
+                <a:spcPts val="0"/>
+              </a:spcAft>
+            </a:pPr>
             <a:r>
               <a:rPr sz="1100" b="1" i="0">
                 <a:solidFill>
@@ -9637,20 +10381,24 @@
         <p:spPr>
           <a:xfrm>
             <a:off x="530352" y="384048"/>
-            <a:ext cx="8138160" cy="502920"/>
-          </a:xfrm>
-          <a:prstGeom prst="rect">
-            <a:avLst/>
-          </a:prstGeom>
-          <a:noFill/>
-        </p:spPr>
-        <p:txBody>
-          <a:bodyPr wrap="none" lIns="0" rIns="0" tIns="0" bIns="0" anchor="t">
-            <a:spAutoFit/>
-          </a:bodyPr>
-          <a:lstStyle/>
-          <a:p>
-            <a:pPr algn="l"/>
+            <a:ext cx="8229600" cy="502920"/>
+          </a:xfrm>
+          <a:prstGeom prst="rect">
+            <a:avLst/>
+          </a:prstGeom>
+          <a:noFill/>
+        </p:spPr>
+        <p:txBody>
+          <a:bodyPr wrap="square" lIns="0" rIns="0" tIns="0" bIns="0" anchor="t">
+            <a:spAutoFit/>
+          </a:bodyPr>
+          <a:lstStyle/>
+          <a:p>
+            <a:pPr algn="l">
+              <a:spcAft>
+                <a:spcPts val="0"/>
+              </a:spcAft>
+            </a:pPr>
             <a:r>
               <a:rPr sz="3800" b="1" i="0">
                 <a:solidFill>
@@ -9672,20 +10420,24 @@
         <p:spPr>
           <a:xfrm>
             <a:off x="530352" y="914400"/>
-            <a:ext cx="8412480" cy="320040"/>
-          </a:xfrm>
-          <a:prstGeom prst="rect">
-            <a:avLst/>
-          </a:prstGeom>
-          <a:noFill/>
-        </p:spPr>
-        <p:txBody>
-          <a:bodyPr wrap="none" lIns="0" rIns="0" tIns="0" bIns="0" anchor="t">
-            <a:spAutoFit/>
-          </a:bodyPr>
-          <a:lstStyle/>
-          <a:p>
-            <a:pPr algn="l"/>
+            <a:ext cx="8595360" cy="320040"/>
+          </a:xfrm>
+          <a:prstGeom prst="rect">
+            <a:avLst/>
+          </a:prstGeom>
+          <a:noFill/>
+        </p:spPr>
+        <p:txBody>
+          <a:bodyPr wrap="square" lIns="0" rIns="0" tIns="0" bIns="0" anchor="t">
+            <a:spAutoFit/>
+          </a:bodyPr>
+          <a:lstStyle/>
+          <a:p>
+            <a:pPr algn="l">
+              <a:spcAft>
+                <a:spcPts val="0"/>
+              </a:spcAft>
+            </a:pPr>
             <a:r>
               <a:rPr sz="1300" b="0" i="0">
                 <a:solidFill>
@@ -9758,27 +10510,115 @@
           <a:noFill/>
         </p:spPr>
         <p:txBody>
-          <a:bodyPr wrap="none" lIns="0" rIns="0" tIns="0" bIns="0" anchor="t">
-            <a:spAutoFit/>
-          </a:bodyPr>
+          <a:bodyPr wrap="square" lIns="0" rIns="0" tIns="0" bIns="0" anchor="t">
+            <a:spAutoFit/>
+          </a:bodyPr>
+          <a:lstStyle/>
+          <a:p>
+            <a:pPr algn="ctr">
+              <a:spcAft>
+                <a:spcPts val="0"/>
+              </a:spcAft>
+            </a:pPr>
+            <a:r>
+              <a:rPr sz="800" b="1" i="0">
+                <a:solidFill>
+                  <a:srgbClr val="FFFFFF"/>
+                </a:solidFill>
+                <a:latin typeface="Calibri"/>
+              </a:rPr>
+              <a:t>AI</a:t>
+            </a:r>
+          </a:p>
+        </p:txBody>
+      </p:sp>
+      <p:sp>
+        <p:nvSpPr>
+          <p:cNvPr id="6" name="Rounded Rectangle 5"/>
+          <p:cNvSpPr/>
+          <p:nvPr/>
+        </p:nvSpPr>
+        <p:spPr>
+          <a:xfrm>
+            <a:off x="713232" y="1298448"/>
+            <a:ext cx="10744200" cy="658368"/>
+          </a:xfrm>
+          <a:prstGeom prst="roundRect">
+            <a:avLst/>
+          </a:prstGeom>
+          <a:solidFill>
+            <a:srgbClr val="E7F7F4"/>
+          </a:solidFill>
+          <a:ln w="12700">
+            <a:solidFill>
+              <a:srgbClr val="DDEDEA"/>
+            </a:solidFill>
+          </a:ln>
+        </p:spPr>
+        <p:style>
+          <a:lnRef idx="1">
+            <a:schemeClr val="accent1"/>
+          </a:lnRef>
+          <a:fillRef idx="3">
+            <a:schemeClr val="accent1"/>
+          </a:fillRef>
+          <a:effectRef idx="2">
+            <a:schemeClr val="accent1"/>
+          </a:effectRef>
+          <a:fontRef idx="minor">
+            <a:schemeClr val="lt1"/>
+          </a:fontRef>
+        </p:style>
+        <p:txBody>
+          <a:bodyPr rtlCol="0" anchor="ctr"/>
           <a:lstStyle/>
           <a:p>
             <a:pPr algn="ctr"/>
-            <a:r>
-              <a:rPr sz="800" b="1" i="0">
-                <a:solidFill>
-                  <a:srgbClr val="FFFFFF"/>
-                </a:solidFill>
-                <a:latin typeface="Calibri"/>
-              </a:rPr>
-              <a:t>AI</a:t>
-            </a:r>
-          </a:p>
-        </p:txBody>
-      </p:sp>
-      <p:sp>
-        <p:nvSpPr>
-          <p:cNvPr id="6" name="Rectangle 5"/>
+          </a:p>
+        </p:txBody>
+      </p:sp>
+      <p:sp>
+        <p:nvSpPr>
+          <p:cNvPr id="7" name="TextBox 6"/>
+          <p:cNvSpPr txBox="1"/>
+          <p:nvPr/>
+        </p:nvSpPr>
+        <p:spPr>
+          <a:xfrm>
+            <a:off x="960120" y="1481328"/>
+            <a:ext cx="9875520" cy="228600"/>
+          </a:xfrm>
+          <a:prstGeom prst="rect">
+            <a:avLst/>
+          </a:prstGeom>
+          <a:noFill/>
+        </p:spPr>
+        <p:txBody>
+          <a:bodyPr wrap="square" lIns="0" rIns="0" tIns="0" bIns="0" anchor="t">
+            <a:spAutoFit/>
+          </a:bodyPr>
+          <a:lstStyle/>
+          <a:p>
+            <a:pPr algn="l">
+              <a:spcAft>
+                <a:spcPts val="0"/>
+              </a:spcAft>
+            </a:pPr>
+            <a:r>
+              <a:rPr sz="1500" b="1" i="0">
+                <a:solidFill>
+                  <a:srgbClr val="065A82"/>
+                </a:solidFill>
+                <a:latin typeface="Calibri"/>
+              </a:rPr>
+              <a:t>结论：近期没有代码层面的昨日变更；状态汇报重点转向“现状盘点 + 工程治理缺口”。</a:t>
+            </a:r>
+          </a:p>
+        </p:txBody>
+      </p:sp>
+      <p:sp>
+        <p:nvSpPr>
+          <p:cNvPr id="8" name="Rectangle 7"/>
           <p:cNvSpPr/>
           <p:nvPr/>
         </p:nvSpPr>
@@ -9821,7 +10661,7 @@
       </p:sp>
       <p:sp>
         <p:nvSpPr>
-          <p:cNvPr id="7" name="Oval 6"/>
+          <p:cNvPr id="9" name="Oval 8"/>
           <p:cNvSpPr/>
           <p:nvPr/>
         </p:nvSpPr>
@@ -9864,7 +10704,7 @@
       </p:sp>
       <p:sp>
         <p:nvSpPr>
-          <p:cNvPr id="8" name="TextBox 7"/>
+          <p:cNvPr id="10" name="TextBox 9"/>
           <p:cNvSpPr txBox="1"/>
           <p:nvPr/>
         </p:nvSpPr>
@@ -9879,12 +10719,16 @@
           <a:noFill/>
         </p:spPr>
         <p:txBody>
-          <a:bodyPr wrap="none" lIns="0" rIns="0" tIns="0" bIns="0" anchor="t">
-            <a:spAutoFit/>
-          </a:bodyPr>
-          <a:lstStyle/>
-          <a:p>
-            <a:pPr algn="ctr"/>
+          <a:bodyPr wrap="square" lIns="0" rIns="0" tIns="0" bIns="0" anchor="t">
+            <a:spAutoFit/>
+          </a:bodyPr>
+          <a:lstStyle/>
+          <a:p>
+            <a:pPr algn="ctr">
+              <a:spcAft>
+                <a:spcPts val="0"/>
+              </a:spcAft>
+            </a:pPr>
             <a:r>
               <a:rPr sz="1200" b="1" i="0">
                 <a:solidFill>
@@ -9899,7 +10743,7 @@
       </p:sp>
       <p:sp>
         <p:nvSpPr>
-          <p:cNvPr id="9" name="Rounded Rectangle 8"/>
+          <p:cNvPr id="11" name="Rounded Rectangle 10"/>
           <p:cNvSpPr/>
           <p:nvPr/>
         </p:nvSpPr>
@@ -9944,7 +10788,7 @@
       </p:sp>
       <p:sp>
         <p:nvSpPr>
-          <p:cNvPr id="10" name="TextBox 9"/>
+          <p:cNvPr id="12" name="TextBox 11"/>
           <p:cNvSpPr txBox="1"/>
           <p:nvPr/>
         </p:nvSpPr>
@@ -9959,12 +10803,16 @@
           <a:noFill/>
         </p:spPr>
         <p:txBody>
-          <a:bodyPr wrap="none" lIns="0" rIns="0" tIns="0" bIns="0" anchor="t">
-            <a:spAutoFit/>
-          </a:bodyPr>
-          <a:lstStyle/>
-          <a:p>
-            <a:pPr algn="ctr"/>
+          <a:bodyPr wrap="square" lIns="0" rIns="0" tIns="0" bIns="0" anchor="t">
+            <a:spAutoFit/>
+          </a:bodyPr>
+          <a:lstStyle/>
+          <a:p>
+            <a:pPr algn="ctr">
+              <a:spcAft>
+                <a:spcPts val="0"/>
+              </a:spcAft>
+            </a:pPr>
             <a:r>
               <a:rPr sz="1500" b="1" i="0">
                 <a:solidFill>
@@ -9979,7 +10827,7 @@
       </p:sp>
       <p:sp>
         <p:nvSpPr>
-          <p:cNvPr id="11" name="TextBox 10"/>
+          <p:cNvPr id="13" name="TextBox 12"/>
           <p:cNvSpPr txBox="1"/>
           <p:nvPr/>
         </p:nvSpPr>
@@ -9994,12 +10842,12 @@
           <a:noFill/>
         </p:spPr>
         <p:txBody>
-          <a:bodyPr wrap="none" lIns="0" rIns="0" tIns="0" bIns="0">
-            <a:spAutoFit/>
-          </a:bodyPr>
-          <a:lstStyle/>
-          <a:p>
-            <a:pPr>
+          <a:bodyPr wrap="square" lIns="0" rIns="0" tIns="0" bIns="0">
+            <a:spAutoFit/>
+          </a:bodyPr>
+          <a:lstStyle/>
+          <a:p>
+            <a:pPr algn="l">
               <a:spcAft>
                 <a:spcPts val="100"/>
               </a:spcAft>
@@ -10015,7 +10863,7 @@
             </a:r>
           </a:p>
           <a:p>
-            <a:pPr>
+            <a:pPr algn="l">
               <a:spcAft>
                 <a:spcPts val="100"/>
               </a:spcAft>
@@ -10034,7 +10882,7 @@
       </p:sp>
       <p:sp>
         <p:nvSpPr>
-          <p:cNvPr id="12" name="Oval 11"/>
+          <p:cNvPr id="14" name="Oval 13"/>
           <p:cNvSpPr/>
           <p:nvPr/>
         </p:nvSpPr>
@@ -10077,7 +10925,7 @@
       </p:sp>
       <p:sp>
         <p:nvSpPr>
-          <p:cNvPr id="13" name="TextBox 12"/>
+          <p:cNvPr id="15" name="TextBox 14"/>
           <p:cNvSpPr txBox="1"/>
           <p:nvPr/>
         </p:nvSpPr>
@@ -10092,12 +10940,16 @@
           <a:noFill/>
         </p:spPr>
         <p:txBody>
-          <a:bodyPr wrap="none" lIns="0" rIns="0" tIns="0" bIns="0" anchor="t">
-            <a:spAutoFit/>
-          </a:bodyPr>
-          <a:lstStyle/>
-          <a:p>
-            <a:pPr algn="ctr"/>
+          <a:bodyPr wrap="square" lIns="0" rIns="0" tIns="0" bIns="0" anchor="t">
+            <a:spAutoFit/>
+          </a:bodyPr>
+          <a:lstStyle/>
+          <a:p>
+            <a:pPr algn="ctr">
+              <a:spcAft>
+                <a:spcPts val="0"/>
+              </a:spcAft>
+            </a:pPr>
             <a:r>
               <a:rPr sz="1200" b="1" i="0">
                 <a:solidFill>
@@ -10112,7 +10964,7 @@
       </p:sp>
       <p:sp>
         <p:nvSpPr>
-          <p:cNvPr id="14" name="Rounded Rectangle 13"/>
+          <p:cNvPr id="16" name="Rounded Rectangle 15"/>
           <p:cNvSpPr/>
           <p:nvPr/>
         </p:nvSpPr>
@@ -10157,7 +11009,7 @@
       </p:sp>
       <p:sp>
         <p:nvSpPr>
-          <p:cNvPr id="15" name="TextBox 14"/>
+          <p:cNvPr id="17" name="TextBox 16"/>
           <p:cNvSpPr txBox="1"/>
           <p:nvPr/>
         </p:nvSpPr>
@@ -10172,12 +11024,16 @@
           <a:noFill/>
         </p:spPr>
         <p:txBody>
-          <a:bodyPr wrap="none" lIns="0" rIns="0" tIns="0" bIns="0" anchor="t">
-            <a:spAutoFit/>
-          </a:bodyPr>
-          <a:lstStyle/>
-          <a:p>
-            <a:pPr algn="ctr"/>
+          <a:bodyPr wrap="square" lIns="0" rIns="0" tIns="0" bIns="0" anchor="t">
+            <a:spAutoFit/>
+          </a:bodyPr>
+          <a:lstStyle/>
+          <a:p>
+            <a:pPr algn="ctr">
+              <a:spcAft>
+                <a:spcPts val="0"/>
+              </a:spcAft>
+            </a:pPr>
             <a:r>
               <a:rPr sz="1500" b="1" i="0">
                 <a:solidFill>
@@ -10192,7 +11048,7 @@
       </p:sp>
       <p:sp>
         <p:nvSpPr>
-          <p:cNvPr id="16" name="TextBox 15"/>
+          <p:cNvPr id="18" name="TextBox 17"/>
           <p:cNvSpPr txBox="1"/>
           <p:nvPr/>
         </p:nvSpPr>
@@ -10207,12 +11063,12 @@
           <a:noFill/>
         </p:spPr>
         <p:txBody>
-          <a:bodyPr wrap="none" lIns="0" rIns="0" tIns="0" bIns="0">
-            <a:spAutoFit/>
-          </a:bodyPr>
-          <a:lstStyle/>
-          <a:p>
-            <a:pPr>
+          <a:bodyPr wrap="square" lIns="0" rIns="0" tIns="0" bIns="0">
+            <a:spAutoFit/>
+          </a:bodyPr>
+          <a:lstStyle/>
+          <a:p>
+            <a:pPr algn="l">
               <a:spcAft>
                 <a:spcPts val="100"/>
               </a:spcAft>
@@ -10228,7 +11084,7 @@
             </a:r>
           </a:p>
           <a:p>
-            <a:pPr>
+            <a:pPr algn="l">
               <a:spcAft>
                 <a:spcPts val="100"/>
               </a:spcAft>
@@ -10247,7 +11103,7 @@
       </p:sp>
       <p:sp>
         <p:nvSpPr>
-          <p:cNvPr id="17" name="Oval 16"/>
+          <p:cNvPr id="19" name="Oval 18"/>
           <p:cNvSpPr/>
           <p:nvPr/>
         </p:nvSpPr>
@@ -10290,7 +11146,7 @@
       </p:sp>
       <p:sp>
         <p:nvSpPr>
-          <p:cNvPr id="18" name="TextBox 17"/>
+          <p:cNvPr id="20" name="TextBox 19"/>
           <p:cNvSpPr txBox="1"/>
           <p:nvPr/>
         </p:nvSpPr>
@@ -10305,12 +11161,16 @@
           <a:noFill/>
         </p:spPr>
         <p:txBody>
-          <a:bodyPr wrap="none" lIns="0" rIns="0" tIns="0" bIns="0" anchor="t">
-            <a:spAutoFit/>
-          </a:bodyPr>
-          <a:lstStyle/>
-          <a:p>
-            <a:pPr algn="ctr"/>
+          <a:bodyPr wrap="square" lIns="0" rIns="0" tIns="0" bIns="0" anchor="t">
+            <a:spAutoFit/>
+          </a:bodyPr>
+          <a:lstStyle/>
+          <a:p>
+            <a:pPr algn="ctr">
+              <a:spcAft>
+                <a:spcPts val="0"/>
+              </a:spcAft>
+            </a:pPr>
             <a:r>
               <a:rPr sz="1200" b="1" i="0">
                 <a:solidFill>
@@ -10325,7 +11185,7 @@
       </p:sp>
       <p:sp>
         <p:nvSpPr>
-          <p:cNvPr id="19" name="Rounded Rectangle 18"/>
+          <p:cNvPr id="21" name="Rounded Rectangle 20"/>
           <p:cNvSpPr/>
           <p:nvPr/>
         </p:nvSpPr>
@@ -10370,7 +11230,7 @@
       </p:sp>
       <p:sp>
         <p:nvSpPr>
-          <p:cNvPr id="20" name="TextBox 19"/>
+          <p:cNvPr id="22" name="TextBox 21"/>
           <p:cNvSpPr txBox="1"/>
           <p:nvPr/>
         </p:nvSpPr>
@@ -10385,12 +11245,16 @@
           <a:noFill/>
         </p:spPr>
         <p:txBody>
-          <a:bodyPr wrap="none" lIns="0" rIns="0" tIns="0" bIns="0" anchor="t">
-            <a:spAutoFit/>
-          </a:bodyPr>
-          <a:lstStyle/>
-          <a:p>
-            <a:pPr algn="ctr"/>
+          <a:bodyPr wrap="square" lIns="0" rIns="0" tIns="0" bIns="0" anchor="t">
+            <a:spAutoFit/>
+          </a:bodyPr>
+          <a:lstStyle/>
+          <a:p>
+            <a:pPr algn="ctr">
+              <a:spcAft>
+                <a:spcPts val="0"/>
+              </a:spcAft>
+            </a:pPr>
             <a:r>
               <a:rPr sz="1500" b="1" i="0">
                 <a:solidFill>
@@ -10405,7 +11269,7 @@
       </p:sp>
       <p:sp>
         <p:nvSpPr>
-          <p:cNvPr id="21" name="TextBox 20"/>
+          <p:cNvPr id="23" name="TextBox 22"/>
           <p:cNvSpPr txBox="1"/>
           <p:nvPr/>
         </p:nvSpPr>
@@ -10420,12 +11284,12 @@
           <a:noFill/>
         </p:spPr>
         <p:txBody>
-          <a:bodyPr wrap="none" lIns="0" rIns="0" tIns="0" bIns="0">
-            <a:spAutoFit/>
-          </a:bodyPr>
-          <a:lstStyle/>
-          <a:p>
-            <a:pPr>
+          <a:bodyPr wrap="square" lIns="0" rIns="0" tIns="0" bIns="0">
+            <a:spAutoFit/>
+          </a:bodyPr>
+          <a:lstStyle/>
+          <a:p>
+            <a:pPr algn="l">
               <a:spcAft>
                 <a:spcPts val="100"/>
               </a:spcAft>
@@ -10441,7 +11305,7 @@
             </a:r>
           </a:p>
           <a:p>
-            <a:pPr>
+            <a:pPr algn="l">
               <a:spcAft>
                 <a:spcPts val="100"/>
               </a:spcAft>
@@ -10454,86 +11318,6 @@
                 <a:latin typeface="Calibri"/>
               </a:rPr>
               <a:t>新增 PPTX 报告</a:t>
-            </a:r>
-          </a:p>
-        </p:txBody>
-      </p:sp>
-      <p:sp>
-        <p:nvSpPr>
-          <p:cNvPr id="22" name="Rounded Rectangle 21"/>
-          <p:cNvSpPr/>
-          <p:nvPr/>
-        </p:nvSpPr>
-        <p:spPr>
-          <a:xfrm>
-            <a:off x="713232" y="1298448"/>
-            <a:ext cx="10744200" cy="658368"/>
-          </a:xfrm>
-          <a:prstGeom prst="roundRect">
-            <a:avLst/>
-          </a:prstGeom>
-          <a:solidFill>
-            <a:srgbClr val="E7F7F4"/>
-          </a:solidFill>
-          <a:ln w="12700">
-            <a:solidFill>
-              <a:srgbClr val="DDEDEA"/>
-            </a:solidFill>
-          </a:ln>
-        </p:spPr>
-        <p:style>
-          <a:lnRef idx="1">
-            <a:schemeClr val="accent1"/>
-          </a:lnRef>
-          <a:fillRef idx="3">
-            <a:schemeClr val="accent1"/>
-          </a:fillRef>
-          <a:effectRef idx="2">
-            <a:schemeClr val="accent1"/>
-          </a:effectRef>
-          <a:fontRef idx="minor">
-            <a:schemeClr val="lt1"/>
-          </a:fontRef>
-        </p:style>
-        <p:txBody>
-          <a:bodyPr rtlCol="0" anchor="ctr"/>
-          <a:lstStyle/>
-          <a:p>
-            <a:pPr algn="ctr"/>
-          </a:p>
-        </p:txBody>
-      </p:sp>
-      <p:sp>
-        <p:nvSpPr>
-          <p:cNvPr id="23" name="TextBox 22"/>
-          <p:cNvSpPr txBox="1"/>
-          <p:nvPr/>
-        </p:nvSpPr>
-        <p:spPr>
-          <a:xfrm>
-            <a:off x="960120" y="1481328"/>
-            <a:ext cx="9875520" cy="228600"/>
-          </a:xfrm>
-          <a:prstGeom prst="rect">
-            <a:avLst/>
-          </a:prstGeom>
-          <a:noFill/>
-        </p:spPr>
-        <p:txBody>
-          <a:bodyPr wrap="none" lIns="0" rIns="0" tIns="0" bIns="0" anchor="t">
-            <a:spAutoFit/>
-          </a:bodyPr>
-          <a:lstStyle/>
-          <a:p>
-            <a:pPr algn="l"/>
-            <a:r>
-              <a:rPr sz="1500" b="1" i="0">
-                <a:solidFill>
-                  <a:srgbClr val="065A82"/>
-                </a:solidFill>
-                <a:latin typeface="Calibri"/>
-              </a:rPr>
-              <a:t>结论：近期没有代码层面的昨日变更；状态汇报重点应从“新增功能”转向“现状盘点 + 工程治理缺口”。</a:t>
             </a:r>
           </a:p>
         </p:txBody>
@@ -10555,12 +11339,16 @@
           <a:noFill/>
         </p:spPr>
         <p:txBody>
-          <a:bodyPr wrap="none" lIns="0" rIns="0" tIns="0" bIns="0" anchor="t">
-            <a:spAutoFit/>
-          </a:bodyPr>
-          <a:lstStyle/>
-          <a:p>
-            <a:pPr algn="l"/>
+          <a:bodyPr wrap="square" lIns="0" rIns="0" tIns="0" bIns="0" anchor="t">
+            <a:spAutoFit/>
+          </a:bodyPr>
+          <a:lstStyle/>
+          <a:p>
+            <a:pPr algn="l">
+              <a:spcAft>
+                <a:spcPts val="0"/>
+              </a:spcAft>
+            </a:pPr>
             <a:r>
               <a:rPr sz="900" b="0" i="0">
                 <a:solidFill>
@@ -10590,12 +11378,16 @@
           <a:noFill/>
         </p:spPr>
         <p:txBody>
-          <a:bodyPr wrap="none" lIns="0" rIns="0" tIns="0" bIns="0" anchor="t">
-            <a:spAutoFit/>
-          </a:bodyPr>
-          <a:lstStyle/>
-          <a:p>
-            <a:pPr algn="r"/>
+          <a:bodyPr wrap="square" lIns="0" rIns="0" tIns="0" bIns="0" anchor="t">
+            <a:spAutoFit/>
+          </a:bodyPr>
+          <a:lstStyle/>
+          <a:p>
+            <a:pPr algn="r">
+              <a:spcAft>
+                <a:spcPts val="0"/>
+              </a:spcAft>
+            </a:pPr>
             <a:r>
               <a:rPr sz="1100" b="1" i="0">
                 <a:solidFill>
@@ -10643,20 +11435,24 @@
         <p:spPr>
           <a:xfrm>
             <a:off x="530352" y="384048"/>
-            <a:ext cx="8138160" cy="502920"/>
-          </a:xfrm>
-          <a:prstGeom prst="rect">
-            <a:avLst/>
-          </a:prstGeom>
-          <a:noFill/>
-        </p:spPr>
-        <p:txBody>
-          <a:bodyPr wrap="none" lIns="0" rIns="0" tIns="0" bIns="0" anchor="t">
-            <a:spAutoFit/>
-          </a:bodyPr>
-          <a:lstStyle/>
-          <a:p>
-            <a:pPr algn="l"/>
+            <a:ext cx="8229600" cy="502920"/>
+          </a:xfrm>
+          <a:prstGeom prst="rect">
+            <a:avLst/>
+          </a:prstGeom>
+          <a:noFill/>
+        </p:spPr>
+        <p:txBody>
+          <a:bodyPr wrap="square" lIns="0" rIns="0" tIns="0" bIns="0" anchor="t">
+            <a:spAutoFit/>
+          </a:bodyPr>
+          <a:lstStyle/>
+          <a:p>
+            <a:pPr algn="l">
+              <a:spcAft>
+                <a:spcPts val="0"/>
+              </a:spcAft>
+            </a:pPr>
             <a:r>
               <a:rPr sz="3800" b="1" i="0">
                 <a:solidFill>
@@ -10678,20 +11474,24 @@
         <p:spPr>
           <a:xfrm>
             <a:off x="530352" y="914400"/>
-            <a:ext cx="8412480" cy="320040"/>
-          </a:xfrm>
-          <a:prstGeom prst="rect">
-            <a:avLst/>
-          </a:prstGeom>
-          <a:noFill/>
-        </p:spPr>
-        <p:txBody>
-          <a:bodyPr wrap="none" lIns="0" rIns="0" tIns="0" bIns="0" anchor="t">
-            <a:spAutoFit/>
-          </a:bodyPr>
-          <a:lstStyle/>
-          <a:p>
-            <a:pPr algn="l"/>
+            <a:ext cx="8595360" cy="320040"/>
+          </a:xfrm>
+          <a:prstGeom prst="rect">
+            <a:avLst/>
+          </a:prstGeom>
+          <a:noFill/>
+        </p:spPr>
+        <p:txBody>
+          <a:bodyPr wrap="square" lIns="0" rIns="0" tIns="0" bIns="0" anchor="t">
+            <a:spAutoFit/>
+          </a:bodyPr>
+          <a:lstStyle/>
+          <a:p>
+            <a:pPr algn="l">
+              <a:spcAft>
+                <a:spcPts val="0"/>
+              </a:spcAft>
+            </a:pPr>
             <a:r>
               <a:rPr sz="1300" b="0" i="0">
                 <a:solidFill>
@@ -10764,12 +11564,16 @@
           <a:noFill/>
         </p:spPr>
         <p:txBody>
-          <a:bodyPr wrap="none" lIns="0" rIns="0" tIns="0" bIns="0" anchor="t">
-            <a:spAutoFit/>
-          </a:bodyPr>
-          <a:lstStyle/>
-          <a:p>
-            <a:pPr algn="ctr"/>
+          <a:bodyPr wrap="square" lIns="0" rIns="0" tIns="0" bIns="0" anchor="t">
+            <a:spAutoFit/>
+          </a:bodyPr>
+          <a:lstStyle/>
+          <a:p>
+            <a:pPr algn="ctr">
+              <a:spcAft>
+                <a:spcPts val="0"/>
+              </a:spcAft>
+            </a:pPr>
             <a:r>
               <a:rPr sz="800" b="1" i="0">
                 <a:solidFill>
@@ -10844,12 +11648,16 @@
           <a:noFill/>
         </p:spPr>
         <p:txBody>
-          <a:bodyPr wrap="none" lIns="0" rIns="0" tIns="0" bIns="0" anchor="t">
-            <a:spAutoFit/>
-          </a:bodyPr>
-          <a:lstStyle/>
-          <a:p>
-            <a:pPr algn="ctr"/>
+          <a:bodyPr wrap="square" lIns="0" rIns="0" tIns="0" bIns="0" anchor="t">
+            <a:spAutoFit/>
+          </a:bodyPr>
+          <a:lstStyle/>
+          <a:p>
+            <a:pPr algn="ctr">
+              <a:spcAft>
+                <a:spcPts val="0"/>
+              </a:spcAft>
+            </a:pPr>
             <a:r>
               <a:rPr sz="2800" b="1" i="0">
                 <a:solidFill>
@@ -10879,12 +11687,16 @@
           <a:noFill/>
         </p:spPr>
         <p:txBody>
-          <a:bodyPr wrap="none" lIns="0" rIns="0" tIns="0" bIns="0" anchor="t">
-            <a:spAutoFit/>
-          </a:bodyPr>
-          <a:lstStyle/>
-          <a:p>
-            <a:pPr algn="ctr"/>
+          <a:bodyPr wrap="square" lIns="0" rIns="0" tIns="0" bIns="0" anchor="t">
+            <a:spAutoFit/>
+          </a:bodyPr>
+          <a:lstStyle/>
+          <a:p>
+            <a:pPr algn="ctr">
+              <a:spcAft>
+                <a:spcPts val="0"/>
+              </a:spcAft>
+            </a:pPr>
             <a:r>
               <a:rPr sz="1200" b="1" i="0">
                 <a:solidFill>
@@ -10905,7 +11717,7 @@
         </p:nvSpPr>
         <p:spPr>
           <a:xfrm>
-            <a:off x="914400" y="2450591"/>
+            <a:off x="914400" y="2432304"/>
             <a:ext cx="1901952" cy="347472"/>
           </a:xfrm>
           <a:prstGeom prst="rect">
@@ -10914,12 +11726,16 @@
           <a:noFill/>
         </p:spPr>
         <p:txBody>
-          <a:bodyPr wrap="none" lIns="0" rIns="0" tIns="0" bIns="0" anchor="t">
-            <a:spAutoFit/>
-          </a:bodyPr>
-          <a:lstStyle/>
-          <a:p>
-            <a:pPr algn="ctr"/>
+          <a:bodyPr wrap="square" lIns="0" rIns="0" tIns="0" bIns="0" anchor="t">
+            <a:spAutoFit/>
+          </a:bodyPr>
+          <a:lstStyle/>
+          <a:p>
+            <a:pPr algn="ctr">
+              <a:spcAft>
+                <a:spcPts val="0"/>
+              </a:spcAft>
+            </a:pPr>
             <a:r>
               <a:rPr sz="950" b="0" i="0">
                 <a:solidFill>
@@ -10994,12 +11810,16 @@
           <a:noFill/>
         </p:spPr>
         <p:txBody>
-          <a:bodyPr wrap="none" lIns="0" rIns="0" tIns="0" bIns="0" anchor="t">
-            <a:spAutoFit/>
-          </a:bodyPr>
-          <a:lstStyle/>
-          <a:p>
-            <a:pPr algn="ctr"/>
+          <a:bodyPr wrap="square" lIns="0" rIns="0" tIns="0" bIns="0" anchor="t">
+            <a:spAutoFit/>
+          </a:bodyPr>
+          <a:lstStyle/>
+          <a:p>
+            <a:pPr algn="ctr">
+              <a:spcAft>
+                <a:spcPts val="0"/>
+              </a:spcAft>
+            </a:pPr>
             <a:r>
               <a:rPr sz="2800" b="1" i="0">
                 <a:solidFill>
@@ -11029,12 +11849,16 @@
           <a:noFill/>
         </p:spPr>
         <p:txBody>
-          <a:bodyPr wrap="none" lIns="0" rIns="0" tIns="0" bIns="0" anchor="t">
-            <a:spAutoFit/>
-          </a:bodyPr>
-          <a:lstStyle/>
-          <a:p>
-            <a:pPr algn="ctr"/>
+          <a:bodyPr wrap="square" lIns="0" rIns="0" tIns="0" bIns="0" anchor="t">
+            <a:spAutoFit/>
+          </a:bodyPr>
+          <a:lstStyle/>
+          <a:p>
+            <a:pPr algn="ctr">
+              <a:spcAft>
+                <a:spcPts val="0"/>
+              </a:spcAft>
+            </a:pPr>
             <a:r>
               <a:rPr sz="1200" b="1" i="0">
                 <a:solidFill>
@@ -11055,7 +11879,7 @@
         </p:nvSpPr>
         <p:spPr>
           <a:xfrm>
-            <a:off x="3703320" y="2450591"/>
+            <a:off x="3703320" y="2432304"/>
             <a:ext cx="1901952" cy="347472"/>
           </a:xfrm>
           <a:prstGeom prst="rect">
@@ -11064,12 +11888,16 @@
           <a:noFill/>
         </p:spPr>
         <p:txBody>
-          <a:bodyPr wrap="none" lIns="0" rIns="0" tIns="0" bIns="0" anchor="t">
-            <a:spAutoFit/>
-          </a:bodyPr>
-          <a:lstStyle/>
-          <a:p>
-            <a:pPr algn="ctr"/>
+          <a:bodyPr wrap="square" lIns="0" rIns="0" tIns="0" bIns="0" anchor="t">
+            <a:spAutoFit/>
+          </a:bodyPr>
+          <a:lstStyle/>
+          <a:p>
+            <a:pPr algn="ctr">
+              <a:spcAft>
+                <a:spcPts val="0"/>
+              </a:spcAft>
+            </a:pPr>
             <a:r>
               <a:rPr sz="950" b="0" i="0">
                 <a:solidFill>
@@ -11144,12 +11972,16 @@
           <a:noFill/>
         </p:spPr>
         <p:txBody>
-          <a:bodyPr wrap="none" lIns="0" rIns="0" tIns="0" bIns="0" anchor="t">
-            <a:spAutoFit/>
-          </a:bodyPr>
-          <a:lstStyle/>
-          <a:p>
-            <a:pPr algn="ctr"/>
+          <a:bodyPr wrap="square" lIns="0" rIns="0" tIns="0" bIns="0" anchor="t">
+            <a:spAutoFit/>
+          </a:bodyPr>
+          <a:lstStyle/>
+          <a:p>
+            <a:pPr algn="ctr">
+              <a:spcAft>
+                <a:spcPts val="0"/>
+              </a:spcAft>
+            </a:pPr>
             <a:r>
               <a:rPr sz="2800" b="1" i="0">
                 <a:solidFill>
@@ -11179,12 +12011,16 @@
           <a:noFill/>
         </p:spPr>
         <p:txBody>
-          <a:bodyPr wrap="none" lIns="0" rIns="0" tIns="0" bIns="0" anchor="t">
-            <a:spAutoFit/>
-          </a:bodyPr>
-          <a:lstStyle/>
-          <a:p>
-            <a:pPr algn="ctr"/>
+          <a:bodyPr wrap="square" lIns="0" rIns="0" tIns="0" bIns="0" anchor="t">
+            <a:spAutoFit/>
+          </a:bodyPr>
+          <a:lstStyle/>
+          <a:p>
+            <a:pPr algn="ctr">
+              <a:spcAft>
+                <a:spcPts val="0"/>
+              </a:spcAft>
+            </a:pPr>
             <a:r>
               <a:rPr sz="1200" b="1" i="0">
                 <a:solidFill>
@@ -11205,7 +12041,7 @@
         </p:nvSpPr>
         <p:spPr>
           <a:xfrm>
-            <a:off x="6492240" y="2450591"/>
+            <a:off x="6492240" y="2432304"/>
             <a:ext cx="1901952" cy="347472"/>
           </a:xfrm>
           <a:prstGeom prst="rect">
@@ -11214,12 +12050,16 @@
           <a:noFill/>
         </p:spPr>
         <p:txBody>
-          <a:bodyPr wrap="none" lIns="0" rIns="0" tIns="0" bIns="0" anchor="t">
-            <a:spAutoFit/>
-          </a:bodyPr>
-          <a:lstStyle/>
-          <a:p>
-            <a:pPr algn="ctr"/>
+          <a:bodyPr wrap="square" lIns="0" rIns="0" tIns="0" bIns="0" anchor="t">
+            <a:spAutoFit/>
+          </a:bodyPr>
+          <a:lstStyle/>
+          <a:p>
+            <a:pPr algn="ctr">
+              <a:spcAft>
+                <a:spcPts val="0"/>
+              </a:spcAft>
+            </a:pPr>
             <a:r>
               <a:rPr sz="950" b="0" i="0">
                 <a:solidFill>
@@ -11294,12 +12134,16 @@
           <a:noFill/>
         </p:spPr>
         <p:txBody>
-          <a:bodyPr wrap="none" lIns="0" rIns="0" tIns="0" bIns="0" anchor="t">
-            <a:spAutoFit/>
-          </a:bodyPr>
-          <a:lstStyle/>
-          <a:p>
-            <a:pPr algn="ctr"/>
+          <a:bodyPr wrap="square" lIns="0" rIns="0" tIns="0" bIns="0" anchor="t">
+            <a:spAutoFit/>
+          </a:bodyPr>
+          <a:lstStyle/>
+          <a:p>
+            <a:pPr algn="ctr">
+              <a:spcAft>
+                <a:spcPts val="0"/>
+              </a:spcAft>
+            </a:pPr>
             <a:r>
               <a:rPr sz="2800" b="1" i="0">
                 <a:solidFill>
@@ -11329,12 +12173,16 @@
           <a:noFill/>
         </p:spPr>
         <p:txBody>
-          <a:bodyPr wrap="none" lIns="0" rIns="0" tIns="0" bIns="0" anchor="t">
-            <a:spAutoFit/>
-          </a:bodyPr>
-          <a:lstStyle/>
-          <a:p>
-            <a:pPr algn="ctr"/>
+          <a:bodyPr wrap="square" lIns="0" rIns="0" tIns="0" bIns="0" anchor="t">
+            <a:spAutoFit/>
+          </a:bodyPr>
+          <a:lstStyle/>
+          <a:p>
+            <a:pPr algn="ctr">
+              <a:spcAft>
+                <a:spcPts val="0"/>
+              </a:spcAft>
+            </a:pPr>
             <a:r>
               <a:rPr sz="1200" b="1" i="0">
                 <a:solidFill>
@@ -11355,7 +12203,7 @@
         </p:nvSpPr>
         <p:spPr>
           <a:xfrm>
-            <a:off x="9281159" y="2450591"/>
+            <a:off x="9281159" y="2432304"/>
             <a:ext cx="1901952" cy="347472"/>
           </a:xfrm>
           <a:prstGeom prst="rect">
@@ -11364,12 +12212,16 @@
           <a:noFill/>
         </p:spPr>
         <p:txBody>
-          <a:bodyPr wrap="none" lIns="0" rIns="0" tIns="0" bIns="0" anchor="t">
-            <a:spAutoFit/>
-          </a:bodyPr>
-          <a:lstStyle/>
-          <a:p>
-            <a:pPr algn="ctr"/>
+          <a:bodyPr wrap="square" lIns="0" rIns="0" tIns="0" bIns="0" anchor="t">
+            <a:spAutoFit/>
+          </a:bodyPr>
+          <a:lstStyle/>
+          <a:p>
+            <a:pPr algn="ctr">
+              <a:spcAft>
+                <a:spcPts val="0"/>
+              </a:spcAft>
+            </a:pPr>
             <a:r>
               <a:rPr sz="950" b="0" i="0">
                 <a:solidFill>
@@ -11399,12 +12251,16 @@
           <a:noFill/>
         </p:spPr>
         <p:txBody>
-          <a:bodyPr wrap="none" lIns="0" rIns="0" tIns="0" bIns="0" anchor="t">
-            <a:spAutoFit/>
-          </a:bodyPr>
-          <a:lstStyle/>
-          <a:p>
-            <a:pPr algn="l"/>
+          <a:bodyPr wrap="square" lIns="0" rIns="0" tIns="0" bIns="0" anchor="t">
+            <a:spAutoFit/>
+          </a:bodyPr>
+          <a:lstStyle/>
+          <a:p>
+            <a:pPr algn="l">
+              <a:spcAft>
+                <a:spcPts val="0"/>
+              </a:spcAft>
+            </a:pPr>
             <a:r>
               <a:rPr sz="2200" b="1" i="0">
                 <a:solidFill>
@@ -11434,12 +12290,16 @@
           <a:noFill/>
         </p:spPr>
         <p:txBody>
-          <a:bodyPr wrap="none" lIns="0" rIns="0" tIns="0" bIns="0" anchor="t">
-            <a:spAutoFit/>
-          </a:bodyPr>
-          <a:lstStyle/>
-          <a:p>
-            <a:pPr algn="l"/>
+          <a:bodyPr wrap="square" lIns="0" rIns="0" tIns="0" bIns="0" anchor="t">
+            <a:spAutoFit/>
+          </a:bodyPr>
+          <a:lstStyle/>
+          <a:p>
+            <a:pPr algn="l">
+              <a:spcAft>
+                <a:spcPts val="0"/>
+              </a:spcAft>
+            </a:pPr>
             <a:r>
               <a:rPr sz="1250" b="1" i="0">
                 <a:solidFill>
@@ -11555,12 +12415,16 @@
           <a:noFill/>
         </p:spPr>
         <p:txBody>
-          <a:bodyPr wrap="none" lIns="0" rIns="0" tIns="0" bIns="0" anchor="t">
-            <a:spAutoFit/>
-          </a:bodyPr>
-          <a:lstStyle/>
-          <a:p>
-            <a:pPr algn="r"/>
+          <a:bodyPr wrap="square" lIns="0" rIns="0" tIns="0" bIns="0" anchor="t">
+            <a:spAutoFit/>
+          </a:bodyPr>
+          <a:lstStyle/>
+          <a:p>
+            <a:pPr algn="r">
+              <a:spcAft>
+                <a:spcPts val="0"/>
+              </a:spcAft>
+            </a:pPr>
             <a:r>
               <a:rPr sz="1050" b="1" i="0">
                 <a:solidFill>
@@ -11590,12 +12454,16 @@
           <a:noFill/>
         </p:spPr>
         <p:txBody>
-          <a:bodyPr wrap="none" lIns="0" rIns="0" tIns="0" bIns="0" anchor="t">
-            <a:spAutoFit/>
-          </a:bodyPr>
-          <a:lstStyle/>
-          <a:p>
-            <a:pPr algn="l"/>
+          <a:bodyPr wrap="square" lIns="0" rIns="0" tIns="0" bIns="0" anchor="t">
+            <a:spAutoFit/>
+          </a:bodyPr>
+          <a:lstStyle/>
+          <a:p>
+            <a:pPr algn="l">
+              <a:spcAft>
+                <a:spcPts val="0"/>
+              </a:spcAft>
+            </a:pPr>
             <a:r>
               <a:rPr sz="1250" b="1" i="0">
                 <a:solidFill>
@@ -11711,12 +12579,16 @@
           <a:noFill/>
         </p:spPr>
         <p:txBody>
-          <a:bodyPr wrap="none" lIns="0" rIns="0" tIns="0" bIns="0" anchor="t">
-            <a:spAutoFit/>
-          </a:bodyPr>
-          <a:lstStyle/>
-          <a:p>
-            <a:pPr algn="r"/>
+          <a:bodyPr wrap="square" lIns="0" rIns="0" tIns="0" bIns="0" anchor="t">
+            <a:spAutoFit/>
+          </a:bodyPr>
+          <a:lstStyle/>
+          <a:p>
+            <a:pPr algn="r">
+              <a:spcAft>
+                <a:spcPts val="0"/>
+              </a:spcAft>
+            </a:pPr>
             <a:r>
               <a:rPr sz="1050" b="1" i="0">
                 <a:solidFill>
@@ -11746,12 +12618,16 @@
           <a:noFill/>
         </p:spPr>
         <p:txBody>
-          <a:bodyPr wrap="none" lIns="0" rIns="0" tIns="0" bIns="0" anchor="t">
-            <a:spAutoFit/>
-          </a:bodyPr>
-          <a:lstStyle/>
-          <a:p>
-            <a:pPr algn="l"/>
+          <a:bodyPr wrap="square" lIns="0" rIns="0" tIns="0" bIns="0" anchor="t">
+            <a:spAutoFit/>
+          </a:bodyPr>
+          <a:lstStyle/>
+          <a:p>
+            <a:pPr algn="l">
+              <a:spcAft>
+                <a:spcPts val="0"/>
+              </a:spcAft>
+            </a:pPr>
             <a:r>
               <a:rPr sz="1250" b="1" i="0">
                 <a:solidFill>
@@ -11867,12 +12743,16 @@
           <a:noFill/>
         </p:spPr>
         <p:txBody>
-          <a:bodyPr wrap="none" lIns="0" rIns="0" tIns="0" bIns="0" anchor="t">
-            <a:spAutoFit/>
-          </a:bodyPr>
-          <a:lstStyle/>
-          <a:p>
-            <a:pPr algn="r"/>
+          <a:bodyPr wrap="square" lIns="0" rIns="0" tIns="0" bIns="0" anchor="t">
+            <a:spAutoFit/>
+          </a:bodyPr>
+          <a:lstStyle/>
+          <a:p>
+            <a:pPr algn="r">
+              <a:spcAft>
+                <a:spcPts val="0"/>
+              </a:spcAft>
+            </a:pPr>
             <a:r>
               <a:rPr sz="1050" b="1" i="0">
                 <a:solidFill>
@@ -11902,12 +12782,16 @@
           <a:noFill/>
         </p:spPr>
         <p:txBody>
-          <a:bodyPr wrap="none" lIns="0" rIns="0" tIns="0" bIns="0" anchor="t">
-            <a:spAutoFit/>
-          </a:bodyPr>
-          <a:lstStyle/>
-          <a:p>
-            <a:pPr algn="l"/>
+          <a:bodyPr wrap="square" lIns="0" rIns="0" tIns="0" bIns="0" anchor="t">
+            <a:spAutoFit/>
+          </a:bodyPr>
+          <a:lstStyle/>
+          <a:p>
+            <a:pPr algn="l">
+              <a:spcAft>
+                <a:spcPts val="0"/>
+              </a:spcAft>
+            </a:pPr>
             <a:r>
               <a:rPr sz="1250" b="1" i="0">
                 <a:solidFill>
@@ -12023,12 +12907,16 @@
           <a:noFill/>
         </p:spPr>
         <p:txBody>
-          <a:bodyPr wrap="none" lIns="0" rIns="0" tIns="0" bIns="0" anchor="t">
-            <a:spAutoFit/>
-          </a:bodyPr>
-          <a:lstStyle/>
-          <a:p>
-            <a:pPr algn="r"/>
+          <a:bodyPr wrap="square" lIns="0" rIns="0" tIns="0" bIns="0" anchor="t">
+            <a:spAutoFit/>
+          </a:bodyPr>
+          <a:lstStyle/>
+          <a:p>
+            <a:pPr algn="r">
+              <a:spcAft>
+                <a:spcPts val="0"/>
+              </a:spcAft>
+            </a:pPr>
             <a:r>
               <a:rPr sz="1050" b="1" i="0">
                 <a:solidFill>
@@ -12103,12 +12991,16 @@
           <a:noFill/>
         </p:spPr>
         <p:txBody>
-          <a:bodyPr wrap="none" lIns="0" rIns="0" tIns="0" bIns="0" anchor="t">
-            <a:spAutoFit/>
-          </a:bodyPr>
-          <a:lstStyle/>
-          <a:p>
-            <a:pPr algn="l"/>
+          <a:bodyPr wrap="square" lIns="0" rIns="0" tIns="0" bIns="0" anchor="t">
+            <a:spAutoFit/>
+          </a:bodyPr>
+          <a:lstStyle/>
+          <a:p>
+            <a:pPr algn="l">
+              <a:spcAft>
+                <a:spcPts val="0"/>
+              </a:spcAft>
+            </a:pPr>
             <a:r>
               <a:rPr sz="1700" b="1" i="0">
                 <a:solidFill>
@@ -12129,29 +13021,97 @@
         </p:nvSpPr>
         <p:spPr>
           <a:xfrm>
-            <a:off x="9372600" y="4005072"/>
-            <a:ext cx="1691640" cy="804672"/>
-          </a:xfrm>
-          <a:prstGeom prst="rect">
-            <a:avLst/>
-          </a:prstGeom>
-          <a:noFill/>
-        </p:spPr>
-        <p:txBody>
-          <a:bodyPr wrap="none" lIns="0" rIns="0" tIns="0" bIns="0" anchor="t">
-            <a:spAutoFit/>
-          </a:bodyPr>
-          <a:lstStyle/>
-          <a:p>
-            <a:pPr algn="l"/>
-            <a:r>
-              <a:rPr sz="1250" b="0" i="0">
+            <a:off x="9372600" y="3977639"/>
+            <a:ext cx="1700784" cy="960120"/>
+          </a:xfrm>
+          <a:prstGeom prst="rect">
+            <a:avLst/>
+          </a:prstGeom>
+          <a:noFill/>
+        </p:spPr>
+        <p:txBody>
+          <a:bodyPr wrap="square" lIns="0" rIns="0" tIns="0" bIns="0" anchor="t">
+            <a:spAutoFit/>
+          </a:bodyPr>
+          <a:lstStyle/>
+          <a:p>
+            <a:pPr algn="l">
+              <a:spcAft>
+                <a:spcPts val="0"/>
+              </a:spcAft>
+            </a:pPr>
+            <a:r>
+              <a:rPr sz="1150" b="0" i="0">
                 <a:solidFill>
                   <a:srgbClr val="3A5961"/>
                 </a:solidFill>
                 <a:latin typeface="Calibri"/>
               </a:rPr>
-              <a:t>百分比为汇报用成熟度判断，不代表线上真实业务量。建议后续用 Actuator、Prometheus 与前端埋点替换为真实指标。</a:t>
+              <a:t>百分比为汇报用</a:t>
+            </a:r>
+          </a:p>
+          <a:p>
+            <a:pPr algn="l">
+              <a:spcAft>
+                <a:spcPts val="0"/>
+              </a:spcAft>
+            </a:pPr>
+            <a:r>
+              <a:rPr sz="1150" b="0" i="0">
+                <a:solidFill>
+                  <a:srgbClr val="3A5961"/>
+                </a:solidFill>
+                <a:latin typeface="Calibri"/>
+              </a:rPr>
+              <a:t>成熟度判断，不代表</a:t>
+            </a:r>
+          </a:p>
+          <a:p>
+            <a:pPr algn="l">
+              <a:spcAft>
+                <a:spcPts val="0"/>
+              </a:spcAft>
+            </a:pPr>
+            <a:r>
+              <a:rPr sz="1150" b="0" i="0">
+                <a:solidFill>
+                  <a:srgbClr val="3A5961"/>
+                </a:solidFill>
+                <a:latin typeface="Calibri"/>
+              </a:rPr>
+              <a:t>线上真实业务量。</a:t>
+            </a:r>
+          </a:p>
+          <a:p>
+            <a:pPr algn="l">
+              <a:spcAft>
+                <a:spcPts val="0"/>
+              </a:spcAft>
+            </a:pPr>
+            <a:r>
+              <a:rPr sz="1150" b="0" i="0">
+                <a:solidFill>
+                  <a:srgbClr val="3A5961"/>
+                </a:solidFill>
+                <a:latin typeface="Calibri"/>
+              </a:rPr>
+              <a:t>建议后续接入 Actuator、</a:t>
+            </a:r>
+          </a:p>
+          <a:p>
+            <a:pPr algn="l">
+              <a:spcAft>
+                <a:spcPts val="0"/>
+              </a:spcAft>
+            </a:pPr>
+            <a:r>
+              <a:rPr sz="1150" b="0" i="0">
+                <a:solidFill>
+                  <a:srgbClr val="3A5961"/>
+                </a:solidFill>
+                <a:latin typeface="Calibri"/>
+              </a:rPr>
+              <a:t>Prometheus 与前端埋点。</a:t>
             </a:r>
           </a:p>
         </p:txBody>
@@ -12173,12 +13133,16 @@
           <a:noFill/>
         </p:spPr>
         <p:txBody>
-          <a:bodyPr wrap="none" lIns="0" rIns="0" tIns="0" bIns="0" anchor="t">
-            <a:spAutoFit/>
-          </a:bodyPr>
-          <a:lstStyle/>
-          <a:p>
-            <a:pPr algn="l"/>
+          <a:bodyPr wrap="square" lIns="0" rIns="0" tIns="0" bIns="0" anchor="t">
+            <a:spAutoFit/>
+          </a:bodyPr>
+          <a:lstStyle/>
+          <a:p>
+            <a:pPr algn="l">
+              <a:spcAft>
+                <a:spcPts val="0"/>
+              </a:spcAft>
+            </a:pPr>
             <a:r>
               <a:rPr sz="900" b="0" i="0">
                 <a:solidFill>
@@ -12208,12 +13172,16 @@
           <a:noFill/>
         </p:spPr>
         <p:txBody>
-          <a:bodyPr wrap="none" lIns="0" rIns="0" tIns="0" bIns="0" anchor="t">
-            <a:spAutoFit/>
-          </a:bodyPr>
-          <a:lstStyle/>
-          <a:p>
-            <a:pPr algn="r"/>
+          <a:bodyPr wrap="square" lIns="0" rIns="0" tIns="0" bIns="0" anchor="t">
+            <a:spAutoFit/>
+          </a:bodyPr>
+          <a:lstStyle/>
+          <a:p>
+            <a:pPr algn="r">
+              <a:spcAft>
+                <a:spcPts val="0"/>
+              </a:spcAft>
+            </a:pPr>
             <a:r>
               <a:rPr sz="1100" b="1" i="0">
                 <a:solidFill>
@@ -12261,20 +13229,24 @@
         <p:spPr>
           <a:xfrm>
             <a:off x="530352" y="384048"/>
-            <a:ext cx="8138160" cy="502920"/>
-          </a:xfrm>
-          <a:prstGeom prst="rect">
-            <a:avLst/>
-          </a:prstGeom>
-          <a:noFill/>
-        </p:spPr>
-        <p:txBody>
-          <a:bodyPr wrap="none" lIns="0" rIns="0" tIns="0" bIns="0" anchor="t">
-            <a:spAutoFit/>
-          </a:bodyPr>
-          <a:lstStyle/>
-          <a:p>
-            <a:pPr algn="l"/>
+            <a:ext cx="8229600" cy="502920"/>
+          </a:xfrm>
+          <a:prstGeom prst="rect">
+            <a:avLst/>
+          </a:prstGeom>
+          <a:noFill/>
+        </p:spPr>
+        <p:txBody>
+          <a:bodyPr wrap="square" lIns="0" rIns="0" tIns="0" bIns="0" anchor="t">
+            <a:spAutoFit/>
+          </a:bodyPr>
+          <a:lstStyle/>
+          <a:p>
+            <a:pPr algn="l">
+              <a:spcAft>
+                <a:spcPts val="0"/>
+              </a:spcAft>
+            </a:pPr>
             <a:r>
               <a:rPr sz="3800" b="1" i="0">
                 <a:solidFill>
@@ -12296,20 +13268,24 @@
         <p:spPr>
           <a:xfrm>
             <a:off x="530352" y="914400"/>
-            <a:ext cx="8412480" cy="320040"/>
-          </a:xfrm>
-          <a:prstGeom prst="rect">
-            <a:avLst/>
-          </a:prstGeom>
-          <a:noFill/>
-        </p:spPr>
-        <p:txBody>
-          <a:bodyPr wrap="none" lIns="0" rIns="0" tIns="0" bIns="0" anchor="t">
-            <a:spAutoFit/>
-          </a:bodyPr>
-          <a:lstStyle/>
-          <a:p>
-            <a:pPr algn="l"/>
+            <a:ext cx="8595360" cy="320040"/>
+          </a:xfrm>
+          <a:prstGeom prst="rect">
+            <a:avLst/>
+          </a:prstGeom>
+          <a:noFill/>
+        </p:spPr>
+        <p:txBody>
+          <a:bodyPr wrap="square" lIns="0" rIns="0" tIns="0" bIns="0" anchor="t">
+            <a:spAutoFit/>
+          </a:bodyPr>
+          <a:lstStyle/>
+          <a:p>
+            <a:pPr algn="l">
+              <a:spcAft>
+                <a:spcPts val="0"/>
+              </a:spcAft>
+            </a:pPr>
             <a:r>
               <a:rPr sz="1300" b="0" i="0">
                 <a:solidFill>
@@ -12382,12 +13358,16 @@
           <a:noFill/>
         </p:spPr>
         <p:txBody>
-          <a:bodyPr wrap="none" lIns="0" rIns="0" tIns="0" bIns="0" anchor="t">
-            <a:spAutoFit/>
-          </a:bodyPr>
-          <a:lstStyle/>
-          <a:p>
-            <a:pPr algn="ctr"/>
+          <a:bodyPr wrap="square" lIns="0" rIns="0" tIns="0" bIns="0" anchor="t">
+            <a:spAutoFit/>
+          </a:bodyPr>
+          <a:lstStyle/>
+          <a:p>
+            <a:pPr algn="ctr">
+              <a:spcAft>
+                <a:spcPts val="0"/>
+              </a:spcAft>
+            </a:pPr>
             <a:r>
               <a:rPr sz="800" b="1" i="0">
                 <a:solidFill>
@@ -12505,12 +13485,16 @@
           <a:noFill/>
         </p:spPr>
         <p:txBody>
-          <a:bodyPr wrap="none" lIns="0" rIns="0" tIns="0" bIns="0" anchor="t">
-            <a:spAutoFit/>
-          </a:bodyPr>
-          <a:lstStyle/>
-          <a:p>
-            <a:pPr algn="l"/>
+          <a:bodyPr wrap="square" lIns="0" rIns="0" tIns="0" bIns="0" anchor="t">
+            <a:spAutoFit/>
+          </a:bodyPr>
+          <a:lstStyle/>
+          <a:p>
+            <a:pPr algn="l">
+              <a:spcAft>
+                <a:spcPts val="0"/>
+              </a:spcAft>
+            </a:pPr>
             <a:r>
               <a:rPr sz="1700" b="1" i="0">
                 <a:solidFill>
@@ -12531,27 +13515,27 @@
         </p:nvSpPr>
         <p:spPr>
           <a:xfrm>
-            <a:off x="914400" y="1984248"/>
-            <a:ext cx="3026664" cy="1133856"/>
-          </a:xfrm>
-          <a:prstGeom prst="rect">
-            <a:avLst/>
-          </a:prstGeom>
-          <a:noFill/>
-        </p:spPr>
-        <p:txBody>
-          <a:bodyPr wrap="none" lIns="0" rIns="0" tIns="0" bIns="0">
-            <a:spAutoFit/>
-          </a:bodyPr>
-          <a:lstStyle/>
-          <a:p>
-            <a:pPr>
-              <a:spcAft>
-                <a:spcPts val="600"/>
-              </a:spcAft>
-            </a:pPr>
-            <a:r>
-              <a:rPr sz="1350">
+            <a:off x="969264" y="1984248"/>
+            <a:ext cx="2916936" cy="1133856"/>
+          </a:xfrm>
+          <a:prstGeom prst="rect">
+            <a:avLst/>
+          </a:prstGeom>
+          <a:noFill/>
+        </p:spPr>
+        <p:txBody>
+          <a:bodyPr wrap="square" lIns="0" rIns="0" tIns="0" bIns="0">
+            <a:spAutoFit/>
+          </a:bodyPr>
+          <a:lstStyle/>
+          <a:p>
+            <a:pPr algn="l">
+              <a:spcAft>
+                <a:spcPts val="200"/>
+              </a:spcAft>
+            </a:pPr>
+            <a:r>
+              <a:rPr sz="1320">
                 <a:solidFill>
                   <a:srgbClr val="3A5961"/>
                 </a:solidFill>
@@ -12561,13 +13545,13 @@
             </a:r>
           </a:p>
           <a:p>
-            <a:pPr>
-              <a:spcAft>
-                <a:spcPts val="600"/>
-              </a:spcAft>
-            </a:pPr>
-            <a:r>
-              <a:rPr sz="1350">
+            <a:pPr algn="l">
+              <a:spcAft>
+                <a:spcPts val="200"/>
+              </a:spcAft>
+            </a:pPr>
+            <a:r>
+              <a:rPr sz="1320">
                 <a:solidFill>
                   <a:srgbClr val="3A5961"/>
                 </a:solidFill>
@@ -12577,29 +13561,29 @@
             </a:r>
           </a:p>
           <a:p>
-            <a:pPr>
-              <a:spcAft>
-                <a:spcPts val="600"/>
-              </a:spcAft>
-            </a:pPr>
-            <a:r>
-              <a:rPr sz="1350">
+            <a:pPr algn="l">
+              <a:spcAft>
+                <a:spcPts val="200"/>
+              </a:spcAft>
+            </a:pPr>
+            <a:r>
+              <a:rPr sz="1320">
                 <a:solidFill>
                   <a:srgbClr val="3A5961"/>
                 </a:solidFill>
                 <a:latin typeface="Calibri"/>
               </a:rPr>
-              <a:t>覆盖 AI、工作流、截图、解析、并发等主题</a:t>
-            </a:r>
-          </a:p>
-          <a:p>
-            <a:pPr>
-              <a:spcAft>
-                <a:spcPts val="600"/>
-              </a:spcAft>
-            </a:pPr>
-            <a:r>
-              <a:rPr sz="1350">
+              <a:t>覆盖 AI、工作流、截图、解析、并发</a:t>
+            </a:r>
+          </a:p>
+          <a:p>
+            <a:pPr algn="l">
+              <a:spcAft>
+                <a:spcPts val="200"/>
+              </a:spcAft>
+            </a:pPr>
+            <a:r>
+              <a:rPr sz="1320">
                 <a:solidFill>
                   <a:srgbClr val="3A5961"/>
                 </a:solidFill>
@@ -12715,12 +13699,16 @@
           <a:noFill/>
         </p:spPr>
         <p:txBody>
-          <a:bodyPr wrap="none" lIns="0" rIns="0" tIns="0" bIns="0" anchor="t">
-            <a:spAutoFit/>
-          </a:bodyPr>
-          <a:lstStyle/>
-          <a:p>
-            <a:pPr algn="l"/>
+          <a:bodyPr wrap="square" lIns="0" rIns="0" tIns="0" bIns="0" anchor="t">
+            <a:spAutoFit/>
+          </a:bodyPr>
+          <a:lstStyle/>
+          <a:p>
+            <a:pPr algn="l">
+              <a:spcAft>
+                <a:spcPts val="0"/>
+              </a:spcAft>
+            </a:pPr>
             <a:r>
               <a:rPr sz="1700" b="1" i="0">
                 <a:solidFill>
@@ -12741,27 +13729,27 @@
         </p:nvSpPr>
         <p:spPr>
           <a:xfrm>
-            <a:off x="4608576" y="1984248"/>
-            <a:ext cx="3026664" cy="1133856"/>
-          </a:xfrm>
-          <a:prstGeom prst="rect">
-            <a:avLst/>
-          </a:prstGeom>
-          <a:noFill/>
-        </p:spPr>
-        <p:txBody>
-          <a:bodyPr wrap="none" lIns="0" rIns="0" tIns="0" bIns="0">
-            <a:spAutoFit/>
-          </a:bodyPr>
-          <a:lstStyle/>
-          <a:p>
-            <a:pPr>
-              <a:spcAft>
-                <a:spcPts val="600"/>
-              </a:spcAft>
-            </a:pPr>
-            <a:r>
-              <a:rPr sz="1350">
+            <a:off x="4663440" y="1984248"/>
+            <a:ext cx="2916936" cy="1133856"/>
+          </a:xfrm>
+          <a:prstGeom prst="rect">
+            <a:avLst/>
+          </a:prstGeom>
+          <a:noFill/>
+        </p:spPr>
+        <p:txBody>
+          <a:bodyPr wrap="square" lIns="0" rIns="0" tIns="0" bIns="0">
+            <a:spAutoFit/>
+          </a:bodyPr>
+          <a:lstStyle/>
+          <a:p>
+            <a:pPr algn="l">
+              <a:spcAft>
+                <a:spcPts val="200"/>
+              </a:spcAft>
+            </a:pPr>
+            <a:r>
+              <a:rPr sz="1320">
                 <a:solidFill>
                   <a:srgbClr val="3A5961"/>
                 </a:solidFill>
@@ -12771,13 +13759,13 @@
             </a:r>
           </a:p>
           <a:p>
-            <a:pPr>
-              <a:spcAft>
-                <a:spcPts val="600"/>
-              </a:spcAft>
-            </a:pPr>
-            <a:r>
-              <a:rPr sz="1350">
+            <a:pPr algn="l">
+              <a:spcAft>
+                <a:spcPts val="200"/>
+              </a:spcAft>
+            </a:pPr>
+            <a:r>
+              <a:rPr sz="1320">
                 <a:solidFill>
                   <a:srgbClr val="3A5961"/>
                 </a:solidFill>
@@ -12787,13 +13775,13 @@
             </a:r>
           </a:p>
           <a:p>
-            <a:pPr>
-              <a:spcAft>
-                <a:spcPts val="600"/>
-              </a:spcAft>
-            </a:pPr>
-            <a:r>
-              <a:rPr sz="1350">
+            <a:pPr algn="l">
+              <a:spcAft>
+                <a:spcPts val="200"/>
+              </a:spcAft>
+            </a:pPr>
+            <a:r>
+              <a:rPr sz="1320">
                 <a:solidFill>
                   <a:srgbClr val="3A5961"/>
                 </a:solidFill>
@@ -12803,13 +13791,13 @@
             </a:r>
           </a:p>
           <a:p>
-            <a:pPr>
-              <a:spcAft>
-                <a:spcPts val="600"/>
-              </a:spcAft>
-            </a:pPr>
-            <a:r>
-              <a:rPr sz="1350">
+            <a:pPr algn="l">
+              <a:spcAft>
+                <a:spcPts val="200"/>
+              </a:spcAft>
+            </a:pPr>
+            <a:r>
+              <a:rPr sz="1320">
                 <a:solidFill>
                   <a:srgbClr val="3A5961"/>
                 </a:solidFill>
@@ -12925,12 +13913,16 @@
           <a:noFill/>
         </p:spPr>
         <p:txBody>
-          <a:bodyPr wrap="none" lIns="0" rIns="0" tIns="0" bIns="0" anchor="t">
-            <a:spAutoFit/>
-          </a:bodyPr>
-          <a:lstStyle/>
-          <a:p>
-            <a:pPr algn="l"/>
+          <a:bodyPr wrap="square" lIns="0" rIns="0" tIns="0" bIns="0" anchor="t">
+            <a:spAutoFit/>
+          </a:bodyPr>
+          <a:lstStyle/>
+          <a:p>
+            <a:pPr algn="l">
+              <a:spcAft>
+                <a:spcPts val="0"/>
+              </a:spcAft>
+            </a:pPr>
             <a:r>
               <a:rPr sz="1700" b="1" i="0">
                 <a:solidFill>
@@ -12951,27 +13943,27 @@
         </p:nvSpPr>
         <p:spPr>
           <a:xfrm>
-            <a:off x="8302752" y="1984248"/>
-            <a:ext cx="2569464" cy="1133856"/>
-          </a:xfrm>
-          <a:prstGeom prst="rect">
-            <a:avLst/>
-          </a:prstGeom>
-          <a:noFill/>
-        </p:spPr>
-        <p:txBody>
-          <a:bodyPr wrap="none" lIns="0" rIns="0" tIns="0" bIns="0">
-            <a:spAutoFit/>
-          </a:bodyPr>
-          <a:lstStyle/>
-          <a:p>
-            <a:pPr>
-              <a:spcAft>
-                <a:spcPts val="600"/>
-              </a:spcAft>
-            </a:pPr>
-            <a:r>
-              <a:rPr sz="1350">
+            <a:off x="8357615" y="1984248"/>
+            <a:ext cx="2459736" cy="1133856"/>
+          </a:xfrm>
+          <a:prstGeom prst="rect">
+            <a:avLst/>
+          </a:prstGeom>
+          <a:noFill/>
+        </p:spPr>
+        <p:txBody>
+          <a:bodyPr wrap="square" lIns="0" rIns="0" tIns="0" bIns="0">
+            <a:spAutoFit/>
+          </a:bodyPr>
+          <a:lstStyle/>
+          <a:p>
+            <a:pPr algn="l">
+              <a:spcAft>
+                <a:spcPts val="200"/>
+              </a:spcAft>
+            </a:pPr>
+            <a:r>
+              <a:rPr sz="1320">
                 <a:solidFill>
                   <a:srgbClr val="3A5961"/>
                 </a:solidFill>
@@ -12981,13 +13973,13 @@
             </a:r>
           </a:p>
           <a:p>
-            <a:pPr>
-              <a:spcAft>
-                <a:spcPts val="600"/>
-              </a:spcAft>
-            </a:pPr>
-            <a:r>
-              <a:rPr sz="1350">
+            <a:pPr algn="l">
+              <a:spcAft>
+                <a:spcPts val="200"/>
+              </a:spcAft>
+            </a:pPr>
+            <a:r>
+              <a:rPr sz="1320">
                 <a:solidFill>
                   <a:srgbClr val="3A5961"/>
                 </a:solidFill>
@@ -12997,13 +13989,13 @@
             </a:r>
           </a:p>
           <a:p>
-            <a:pPr>
-              <a:spcAft>
-                <a:spcPts val="600"/>
-              </a:spcAft>
-            </a:pPr>
-            <a:r>
-              <a:rPr sz="1350">
+            <a:pPr algn="l">
+              <a:spcAft>
+                <a:spcPts val="200"/>
+              </a:spcAft>
+            </a:pPr>
+            <a:r>
+              <a:rPr sz="1320">
                 <a:solidFill>
                   <a:srgbClr val="3A5961"/>
                 </a:solidFill>
@@ -13013,13 +14005,13 @@
             </a:r>
           </a:p>
           <a:p>
-            <a:pPr>
-              <a:spcAft>
-                <a:spcPts val="600"/>
-              </a:spcAft>
-            </a:pPr>
-            <a:r>
-              <a:rPr sz="1350">
+            <a:pPr algn="l">
+              <a:spcAft>
+                <a:spcPts val="200"/>
+              </a:spcAft>
+            </a:pPr>
+            <a:r>
+              <a:rPr sz="1320">
                 <a:solidFill>
                   <a:srgbClr val="3A5961"/>
                 </a:solidFill>
@@ -13092,12 +14084,16 @@
           <a:noFill/>
         </p:spPr>
         <p:txBody>
-          <a:bodyPr wrap="none" lIns="0" rIns="0" tIns="0" bIns="0" anchor="t">
-            <a:spAutoFit/>
-          </a:bodyPr>
-          <a:lstStyle/>
-          <a:p>
-            <a:pPr algn="l"/>
+          <a:bodyPr wrap="square" lIns="0" rIns="0" tIns="0" bIns="0" anchor="t">
+            <a:spAutoFit/>
+          </a:bodyPr>
+          <a:lstStyle/>
+          <a:p>
+            <a:pPr algn="l">
+              <a:spcAft>
+                <a:spcPts val="0"/>
+              </a:spcAft>
+            </a:pPr>
             <a:r>
               <a:rPr sz="1800" b="1" i="0">
                 <a:solidFill>
@@ -13118,29 +14114,65 @@
         </p:nvSpPr>
         <p:spPr>
           <a:xfrm>
-            <a:off x="2514600" y="4114800"/>
-            <a:ext cx="7818120" cy="256032"/>
-          </a:xfrm>
-          <a:prstGeom prst="rect">
-            <a:avLst/>
-          </a:prstGeom>
-          <a:noFill/>
-        </p:spPr>
-        <p:txBody>
-          <a:bodyPr wrap="none" lIns="0" rIns="0" tIns="0" bIns="0" anchor="t">
-            <a:spAutoFit/>
-          </a:bodyPr>
-          <a:lstStyle/>
-          <a:p>
-            <a:pPr algn="l"/>
-            <a:r>
-              <a:rPr sz="1400" b="0" i="0">
+            <a:off x="2514600" y="4014215"/>
+            <a:ext cx="7635240" cy="502920"/>
+          </a:xfrm>
+          <a:prstGeom prst="rect">
+            <a:avLst/>
+          </a:prstGeom>
+          <a:noFill/>
+        </p:spPr>
+        <p:txBody>
+          <a:bodyPr wrap="square" lIns="0" rIns="0" tIns="0" bIns="0" anchor="t">
+            <a:spAutoFit/>
+          </a:bodyPr>
+          <a:lstStyle/>
+          <a:p>
+            <a:pPr algn="l">
+              <a:spcAft>
+                <a:spcPts val="0"/>
+              </a:spcAft>
+            </a:pPr>
+            <a:r>
+              <a:rPr sz="1340" b="0" i="0">
                 <a:solidFill>
                   <a:srgbClr val="16323A"/>
                 </a:solidFill>
                 <a:latin typeface="Calibri"/>
               </a:rPr>
-              <a:t>本次为文档型变更，仅生成 PPTX。已使用 markitdown 对产物进行内容抽取与占位文本检查；业务测试未运行，因为没有修改业务代码。</a:t>
+              <a:t>本次为文档型变更，仅生成 PPTX。</a:t>
+            </a:r>
+          </a:p>
+          <a:p>
+            <a:pPr algn="l">
+              <a:spcAft>
+                <a:spcPts val="0"/>
+              </a:spcAft>
+            </a:pPr>
+            <a:r>
+              <a:rPr sz="1340" b="0" i="0">
+                <a:solidFill>
+                  <a:srgbClr val="16323A"/>
+                </a:solidFill>
+                <a:latin typeface="Calibri"/>
+              </a:rPr>
+              <a:t>已使用 markitdown 对产物进行内容抽取与占位文本检查；</a:t>
+            </a:r>
+          </a:p>
+          <a:p>
+            <a:pPr algn="l">
+              <a:spcAft>
+                <a:spcPts val="0"/>
+              </a:spcAft>
+            </a:pPr>
+            <a:r>
+              <a:rPr sz="1340" b="0" i="0">
+                <a:solidFill>
+                  <a:srgbClr val="16323A"/>
+                </a:solidFill>
+                <a:latin typeface="Calibri"/>
+              </a:rPr>
+              <a:t>业务测试未运行，因为没有修改业务代码。</a:t>
             </a:r>
           </a:p>
         </p:txBody>
@@ -13162,12 +14194,16 @@
           <a:noFill/>
         </p:spPr>
         <p:txBody>
-          <a:bodyPr wrap="none" lIns="0" rIns="0" tIns="0" bIns="0" anchor="t">
-            <a:spAutoFit/>
-          </a:bodyPr>
-          <a:lstStyle/>
-          <a:p>
-            <a:pPr algn="l"/>
+          <a:bodyPr wrap="square" lIns="0" rIns="0" tIns="0" bIns="0" anchor="t">
+            <a:spAutoFit/>
+          </a:bodyPr>
+          <a:lstStyle/>
+          <a:p>
+            <a:pPr algn="l">
+              <a:spcAft>
+                <a:spcPts val="0"/>
+              </a:spcAft>
+            </a:pPr>
             <a:r>
               <a:rPr sz="900" b="0" i="0">
                 <a:solidFill>
@@ -13197,12 +14233,16 @@
           <a:noFill/>
         </p:spPr>
         <p:txBody>
-          <a:bodyPr wrap="none" lIns="0" rIns="0" tIns="0" bIns="0" anchor="t">
-            <a:spAutoFit/>
-          </a:bodyPr>
-          <a:lstStyle/>
-          <a:p>
-            <a:pPr algn="r"/>
+          <a:bodyPr wrap="square" lIns="0" rIns="0" tIns="0" bIns="0" anchor="t">
+            <a:spAutoFit/>
+          </a:bodyPr>
+          <a:lstStyle/>
+          <a:p>
+            <a:pPr algn="r">
+              <a:spcAft>
+                <a:spcPts val="0"/>
+              </a:spcAft>
+            </a:pPr>
             <a:r>
               <a:rPr sz="1100" b="1" i="0">
                 <a:solidFill>
@@ -13250,20 +14290,24 @@
         <p:spPr>
           <a:xfrm>
             <a:off x="530352" y="384048"/>
-            <a:ext cx="8138160" cy="502920"/>
-          </a:xfrm>
-          <a:prstGeom prst="rect">
-            <a:avLst/>
-          </a:prstGeom>
-          <a:noFill/>
-        </p:spPr>
-        <p:txBody>
-          <a:bodyPr wrap="none" lIns="0" rIns="0" tIns="0" bIns="0" anchor="t">
-            <a:spAutoFit/>
-          </a:bodyPr>
-          <a:lstStyle/>
-          <a:p>
-            <a:pPr algn="l"/>
+            <a:ext cx="8229600" cy="502920"/>
+          </a:xfrm>
+          <a:prstGeom prst="rect">
+            <a:avLst/>
+          </a:prstGeom>
+          <a:noFill/>
+        </p:spPr>
+        <p:txBody>
+          <a:bodyPr wrap="square" lIns="0" rIns="0" tIns="0" bIns="0" anchor="t">
+            <a:spAutoFit/>
+          </a:bodyPr>
+          <a:lstStyle/>
+          <a:p>
+            <a:pPr algn="l">
+              <a:spcAft>
+                <a:spcPts val="0"/>
+              </a:spcAft>
+            </a:pPr>
             <a:r>
               <a:rPr sz="3800" b="1" i="0">
                 <a:solidFill>
@@ -13285,20 +14329,24 @@
         <p:spPr>
           <a:xfrm>
             <a:off x="530352" y="914400"/>
-            <a:ext cx="8412480" cy="320040"/>
-          </a:xfrm>
-          <a:prstGeom prst="rect">
-            <a:avLst/>
-          </a:prstGeom>
-          <a:noFill/>
-        </p:spPr>
-        <p:txBody>
-          <a:bodyPr wrap="none" lIns="0" rIns="0" tIns="0" bIns="0" anchor="t">
-            <a:spAutoFit/>
-          </a:bodyPr>
-          <a:lstStyle/>
-          <a:p>
-            <a:pPr algn="l"/>
+            <a:ext cx="8595360" cy="320040"/>
+          </a:xfrm>
+          <a:prstGeom prst="rect">
+            <a:avLst/>
+          </a:prstGeom>
+          <a:noFill/>
+        </p:spPr>
+        <p:txBody>
+          <a:bodyPr wrap="square" lIns="0" rIns="0" tIns="0" bIns="0" anchor="t">
+            <a:spAutoFit/>
+          </a:bodyPr>
+          <a:lstStyle/>
+          <a:p>
+            <a:pPr algn="l">
+              <a:spcAft>
+                <a:spcPts val="0"/>
+              </a:spcAft>
+            </a:pPr>
             <a:r>
               <a:rPr sz="1300" b="0" i="0">
                 <a:solidFill>
@@ -13371,12 +14419,16 @@
           <a:noFill/>
         </p:spPr>
         <p:txBody>
-          <a:bodyPr wrap="none" lIns="0" rIns="0" tIns="0" bIns="0" anchor="t">
-            <a:spAutoFit/>
-          </a:bodyPr>
-          <a:lstStyle/>
-          <a:p>
-            <a:pPr algn="ctr"/>
+          <a:bodyPr wrap="square" lIns="0" rIns="0" tIns="0" bIns="0" anchor="t">
+            <a:spAutoFit/>
+          </a:bodyPr>
+          <a:lstStyle/>
+          <a:p>
+            <a:pPr algn="ctr">
+              <a:spcAft>
+                <a:spcPts val="0"/>
+              </a:spcAft>
+            </a:pPr>
             <a:r>
               <a:rPr sz="800" b="1" i="0">
                 <a:solidFill>
@@ -13494,12 +14546,16 @@
           <a:noFill/>
         </p:spPr>
         <p:txBody>
-          <a:bodyPr wrap="none" lIns="0" rIns="0" tIns="0" bIns="0" anchor="t">
-            <a:spAutoFit/>
-          </a:bodyPr>
-          <a:lstStyle/>
-          <a:p>
-            <a:pPr algn="l"/>
+          <a:bodyPr wrap="square" lIns="0" rIns="0" tIns="0" bIns="0" anchor="t">
+            <a:spAutoFit/>
+          </a:bodyPr>
+          <a:lstStyle/>
+          <a:p>
+            <a:pPr algn="l">
+              <a:spcAft>
+                <a:spcPts val="0"/>
+              </a:spcAft>
+            </a:pPr>
             <a:r>
               <a:rPr sz="1700" b="1" i="0">
                 <a:solidFill>
@@ -13521,28 +14577,64 @@
         <p:spPr>
           <a:xfrm>
             <a:off x="1060704" y="2011680"/>
-            <a:ext cx="4343400" cy="502920"/>
-          </a:xfrm>
-          <a:prstGeom prst="rect">
-            <a:avLst/>
-          </a:prstGeom>
-          <a:noFill/>
-        </p:spPr>
-        <p:txBody>
-          <a:bodyPr wrap="none" lIns="0" rIns="0" tIns="0" bIns="0" anchor="t">
-            <a:spAutoFit/>
-          </a:bodyPr>
-          <a:lstStyle/>
-          <a:p>
-            <a:pPr algn="l"/>
-            <a:r>
-              <a:rPr sz="1350" b="0" i="0">
+            <a:ext cx="4251960" cy="658368"/>
+          </a:xfrm>
+          <a:prstGeom prst="rect">
+            <a:avLst/>
+          </a:prstGeom>
+          <a:noFill/>
+        </p:spPr>
+        <p:txBody>
+          <a:bodyPr wrap="square" lIns="0" rIns="0" tIns="0" bIns="0">
+            <a:spAutoFit/>
+          </a:bodyPr>
+          <a:lstStyle/>
+          <a:p>
+            <a:pPr algn="l">
+              <a:spcAft>
+                <a:spcPts val="100"/>
+              </a:spcAft>
+            </a:pPr>
+            <a:r>
+              <a:rPr sz="1280">
                 <a:solidFill>
                   <a:srgbClr val="3A5961"/>
                 </a:solidFill>
                 <a:latin typeface="Calibri"/>
               </a:rPr>
-              <a:t>application.yml 中 DeepSeek、DashScope、Pexels、COS 仍是示例值；本地 profile 文件未入库。</a:t>
+              <a:t>application.yml 中 DeepSeek、DashScope、</a:t>
+            </a:r>
+          </a:p>
+          <a:p>
+            <a:pPr algn="l">
+              <a:spcAft>
+                <a:spcPts val="100"/>
+              </a:spcAft>
+            </a:pPr>
+            <a:r>
+              <a:rPr sz="1280">
+                <a:solidFill>
+                  <a:srgbClr val="3A5961"/>
+                </a:solidFill>
+                <a:latin typeface="Calibri"/>
+              </a:rPr>
+              <a:t>Pexels、COS 仍是示例值；</a:t>
+            </a:r>
+          </a:p>
+          <a:p>
+            <a:pPr algn="l">
+              <a:spcAft>
+                <a:spcPts val="100"/>
+              </a:spcAft>
+            </a:pPr>
+            <a:r>
+              <a:rPr sz="1280">
+                <a:solidFill>
+                  <a:srgbClr val="3A5961"/>
+                </a:solidFill>
+                <a:latin typeface="Calibri"/>
+              </a:rPr>
+              <a:t>本地 profile 文件未入库。</a:t>
             </a:r>
           </a:p>
         </p:txBody>
@@ -13652,12 +14744,16 @@
           <a:noFill/>
         </p:spPr>
         <p:txBody>
-          <a:bodyPr wrap="none" lIns="0" rIns="0" tIns="0" bIns="0" anchor="t">
-            <a:spAutoFit/>
-          </a:bodyPr>
-          <a:lstStyle/>
-          <a:p>
-            <a:pPr algn="l"/>
+          <a:bodyPr wrap="square" lIns="0" rIns="0" tIns="0" bIns="0" anchor="t">
+            <a:spAutoFit/>
+          </a:bodyPr>
+          <a:lstStyle/>
+          <a:p>
+            <a:pPr algn="l">
+              <a:spcAft>
+                <a:spcPts val="0"/>
+              </a:spcAft>
+            </a:pPr>
             <a:r>
               <a:rPr sz="1700" b="1" i="0">
                 <a:solidFill>
@@ -13679,28 +14775,64 @@
         <p:spPr>
           <a:xfrm>
             <a:off x="6592824" y="2011680"/>
-            <a:ext cx="4343400" cy="502920"/>
-          </a:xfrm>
-          <a:prstGeom prst="rect">
-            <a:avLst/>
-          </a:prstGeom>
-          <a:noFill/>
-        </p:spPr>
-        <p:txBody>
-          <a:bodyPr wrap="none" lIns="0" rIns="0" tIns="0" bIns="0" anchor="t">
-            <a:spAutoFit/>
-          </a:bodyPr>
-          <a:lstStyle/>
-          <a:p>
-            <a:pPr algn="l"/>
-            <a:r>
-              <a:rPr sz="1350" b="0" i="0">
+            <a:ext cx="4251960" cy="658368"/>
+          </a:xfrm>
+          <a:prstGeom prst="rect">
+            <a:avLst/>
+          </a:prstGeom>
+          <a:noFill/>
+        </p:spPr>
+        <p:txBody>
+          <a:bodyPr wrap="square" lIns="0" rIns="0" tIns="0" bIns="0">
+            <a:spAutoFit/>
+          </a:bodyPr>
+          <a:lstStyle/>
+          <a:p>
+            <a:pPr algn="l">
+              <a:spcAft>
+                <a:spcPts val="100"/>
+              </a:spcAft>
+            </a:pPr>
+            <a:r>
+              <a:rPr sz="1280">
                 <a:solidFill>
                   <a:srgbClr val="3A5961"/>
                 </a:solidFill>
                 <a:latin typeface="Calibri"/>
               </a:rPr>
-              <a:t>MySQL、Redis、Nacos、COS、Selenium 与外部 AI 服务均需可用环境支撑。</a:t>
+              <a:t>MySQL、Redis、Nacos、COS、</a:t>
+            </a:r>
+          </a:p>
+          <a:p>
+            <a:pPr algn="l">
+              <a:spcAft>
+                <a:spcPts val="100"/>
+              </a:spcAft>
+            </a:pPr>
+            <a:r>
+              <a:rPr sz="1280">
+                <a:solidFill>
+                  <a:srgbClr val="3A5961"/>
+                </a:solidFill>
+                <a:latin typeface="Calibri"/>
+              </a:rPr>
+              <a:t>Selenium 与外部 AI 服务</a:t>
+            </a:r>
+          </a:p>
+          <a:p>
+            <a:pPr algn="l">
+              <a:spcAft>
+                <a:spcPts val="100"/>
+              </a:spcAft>
+            </a:pPr>
+            <a:r>
+              <a:rPr sz="1280">
+                <a:solidFill>
+                  <a:srgbClr val="3A5961"/>
+                </a:solidFill>
+                <a:latin typeface="Calibri"/>
+              </a:rPr>
+              <a:t>均需可用环境支撑。</a:t>
             </a:r>
           </a:p>
         </p:txBody>
@@ -13810,12 +14942,16 @@
           <a:noFill/>
         </p:spPr>
         <p:txBody>
-          <a:bodyPr wrap="none" lIns="0" rIns="0" tIns="0" bIns="0" anchor="t">
-            <a:spAutoFit/>
-          </a:bodyPr>
-          <a:lstStyle/>
-          <a:p>
-            <a:pPr algn="l"/>
+          <a:bodyPr wrap="square" lIns="0" rIns="0" tIns="0" bIns="0" anchor="t">
+            <a:spAutoFit/>
+          </a:bodyPr>
+          <a:lstStyle/>
+          <a:p>
+            <a:pPr algn="l">
+              <a:spcAft>
+                <a:spcPts val="0"/>
+              </a:spcAft>
+            </a:pPr>
             <a:r>
               <a:rPr sz="1700" b="1" i="0">
                 <a:solidFill>
@@ -13837,28 +14973,48 @@
         <p:spPr>
           <a:xfrm>
             <a:off x="1060704" y="4069080"/>
-            <a:ext cx="4343400" cy="502920"/>
-          </a:xfrm>
-          <a:prstGeom prst="rect">
-            <a:avLst/>
-          </a:prstGeom>
-          <a:noFill/>
-        </p:spPr>
-        <p:txBody>
-          <a:bodyPr wrap="none" lIns="0" rIns="0" tIns="0" bIns="0" anchor="t">
-            <a:spAutoFit/>
-          </a:bodyPr>
-          <a:lstStyle/>
-          <a:p>
-            <a:pPr algn="l"/>
-            <a:r>
-              <a:rPr sz="1350" b="0" i="0">
+            <a:ext cx="4251960" cy="658368"/>
+          </a:xfrm>
+          <a:prstGeom prst="rect">
+            <a:avLst/>
+          </a:prstGeom>
+          <a:noFill/>
+        </p:spPr>
+        <p:txBody>
+          <a:bodyPr wrap="square" lIns="0" rIns="0" tIns="0" bIns="0">
+            <a:spAutoFit/>
+          </a:bodyPr>
+          <a:lstStyle/>
+          <a:p>
+            <a:pPr algn="l">
+              <a:spcAft>
+                <a:spcPts val="100"/>
+              </a:spcAft>
+            </a:pPr>
+            <a:r>
+              <a:rPr sz="1280">
                 <a:solidFill>
                   <a:srgbClr val="3A5961"/>
                 </a:solidFill>
                 <a:latin typeface="Calibri"/>
               </a:rPr>
-              <a:t>两套轨道并存，教学递进清晰，但长期维护容易出现功能漂移。</a:t>
+              <a:t>两套轨道并存，教学递进清晰；</a:t>
+            </a:r>
+          </a:p>
+          <a:p>
+            <a:pPr algn="l">
+              <a:spcAft>
+                <a:spcPts val="100"/>
+              </a:spcAft>
+            </a:pPr>
+            <a:r>
+              <a:rPr sz="1280">
+                <a:solidFill>
+                  <a:srgbClr val="3A5961"/>
+                </a:solidFill>
+                <a:latin typeface="Calibri"/>
+              </a:rPr>
+              <a:t>长期维护容易出现功能漂移。</a:t>
             </a:r>
           </a:p>
         </p:txBody>
@@ -13968,12 +15124,16 @@
           <a:noFill/>
         </p:spPr>
         <p:txBody>
-          <a:bodyPr wrap="none" lIns="0" rIns="0" tIns="0" bIns="0" anchor="t">
-            <a:spAutoFit/>
-          </a:bodyPr>
-          <a:lstStyle/>
-          <a:p>
-            <a:pPr algn="l"/>
+          <a:bodyPr wrap="square" lIns="0" rIns="0" tIns="0" bIns="0" anchor="t">
+            <a:spAutoFit/>
+          </a:bodyPr>
+          <a:lstStyle/>
+          <a:p>
+            <a:pPr algn="l">
+              <a:spcAft>
+                <a:spcPts val="0"/>
+              </a:spcAft>
+            </a:pPr>
             <a:r>
               <a:rPr sz="1700" b="1" i="0">
                 <a:solidFill>
@@ -13995,28 +15155,64 @@
         <p:spPr>
           <a:xfrm>
             <a:off x="6592824" y="4069080"/>
-            <a:ext cx="4343400" cy="502920"/>
-          </a:xfrm>
-          <a:prstGeom prst="rect">
-            <a:avLst/>
-          </a:prstGeom>
-          <a:noFill/>
-        </p:spPr>
-        <p:txBody>
-          <a:bodyPr wrap="none" lIns="0" rIns="0" tIns="0" bIns="0" anchor="t">
-            <a:spAutoFit/>
-          </a:bodyPr>
-          <a:lstStyle/>
-          <a:p>
-            <a:pPr algn="l"/>
-            <a:r>
-              <a:rPr sz="1350" b="0" i="0">
+            <a:ext cx="4251960" cy="658368"/>
+          </a:xfrm>
+          <a:prstGeom prst="rect">
+            <a:avLst/>
+          </a:prstGeom>
+          <a:noFill/>
+        </p:spPr>
+        <p:txBody>
+          <a:bodyPr wrap="square" lIns="0" rIns="0" tIns="0" bIns="0">
+            <a:spAutoFit/>
+          </a:bodyPr>
+          <a:lstStyle/>
+          <a:p>
+            <a:pPr algn="l">
+              <a:spcAft>
+                <a:spcPts val="100"/>
+              </a:spcAft>
+            </a:pPr>
+            <a:r>
+              <a:rPr sz="1280">
                 <a:solidFill>
                   <a:srgbClr val="3A5961"/>
                 </a:solidFill>
                 <a:latin typeface="Calibri"/>
               </a:rPr>
-              <a:t>微服务模块未发现测试；现有测试对密钥和网络敏感，不适合直接进入 CI。</a:t>
+              <a:t>微服务模块未发现测试；</a:t>
+            </a:r>
+          </a:p>
+          <a:p>
+            <a:pPr algn="l">
+              <a:spcAft>
+                <a:spcPts val="100"/>
+              </a:spcAft>
+            </a:pPr>
+            <a:r>
+              <a:rPr sz="1280">
+                <a:solidFill>
+                  <a:srgbClr val="3A5961"/>
+                </a:solidFill>
+                <a:latin typeface="Calibri"/>
+              </a:rPr>
+              <a:t>现有测试对密钥和网络敏感，</a:t>
+            </a:r>
+          </a:p>
+          <a:p>
+            <a:pPr algn="l">
+              <a:spcAft>
+                <a:spcPts val="100"/>
+              </a:spcAft>
+            </a:pPr>
+            <a:r>
+              <a:rPr sz="1280">
+                <a:solidFill>
+                  <a:srgbClr val="3A5961"/>
+                </a:solidFill>
+                <a:latin typeface="Calibri"/>
+              </a:rPr>
+              <a:t>不适合直接进入 CI。</a:t>
             </a:r>
           </a:p>
         </p:txBody>
@@ -14038,12 +15234,16 @@
           <a:noFill/>
         </p:spPr>
         <p:txBody>
-          <a:bodyPr wrap="none" lIns="0" rIns="0" tIns="0" bIns="0" anchor="t">
-            <a:spAutoFit/>
-          </a:bodyPr>
-          <a:lstStyle/>
-          <a:p>
-            <a:pPr algn="l"/>
+          <a:bodyPr wrap="square" lIns="0" rIns="0" tIns="0" bIns="0" anchor="t">
+            <a:spAutoFit/>
+          </a:bodyPr>
+          <a:lstStyle/>
+          <a:p>
+            <a:pPr algn="l">
+              <a:spcAft>
+                <a:spcPts val="0"/>
+              </a:spcAft>
+            </a:pPr>
             <a:r>
               <a:rPr sz="900" b="0" i="0">
                 <a:solidFill>
@@ -14073,12 +15273,16 @@
           <a:noFill/>
         </p:spPr>
         <p:txBody>
-          <a:bodyPr wrap="none" lIns="0" rIns="0" tIns="0" bIns="0" anchor="t">
-            <a:spAutoFit/>
-          </a:bodyPr>
-          <a:lstStyle/>
-          <a:p>
-            <a:pPr algn="r"/>
+          <a:bodyPr wrap="square" lIns="0" rIns="0" tIns="0" bIns="0" anchor="t">
+            <a:spAutoFit/>
+          </a:bodyPr>
+          <a:lstStyle/>
+          <a:p>
+            <a:pPr algn="r">
+              <a:spcAft>
+                <a:spcPts val="0"/>
+              </a:spcAft>
+            </a:pPr>
             <a:r>
               <a:rPr sz="1100" b="1" i="0">
                 <a:solidFill>
@@ -14126,20 +15330,24 @@
         <p:spPr>
           <a:xfrm>
             <a:off x="530352" y="384048"/>
-            <a:ext cx="8138160" cy="502920"/>
-          </a:xfrm>
-          <a:prstGeom prst="rect">
-            <a:avLst/>
-          </a:prstGeom>
-          <a:noFill/>
-        </p:spPr>
-        <p:txBody>
-          <a:bodyPr wrap="none" lIns="0" rIns="0" tIns="0" bIns="0" anchor="t">
-            <a:spAutoFit/>
-          </a:bodyPr>
-          <a:lstStyle/>
-          <a:p>
-            <a:pPr algn="l"/>
+            <a:ext cx="8229600" cy="502920"/>
+          </a:xfrm>
+          <a:prstGeom prst="rect">
+            <a:avLst/>
+          </a:prstGeom>
+          <a:noFill/>
+        </p:spPr>
+        <p:txBody>
+          <a:bodyPr wrap="square" lIns="0" rIns="0" tIns="0" bIns="0" anchor="t">
+            <a:spAutoFit/>
+          </a:bodyPr>
+          <a:lstStyle/>
+          <a:p>
+            <a:pPr algn="l">
+              <a:spcAft>
+                <a:spcPts val="0"/>
+              </a:spcAft>
+            </a:pPr>
             <a:r>
               <a:rPr sz="3800" b="1" i="0">
                 <a:solidFill>
@@ -14161,20 +15369,24 @@
         <p:spPr>
           <a:xfrm>
             <a:off x="530352" y="914400"/>
-            <a:ext cx="8412480" cy="320040"/>
-          </a:xfrm>
-          <a:prstGeom prst="rect">
-            <a:avLst/>
-          </a:prstGeom>
-          <a:noFill/>
-        </p:spPr>
-        <p:txBody>
-          <a:bodyPr wrap="none" lIns="0" rIns="0" tIns="0" bIns="0" anchor="t">
-            <a:spAutoFit/>
-          </a:bodyPr>
-          <a:lstStyle/>
-          <a:p>
-            <a:pPr algn="l"/>
+            <a:ext cx="8595360" cy="320040"/>
+          </a:xfrm>
+          <a:prstGeom prst="rect">
+            <a:avLst/>
+          </a:prstGeom>
+          <a:noFill/>
+        </p:spPr>
+        <p:txBody>
+          <a:bodyPr wrap="square" lIns="0" rIns="0" tIns="0" bIns="0" anchor="t">
+            <a:spAutoFit/>
+          </a:bodyPr>
+          <a:lstStyle/>
+          <a:p>
+            <a:pPr algn="l">
+              <a:spcAft>
+                <a:spcPts val="0"/>
+              </a:spcAft>
+            </a:pPr>
             <a:r>
               <a:rPr sz="1300" b="0" i="0">
                 <a:solidFill>
@@ -14247,12 +15459,16 @@
           <a:noFill/>
         </p:spPr>
         <p:txBody>
-          <a:bodyPr wrap="none" lIns="0" rIns="0" tIns="0" bIns="0" anchor="t">
-            <a:spAutoFit/>
-          </a:bodyPr>
-          <a:lstStyle/>
-          <a:p>
-            <a:pPr algn="ctr"/>
+          <a:bodyPr wrap="square" lIns="0" rIns="0" tIns="0" bIns="0" anchor="t">
+            <a:spAutoFit/>
+          </a:bodyPr>
+          <a:lstStyle/>
+          <a:p>
+            <a:pPr algn="ctr">
+              <a:spcAft>
+                <a:spcPts val="0"/>
+              </a:spcAft>
+            </a:pPr>
             <a:r>
               <a:rPr sz="800" b="1" i="0">
                 <a:solidFill>
@@ -14325,12 +15541,16 @@
           <a:noFill/>
         </p:spPr>
         <p:txBody>
-          <a:bodyPr wrap="none" lIns="0" rIns="0" tIns="0" bIns="0" anchor="t">
-            <a:spAutoFit/>
-          </a:bodyPr>
-          <a:lstStyle/>
-          <a:p>
-            <a:pPr algn="ctr"/>
+          <a:bodyPr wrap="square" lIns="0" rIns="0" tIns="0" bIns="0" anchor="t">
+            <a:spAutoFit/>
+          </a:bodyPr>
+          <a:lstStyle/>
+          <a:p>
+            <a:pPr algn="ctr">
+              <a:spcAft>
+                <a:spcPts val="0"/>
+              </a:spcAft>
+            </a:pPr>
             <a:r>
               <a:rPr sz="850" b="1" i="0">
                 <a:solidFill>
@@ -14405,12 +15625,16 @@
           <a:noFill/>
         </p:spPr>
         <p:txBody>
-          <a:bodyPr wrap="none" lIns="0" rIns="0" tIns="0" bIns="0" anchor="t">
-            <a:spAutoFit/>
-          </a:bodyPr>
-          <a:lstStyle/>
-          <a:p>
-            <a:pPr algn="l"/>
+          <a:bodyPr wrap="square" lIns="0" rIns="0" tIns="0" bIns="0" anchor="t">
+            <a:spAutoFit/>
+          </a:bodyPr>
+          <a:lstStyle/>
+          <a:p>
+            <a:pPr algn="l">
+              <a:spcAft>
+                <a:spcPts val="0"/>
+              </a:spcAft>
+            </a:pPr>
             <a:r>
               <a:rPr sz="1450" b="1" i="0">
                 <a:solidFill>
@@ -14440,12 +15664,16 @@
           <a:noFill/>
         </p:spPr>
         <p:txBody>
-          <a:bodyPr wrap="none" lIns="0" rIns="0" tIns="0" bIns="0" anchor="t">
-            <a:spAutoFit/>
-          </a:bodyPr>
-          <a:lstStyle/>
-          <a:p>
-            <a:pPr algn="l"/>
+          <a:bodyPr wrap="square" lIns="0" rIns="0" tIns="0" bIns="0" anchor="t">
+            <a:spAutoFit/>
+          </a:bodyPr>
+          <a:lstStyle/>
+          <a:p>
+            <a:pPr algn="l">
+              <a:spcAft>
+                <a:spcPts val="0"/>
+              </a:spcAft>
+            </a:pPr>
             <a:r>
               <a:rPr sz="1280" b="0" i="0">
                 <a:solidFill>
@@ -14518,12 +15746,16 @@
           <a:noFill/>
         </p:spPr>
         <p:txBody>
-          <a:bodyPr wrap="none" lIns="0" rIns="0" tIns="0" bIns="0" anchor="t">
-            <a:spAutoFit/>
-          </a:bodyPr>
-          <a:lstStyle/>
-          <a:p>
-            <a:pPr algn="ctr"/>
+          <a:bodyPr wrap="square" lIns="0" rIns="0" tIns="0" bIns="0" anchor="t">
+            <a:spAutoFit/>
+          </a:bodyPr>
+          <a:lstStyle/>
+          <a:p>
+            <a:pPr algn="ctr">
+              <a:spcAft>
+                <a:spcPts val="0"/>
+              </a:spcAft>
+            </a:pPr>
             <a:r>
               <a:rPr sz="850" b="1" i="0">
                 <a:solidFill>
@@ -14598,12 +15830,16 @@
           <a:noFill/>
         </p:spPr>
         <p:txBody>
-          <a:bodyPr wrap="none" lIns="0" rIns="0" tIns="0" bIns="0" anchor="t">
-            <a:spAutoFit/>
-          </a:bodyPr>
-          <a:lstStyle/>
-          <a:p>
-            <a:pPr algn="l"/>
+          <a:bodyPr wrap="square" lIns="0" rIns="0" tIns="0" bIns="0" anchor="t">
+            <a:spAutoFit/>
+          </a:bodyPr>
+          <a:lstStyle/>
+          <a:p>
+            <a:pPr algn="l">
+              <a:spcAft>
+                <a:spcPts val="0"/>
+              </a:spcAft>
+            </a:pPr>
             <a:r>
               <a:rPr sz="1450" b="1" i="0">
                 <a:solidFill>
@@ -14633,12 +15869,16 @@
           <a:noFill/>
         </p:spPr>
         <p:txBody>
-          <a:bodyPr wrap="none" lIns="0" rIns="0" tIns="0" bIns="0" anchor="t">
-            <a:spAutoFit/>
-          </a:bodyPr>
-          <a:lstStyle/>
-          <a:p>
-            <a:pPr algn="l"/>
+          <a:bodyPr wrap="square" lIns="0" rIns="0" tIns="0" bIns="0" anchor="t">
+            <a:spAutoFit/>
+          </a:bodyPr>
+          <a:lstStyle/>
+          <a:p>
+            <a:pPr algn="l">
+              <a:spcAft>
+                <a:spcPts val="0"/>
+              </a:spcAft>
+            </a:pPr>
             <a:r>
               <a:rPr sz="1280" b="0" i="0">
                 <a:solidFill>
@@ -14711,12 +15951,16 @@
           <a:noFill/>
         </p:spPr>
         <p:txBody>
-          <a:bodyPr wrap="none" lIns="0" rIns="0" tIns="0" bIns="0" anchor="t">
-            <a:spAutoFit/>
-          </a:bodyPr>
-          <a:lstStyle/>
-          <a:p>
-            <a:pPr algn="ctr"/>
+          <a:bodyPr wrap="square" lIns="0" rIns="0" tIns="0" bIns="0" anchor="t">
+            <a:spAutoFit/>
+          </a:bodyPr>
+          <a:lstStyle/>
+          <a:p>
+            <a:pPr algn="ctr">
+              <a:spcAft>
+                <a:spcPts val="0"/>
+              </a:spcAft>
+            </a:pPr>
             <a:r>
               <a:rPr sz="850" b="1" i="0">
                 <a:solidFill>
@@ -14791,12 +16035,16 @@
           <a:noFill/>
         </p:spPr>
         <p:txBody>
-          <a:bodyPr wrap="none" lIns="0" rIns="0" tIns="0" bIns="0" anchor="t">
-            <a:spAutoFit/>
-          </a:bodyPr>
-          <a:lstStyle/>
-          <a:p>
-            <a:pPr algn="l"/>
+          <a:bodyPr wrap="square" lIns="0" rIns="0" tIns="0" bIns="0" anchor="t">
+            <a:spAutoFit/>
+          </a:bodyPr>
+          <a:lstStyle/>
+          <a:p>
+            <a:pPr algn="l">
+              <a:spcAft>
+                <a:spcPts val="0"/>
+              </a:spcAft>
+            </a:pPr>
             <a:r>
               <a:rPr sz="1450" b="1" i="0">
                 <a:solidFill>
@@ -14826,12 +16074,16 @@
           <a:noFill/>
         </p:spPr>
         <p:txBody>
-          <a:bodyPr wrap="none" lIns="0" rIns="0" tIns="0" bIns="0" anchor="t">
-            <a:spAutoFit/>
-          </a:bodyPr>
-          <a:lstStyle/>
-          <a:p>
-            <a:pPr algn="l"/>
+          <a:bodyPr wrap="square" lIns="0" rIns="0" tIns="0" bIns="0" anchor="t">
+            <a:spAutoFit/>
+          </a:bodyPr>
+          <a:lstStyle/>
+          <a:p>
+            <a:pPr algn="l">
+              <a:spcAft>
+                <a:spcPts val="0"/>
+              </a:spcAft>
+            </a:pPr>
             <a:r>
               <a:rPr sz="1280" b="0" i="0">
                 <a:solidFill>
@@ -14904,12 +16156,16 @@
           <a:noFill/>
         </p:spPr>
         <p:txBody>
-          <a:bodyPr wrap="none" lIns="0" rIns="0" tIns="0" bIns="0" anchor="t">
-            <a:spAutoFit/>
-          </a:bodyPr>
-          <a:lstStyle/>
-          <a:p>
-            <a:pPr algn="ctr"/>
+          <a:bodyPr wrap="square" lIns="0" rIns="0" tIns="0" bIns="0" anchor="t">
+            <a:spAutoFit/>
+          </a:bodyPr>
+          <a:lstStyle/>
+          <a:p>
+            <a:pPr algn="ctr">
+              <a:spcAft>
+                <a:spcPts val="0"/>
+              </a:spcAft>
+            </a:pPr>
             <a:r>
               <a:rPr sz="850" b="1" i="0">
                 <a:solidFill>
@@ -14984,12 +16240,16 @@
           <a:noFill/>
         </p:spPr>
         <p:txBody>
-          <a:bodyPr wrap="none" lIns="0" rIns="0" tIns="0" bIns="0" anchor="t">
-            <a:spAutoFit/>
-          </a:bodyPr>
-          <a:lstStyle/>
-          <a:p>
-            <a:pPr algn="l"/>
+          <a:bodyPr wrap="square" lIns="0" rIns="0" tIns="0" bIns="0" anchor="t">
+            <a:spAutoFit/>
+          </a:bodyPr>
+          <a:lstStyle/>
+          <a:p>
+            <a:pPr algn="l">
+              <a:spcAft>
+                <a:spcPts val="0"/>
+              </a:spcAft>
+            </a:pPr>
             <a:r>
               <a:rPr sz="1450" b="1" i="0">
                 <a:solidFill>
@@ -15019,12 +16279,16 @@
           <a:noFill/>
         </p:spPr>
         <p:txBody>
-          <a:bodyPr wrap="none" lIns="0" rIns="0" tIns="0" bIns="0" anchor="t">
-            <a:spAutoFit/>
-          </a:bodyPr>
-          <a:lstStyle/>
-          <a:p>
-            <a:pPr algn="l"/>
+          <a:bodyPr wrap="square" lIns="0" rIns="0" tIns="0" bIns="0" anchor="t">
+            <a:spAutoFit/>
+          </a:bodyPr>
+          <a:lstStyle/>
+          <a:p>
+            <a:pPr algn="l">
+              <a:spcAft>
+                <a:spcPts val="0"/>
+              </a:spcAft>
+            </a:pPr>
             <a:r>
               <a:rPr sz="1280" b="0" i="0">
                 <a:solidFill>
@@ -15097,12 +16361,16 @@
           <a:noFill/>
         </p:spPr>
         <p:txBody>
-          <a:bodyPr wrap="none" lIns="0" rIns="0" tIns="0" bIns="0" anchor="t">
-            <a:spAutoFit/>
-          </a:bodyPr>
-          <a:lstStyle/>
-          <a:p>
-            <a:pPr algn="ctr"/>
+          <a:bodyPr wrap="square" lIns="0" rIns="0" tIns="0" bIns="0" anchor="t">
+            <a:spAutoFit/>
+          </a:bodyPr>
+          <a:lstStyle/>
+          <a:p>
+            <a:pPr algn="ctr">
+              <a:spcAft>
+                <a:spcPts val="0"/>
+              </a:spcAft>
+            </a:pPr>
             <a:r>
               <a:rPr sz="850" b="1" i="0">
                 <a:solidFill>
@@ -15177,12 +16445,16 @@
           <a:noFill/>
         </p:spPr>
         <p:txBody>
-          <a:bodyPr wrap="none" lIns="0" rIns="0" tIns="0" bIns="0" anchor="t">
-            <a:spAutoFit/>
-          </a:bodyPr>
-          <a:lstStyle/>
-          <a:p>
-            <a:pPr algn="l"/>
+          <a:bodyPr wrap="square" lIns="0" rIns="0" tIns="0" bIns="0" anchor="t">
+            <a:spAutoFit/>
+          </a:bodyPr>
+          <a:lstStyle/>
+          <a:p>
+            <a:pPr algn="l">
+              <a:spcAft>
+                <a:spcPts val="0"/>
+              </a:spcAft>
+            </a:pPr>
             <a:r>
               <a:rPr sz="1450" b="1" i="0">
                 <a:solidFill>
@@ -15212,12 +16484,16 @@
           <a:noFill/>
         </p:spPr>
         <p:txBody>
-          <a:bodyPr wrap="none" lIns="0" rIns="0" tIns="0" bIns="0" anchor="t">
-            <a:spAutoFit/>
-          </a:bodyPr>
-          <a:lstStyle/>
-          <a:p>
-            <a:pPr algn="l"/>
+          <a:bodyPr wrap="square" lIns="0" rIns="0" tIns="0" bIns="0" anchor="t">
+            <a:spAutoFit/>
+          </a:bodyPr>
+          <a:lstStyle/>
+          <a:p>
+            <a:pPr algn="l">
+              <a:spcAft>
+                <a:spcPts val="0"/>
+              </a:spcAft>
+            </a:pPr>
             <a:r>
               <a:rPr sz="1280" b="0" i="0">
                 <a:solidFill>
@@ -15247,12 +16523,16 @@
           <a:noFill/>
         </p:spPr>
         <p:txBody>
-          <a:bodyPr wrap="none" lIns="0" rIns="0" tIns="0" bIns="0" anchor="t">
-            <a:spAutoFit/>
-          </a:bodyPr>
-          <a:lstStyle/>
-          <a:p>
-            <a:pPr algn="l"/>
+          <a:bodyPr wrap="square" lIns="0" rIns="0" tIns="0" bIns="0" anchor="t">
+            <a:spAutoFit/>
+          </a:bodyPr>
+          <a:lstStyle/>
+          <a:p>
+            <a:pPr algn="l">
+              <a:spcAft>
+                <a:spcPts val="0"/>
+              </a:spcAft>
+            </a:pPr>
             <a:r>
               <a:rPr sz="900" b="0" i="0">
                 <a:solidFill>
@@ -15282,12 +16562,16 @@
           <a:noFill/>
         </p:spPr>
         <p:txBody>
-          <a:bodyPr wrap="none" lIns="0" rIns="0" tIns="0" bIns="0" anchor="t">
-            <a:spAutoFit/>
-          </a:bodyPr>
-          <a:lstStyle/>
-          <a:p>
-            <a:pPr algn="r"/>
+          <a:bodyPr wrap="square" lIns="0" rIns="0" tIns="0" bIns="0" anchor="t">
+            <a:spAutoFit/>
+          </a:bodyPr>
+          <a:lstStyle/>
+          <a:p>
+            <a:pPr algn="r">
+              <a:spcAft>
+                <a:spcPts val="0"/>
+              </a:spcAft>
+            </a:pPr>
             <a:r>
               <a:rPr sz="1100" b="1" i="0">
                 <a:solidFill>
